--- a/benchmark-visuels/2026-10-24_benchmark-visuels-videos.pptx
+++ b/benchmark-visuels/2026-10-24_benchmark-visuels-videos.pptx
@@ -3300,7 +3300,7 @@
                 </a:solidFill>
                 <a:latin typeface="Space Grotesk"/>
               </a:rPr>
-              <a:t>22 marques · 330 publications Instagram · 132 publications LinkedIn</a:t>
+              <a:t>22 marques · 330 publications Instagram · 118 publications LinkedIn</a:t>
             </a:r>
           </a:p>
           <a:p>
@@ -5561,7 +5561,7 @@
                 </a:solidFill>
                 <a:latin typeface="Funnel Display"/>
               </a:rPr>
-              <a:t>B2B : sur LinkedIn, les gens et les étapes passent devant le produit</a:t>
+              <a:t>LinkedIn B2B : les gens et les étapes d'abord</a:t>
             </a:r>
           </a:p>
         </p:txBody>
@@ -6559,7 +6559,7 @@
                 </a:solidFill>
                 <a:latin typeface="Work Sans"/>
               </a:rPr>
-              <a:t>Image et vidéo font jeu égal (1,02 et 1,03 fois la médiane). Le carrousel en PDF fait moins (0,62), le texte seul beaucoup moins (0,28).</a:t>
+              <a:t>Image et vidéo font jeu égal (1,02 et 1,04 fois la médiane). Le carrousel en PDF fait moins (0,67), le texte seul beaucoup moins (0,28).</a:t>
             </a:r>
           </a:p>
           <a:p>
@@ -10524,7 +10524,7 @@
                 </a:solidFill>
                 <a:latin typeface="Work Sans"/>
               </a:rPr>
-              <a:t>•  La page LinkedIn de Payfit relevée publie surtout en espagnol.</a:t>
+              <a:t>•  La page LinkedIn de Payfit relevée publie surtout en espagnol : elle a été retirée du calcul LinkedIn.</a:t>
             </a:r>
           </a:p>
         </p:txBody>
@@ -10751,7 +10751,7 @@
                 </a:solidFill>
                 <a:latin typeface="Work Sans"/>
               </a:rPr>
-              <a:t>•  Le détail des 462 publications, avec leurs liens, est dans le tableur joint.</a:t>
+              <a:t>•  Le détail des 448 publications, avec leurs liens, est dans le tableur joint.</a:t>
             </a:r>
           </a:p>
         </p:txBody>
@@ -13351,7 +13351,7 @@
                 </a:solidFill>
                 <a:latin typeface="Work Sans"/>
               </a:rPr>
-              <a:t>Les 15 dernières publications Instagram de 22 marques (330 au total), le 24/10/2026, avec le robot de collecte Apify. Pour 11 marques B2B, les 12 dernières publications LinkedIn (132).</a:t>
+              <a:t>Les 15 dernières publications Instagram de 22 marques (330 au total), le 24/10/2026, avec le robot de collecte Apify. Pour 10 marques B2B, les 12 dernières publications LinkedIn (118).</a:t>
             </a:r>
           </a:p>
           <a:p>
@@ -15971,7 +15971,7 @@
         <p:spPr>
           <a:xfrm>
             <a:off x="3017520" y="1737360"/>
-            <a:ext cx="5120640" cy="640080"/>
+            <a:ext cx="4206240" cy="640080"/>
           </a:xfrm>
           <a:prstGeom prst="rect">
             <a:avLst/>
@@ -16014,7 +16014,7 @@
         </p:nvSpPr>
         <p:spPr>
           <a:xfrm>
-            <a:off x="8229599" y="1847088"/>
+            <a:off x="7315199" y="1847088"/>
             <a:ext cx="1097280" cy="457200"/>
           </a:xfrm>
           <a:prstGeom prst="rect">
@@ -16099,7 +16099,7 @@
         <p:spPr>
           <a:xfrm>
             <a:off x="3017520" y="2697480"/>
-            <a:ext cx="1359985" cy="640080"/>
+            <a:ext cx="1117130" cy="640080"/>
           </a:xfrm>
           <a:prstGeom prst="rect">
             <a:avLst/>
@@ -16142,7 +16142,7 @@
         </p:nvSpPr>
         <p:spPr>
           <a:xfrm>
-            <a:off x="4468945" y="2807208"/>
+            <a:off x="4226090" y="2807208"/>
             <a:ext cx="1097280" cy="457200"/>
           </a:xfrm>
           <a:prstGeom prst="rect">
@@ -16227,7 +16227,7 @@
         <p:spPr>
           <a:xfrm>
             <a:off x="3017520" y="3657600"/>
-            <a:ext cx="1064336" cy="640080"/>
+            <a:ext cx="874276" cy="640080"/>
           </a:xfrm>
           <a:prstGeom prst="rect">
             <a:avLst/>
@@ -16270,7 +16270,7 @@
         </p:nvSpPr>
         <p:spPr>
           <a:xfrm>
-            <a:off x="4173296" y="3767328"/>
+            <a:off x="3983236" y="3767328"/>
             <a:ext cx="1097280" cy="457200"/>
           </a:xfrm>
           <a:prstGeom prst="rect">
@@ -16355,7 +16355,7 @@
         <p:spPr>
           <a:xfrm>
             <a:off x="3017520" y="4617720"/>
-            <a:ext cx="934250" cy="640080"/>
+            <a:ext cx="767420" cy="640080"/>
           </a:xfrm>
           <a:prstGeom prst="rect">
             <a:avLst/>
@@ -16398,7 +16398,7 @@
         </p:nvSpPr>
         <p:spPr>
           <a:xfrm>
-            <a:off x="4043210" y="4727448"/>
+            <a:off x="3876380" y="4727448"/>
             <a:ext cx="1097280" cy="457200"/>
           </a:xfrm>
           <a:prstGeom prst="rect">

--- a/benchmark-visuels/2026-10-24_benchmark-visuels-videos.pptx
+++ b/benchmark-visuels/2026-10-24_benchmark-visuels-videos.pptx
@@ -6793,7 +6793,7 @@
                 </a:solidFill>
                 <a:latin typeface="Funnel Display"/>
               </a:rPr>
-              <a:t>Facebook : là où les marques ivoiriennes et sénégalaises font du chiffre</a:t>
+              <a:t>Facebook : là où les clients réagissent</a:t>
             </a:r>
           </a:p>
         </p:txBody>
@@ -13246,7 +13246,7 @@
                 </a:solidFill>
                 <a:latin typeface="Work Sans"/>
               </a:rPr>
-              <a:t>Pour toutes ces marques, Instagram fait les plus petits chiffres. Juger leur présence sur Instagram seul les sous-estime.</a:t>
+              <a:t>Instagram fait moins que TikTok pour les 8 marques, et moins que Facebook pour 6 sur 8 (exceptions : Yas et Orange CI). Juger ces marques sur Instagram seul les sous-estime.</a:t>
             </a:r>
           </a:p>
           <a:p>

--- a/benchmark-visuels/2026-10-24_benchmark-visuels-videos.pptx
+++ b/benchmark-visuels/2026-10-24_benchmark-visuels-videos.pptx
@@ -25,6 +25,9 @@
     <p:sldId id="273" r:id="rId24"/>
     <p:sldId id="274" r:id="rId25"/>
     <p:sldId id="275" r:id="rId26"/>
+    <p:sldId id="276" r:id="rId27"/>
+    <p:sldId id="277" r:id="rId28"/>
+    <p:sldId id="278" r:id="rId29"/>
   </p:sldIdLst>
   <p:sldSz cx="12192000" cy="6858000" type="screen4x3"/>
   <p:notesSz cx="6858000" cy="9144000"/>
@@ -3304,7 +3307,7 @@
                 </a:solidFill>
                 <a:latin typeface="Space Grotesk"/>
               </a:rPr>
-              <a:t>22 marques · 330 posts Instagram · 118 LinkedIn · 165 Facebook · 150 TikTok</a:t>
+              <a:t>22 marques · 330 posts Instagram · 118 LinkedIn · 345 Facebook · 285 TikTok</a:t>
             </a:r>
           </a:p>
           <a:p>
@@ -13434,7 +13437,7 @@
                 </a:solidFill>
                 <a:latin typeface="Space Grotesk"/>
               </a:rPr>
-              <a:t>LES QUATRE FAMILLES DE CONTENU</a:t>
+              <a:t>FACEBOOK ET TIKTOK</a:t>
             </a:r>
           </a:p>
         </p:txBody>
@@ -13476,7 +13479,7 @@
                 </a:solidFill>
                 <a:latin typeface="Funnel Display"/>
               </a:rPr>
-              <a:t>Les quatre familles de contenu, vues sur le terrain</a:t>
+              <a:t>Facebook au Nigeria et en France : un réseau secondaire</a:t>
             </a:r>
           </a:p>
         </p:txBody>
@@ -13633,106 +13636,1537 @@
           </a:p>
         </p:txBody>
       </p:sp>
-      <p:sp>
-        <p:nvSpPr>
-          <p:cNvPr id="9" name="Rectangle 8"/>
-          <p:cNvSpPr/>
-          <p:nvPr/>
-        </p:nvSpPr>
-        <p:spPr>
-          <a:xfrm>
-            <a:off x="548640" y="1463040"/>
-            <a:ext cx="5468112" cy="2286000"/>
-          </a:xfrm>
-          <a:prstGeom prst="rect">
-            <a:avLst/>
-          </a:prstGeom>
-          <a:solidFill>
-            <a:srgbClr val="FFFFFF"/>
-          </a:solidFill>
-          <a:ln w="12700">
-            <a:solidFill>
-              <a:srgbClr val="E4E8ED"/>
-            </a:solidFill>
-          </a:ln>
-          <a:effectLst/>
-        </p:spPr>
-        <p:style>
-          <a:lnRef idx="1">
-            <a:schemeClr val="accent1"/>
-          </a:lnRef>
-          <a:fillRef idx="3">
-            <a:schemeClr val="accent1"/>
-          </a:fillRef>
-          <a:effectRef idx="2">
-            <a:schemeClr val="accent1"/>
-          </a:effectRef>
-          <a:fontRef idx="minor">
-            <a:schemeClr val="lt1"/>
-          </a:fontRef>
-        </p:style>
-        <p:txBody>
-          <a:bodyPr rtlCol="0" anchor="ctr"/>
-          <a:lstStyle/>
-          <a:p>
-            <a:pPr algn="ctr"/>
-          </a:p>
-        </p:txBody>
-      </p:sp>
-      <p:sp>
-        <p:nvSpPr>
-          <p:cNvPr id="10" name="Rectangle 9"/>
-          <p:cNvSpPr/>
-          <p:nvPr/>
-        </p:nvSpPr>
-        <p:spPr>
-          <a:xfrm>
-            <a:off x="548640" y="1463040"/>
-            <a:ext cx="82296" cy="2286000"/>
-          </a:xfrm>
-          <a:prstGeom prst="rect">
-            <a:avLst/>
-          </a:prstGeom>
-          <a:solidFill>
-            <a:srgbClr val="007ABB"/>
-          </a:solidFill>
-          <a:ln>
-            <a:noFill/>
-          </a:ln>
-          <a:effectLst/>
-        </p:spPr>
-        <p:style>
-          <a:lnRef idx="1">
-            <a:schemeClr val="accent1"/>
-          </a:lnRef>
-          <a:fillRef idx="3">
-            <a:schemeClr val="accent1"/>
-          </a:fillRef>
-          <a:effectRef idx="2">
-            <a:schemeClr val="accent1"/>
-          </a:effectRef>
-          <a:fontRef idx="minor">
-            <a:schemeClr val="lt1"/>
-          </a:fontRef>
-        </p:style>
-        <p:txBody>
-          <a:bodyPr rtlCol="0" anchor="ctr"/>
-          <a:lstStyle/>
-          <a:p>
-            <a:pPr algn="ctr"/>
-          </a:p>
-        </p:txBody>
-      </p:sp>
-      <p:sp>
-        <p:nvSpPr>
-          <p:cNvPr id="11" name="TextBox 10"/>
+      <p:graphicFrame>
+        <p:nvGraphicFramePr>
+          <p:cNvPr id="9" name="Table 8"/>
+          <p:cNvGraphicFramePr>
+            <a:graphicFrameLocks noGrp="1"/>
+          </p:cNvGraphicFramePr>
+          <p:nvPr/>
+        </p:nvGraphicFramePr>
+        <p:xfrm>
+          <a:off x="548640" y="1371600"/>
+          <a:ext cx="7040880" cy="4754880"/>
+        </p:xfrm>
+        <a:graphic>
+          <a:graphicData uri="http://schemas.openxmlformats.org/drawingml/2006/table">
+            <a:tbl>
+              <a:tblPr firstRow="1" bandRow="1">
+                <a:tableStyleId>{5C22544A-7EE6-4342-B048-85BDC9FD1C3A}</a:tableStyleId>
+              </a:tblPr>
+              <a:tblGrid>
+                <a:gridCol w="1828800"/>
+                <a:gridCol w="1600200"/>
+                <a:gridCol w="1234440"/>
+                <a:gridCol w="1188720"/>
+                <a:gridCol w="1188720"/>
+              </a:tblGrid>
+              <a:tr h="365760">
+                <a:tc>
+                  <a:txBody>
+                    <a:bodyPr/>
+                    <a:lstStyle/>
+                    <a:p>
+                      <a:r>
+                        <a:rPr sz="1000" b="1">
+                          <a:solidFill>
+                            <a:srgbClr val="FFFFFF"/>
+                          </a:solidFill>
+                          <a:latin typeface="Space Grotesk"/>
+                        </a:rPr>
+                        <a:t>Page Facebook</a:t>
+                      </a:r>
+                    </a:p>
+                  </a:txBody>
+                  <a:tcPr marL="54864" marR="54864" marT="18288" marB="18288" anchor="ctr">
+                    <a:solidFill>
+                      <a:srgbClr val="232754"/>
+                    </a:solidFill>
+                  </a:tcPr>
+                </a:tc>
+                <a:tc>
+                  <a:txBody>
+                    <a:bodyPr/>
+                    <a:lstStyle/>
+                    <a:p>
+                      <a:r>
+                        <a:rPr sz="1000" b="1">
+                          <a:solidFill>
+                            <a:srgbClr val="FFFFFF"/>
+                          </a:solidFill>
+                          <a:latin typeface="Space Grotesk"/>
+                        </a:rPr>
+                        <a:t>Période des 15 posts</a:t>
+                      </a:r>
+                    </a:p>
+                  </a:txBody>
+                  <a:tcPr marL="54864" marR="54864" marT="18288" marB="18288" anchor="ctr">
+                    <a:solidFill>
+                      <a:srgbClr val="232754"/>
+                    </a:solidFill>
+                  </a:tcPr>
+                </a:tc>
+                <a:tc>
+                  <a:txBody>
+                    <a:bodyPr/>
+                    <a:lstStyle/>
+                    <a:p>
+                      <a:r>
+                        <a:rPr sz="1000" b="1">
+                          <a:solidFill>
+                            <a:srgbClr val="FFFFFF"/>
+                          </a:solidFill>
+                          <a:latin typeface="Space Grotesk"/>
+                        </a:rPr>
+                        <a:t>Médiane réactions</a:t>
+                      </a:r>
+                    </a:p>
+                  </a:txBody>
+                  <a:tcPr marL="54864" marR="54864" marT="18288" marB="18288" anchor="ctr">
+                    <a:solidFill>
+                      <a:srgbClr val="232754"/>
+                    </a:solidFill>
+                  </a:tcPr>
+                </a:tc>
+                <a:tc>
+                  <a:txBody>
+                    <a:bodyPr/>
+                    <a:lstStyle/>
+                    <a:p>
+                      <a:r>
+                        <a:rPr sz="1000" b="1">
+                          <a:solidFill>
+                            <a:srgbClr val="FFFFFF"/>
+                          </a:solidFill>
+                          <a:latin typeface="Space Grotesk"/>
+                        </a:rPr>
+                        <a:t>Médiane comment.</a:t>
+                      </a:r>
+                    </a:p>
+                  </a:txBody>
+                  <a:tcPr marL="54864" marR="54864" marT="18288" marB="18288" anchor="ctr">
+                    <a:solidFill>
+                      <a:srgbClr val="232754"/>
+                    </a:solidFill>
+                  </a:tcPr>
+                </a:tc>
+                <a:tc>
+                  <a:txBody>
+                    <a:bodyPr/>
+                    <a:lstStyle/>
+                    <a:p>
+                      <a:r>
+                        <a:rPr sz="1000" b="1">
+                          <a:solidFill>
+                            <a:srgbClr val="FFFFFF"/>
+                          </a:solidFill>
+                          <a:latin typeface="Space Grotesk"/>
+                        </a:rPr>
+                        <a:t>Meilleur post</a:t>
+                      </a:r>
+                    </a:p>
+                  </a:txBody>
+                  <a:tcPr marL="54864" marR="54864" marT="18288" marB="18288" anchor="ctr">
+                    <a:solidFill>
+                      <a:srgbClr val="232754"/>
+                    </a:solidFill>
+                  </a:tcPr>
+                </a:tc>
+              </a:tr>
+              <a:tr h="365760">
+                <a:tc>
+                  <a:txBody>
+                    <a:bodyPr/>
+                    <a:lstStyle/>
+                    <a:p>
+                      <a:r>
+                        <a:rPr sz="1000">
+                          <a:solidFill>
+                            <a:srgbClr val="2B2A35"/>
+                          </a:solidFill>
+                          <a:latin typeface="Work Sans"/>
+                        </a:rPr>
+                        <a:t>MTN Nigeria (NG)</a:t>
+                      </a:r>
+                    </a:p>
+                  </a:txBody>
+                  <a:tcPr marL="54864" marR="54864" marT="18288" marB="18288" anchor="ctr">
+                    <a:solidFill>
+                      <a:srgbClr val="FFFFFF"/>
+                    </a:solidFill>
+                  </a:tcPr>
+                </a:tc>
+                <a:tc>
+                  <a:txBody>
+                    <a:bodyPr/>
+                    <a:lstStyle/>
+                    <a:p>
+                      <a:pPr algn="ctr"/>
+                      <a:r>
+                        <a:rPr sz="1000">
+                          <a:solidFill>
+                            <a:srgbClr val="2B2A35"/>
+                          </a:solidFill>
+                          <a:latin typeface="Work Sans"/>
+                        </a:rPr>
+                        <a:t>19/10/26 au 24/10</a:t>
+                      </a:r>
+                    </a:p>
+                  </a:txBody>
+                  <a:tcPr marL="54864" marR="54864" marT="18288" marB="18288" anchor="ctr">
+                    <a:solidFill>
+                      <a:srgbClr val="FFFFFF"/>
+                    </a:solidFill>
+                  </a:tcPr>
+                </a:tc>
+                <a:tc>
+                  <a:txBody>
+                    <a:bodyPr/>
+                    <a:lstStyle/>
+                    <a:p>
+                      <a:pPr algn="ctr"/>
+                      <a:r>
+                        <a:rPr sz="1000">
+                          <a:solidFill>
+                            <a:srgbClr val="2B2A35"/>
+                          </a:solidFill>
+                          <a:latin typeface="Work Sans"/>
+                        </a:rPr>
+                        <a:t>92</a:t>
+                      </a:r>
+                    </a:p>
+                  </a:txBody>
+                  <a:tcPr marL="54864" marR="54864" marT="18288" marB="18288" anchor="ctr">
+                    <a:solidFill>
+                      <a:srgbClr val="FFFFFF"/>
+                    </a:solidFill>
+                  </a:tcPr>
+                </a:tc>
+                <a:tc>
+                  <a:txBody>
+                    <a:bodyPr/>
+                    <a:lstStyle/>
+                    <a:p>
+                      <a:pPr algn="ctr"/>
+                      <a:r>
+                        <a:rPr sz="1000">
+                          <a:solidFill>
+                            <a:srgbClr val="2B2A35"/>
+                          </a:solidFill>
+                          <a:latin typeface="Work Sans"/>
+                        </a:rPr>
+                        <a:t>32</a:t>
+                      </a:r>
+                    </a:p>
+                  </a:txBody>
+                  <a:tcPr marL="54864" marR="54864" marT="18288" marB="18288" anchor="ctr">
+                    <a:solidFill>
+                      <a:srgbClr val="FFFFFF"/>
+                    </a:solidFill>
+                  </a:tcPr>
+                </a:tc>
+                <a:tc>
+                  <a:txBody>
+                    <a:bodyPr/>
+                    <a:lstStyle/>
+                    <a:p>
+                      <a:r>
+                        <a:rPr sz="1000">
+                          <a:solidFill>
+                            <a:srgbClr val="2B2A35"/>
+                          </a:solidFill>
+                          <a:latin typeface="Work Sans"/>
+                        </a:rPr>
+                        <a:t>image · 665</a:t>
+                      </a:r>
+                    </a:p>
+                  </a:txBody>
+                  <a:tcPr marL="54864" marR="54864" marT="18288" marB="18288" anchor="ctr">
+                    <a:solidFill>
+                      <a:srgbClr val="FFFFFF"/>
+                    </a:solidFill>
+                  </a:tcPr>
+                </a:tc>
+              </a:tr>
+              <a:tr h="365760">
+                <a:tc>
+                  <a:txBody>
+                    <a:bodyPr/>
+                    <a:lstStyle/>
+                    <a:p>
+                      <a:r>
+                        <a:rPr sz="1000">
+                          <a:solidFill>
+                            <a:srgbClr val="2B2A35"/>
+                          </a:solidFill>
+                          <a:latin typeface="Work Sans"/>
+                        </a:rPr>
+                        <a:t>Chowdeck (NG)</a:t>
+                      </a:r>
+                    </a:p>
+                  </a:txBody>
+                  <a:tcPr marL="54864" marR="54864" marT="18288" marB="18288" anchor="ctr">
+                    <a:solidFill>
+                      <a:srgbClr val="EEF2F6"/>
+                    </a:solidFill>
+                  </a:tcPr>
+                </a:tc>
+                <a:tc>
+                  <a:txBody>
+                    <a:bodyPr/>
+                    <a:lstStyle/>
+                    <a:p>
+                      <a:pPr algn="ctr"/>
+                      <a:r>
+                        <a:rPr sz="1000">
+                          <a:solidFill>
+                            <a:srgbClr val="2B2A35"/>
+                          </a:solidFill>
+                          <a:latin typeface="Work Sans"/>
+                        </a:rPr>
+                        <a:t>29/08/26 au 21/10</a:t>
+                      </a:r>
+                    </a:p>
+                  </a:txBody>
+                  <a:tcPr marL="54864" marR="54864" marT="18288" marB="18288" anchor="ctr">
+                    <a:solidFill>
+                      <a:srgbClr val="EEF2F6"/>
+                    </a:solidFill>
+                  </a:tcPr>
+                </a:tc>
+                <a:tc>
+                  <a:txBody>
+                    <a:bodyPr/>
+                    <a:lstStyle/>
+                    <a:p>
+                      <a:pPr algn="ctr"/>
+                      <a:r>
+                        <a:rPr sz="1000">
+                          <a:solidFill>
+                            <a:srgbClr val="2B2A35"/>
+                          </a:solidFill>
+                          <a:latin typeface="Work Sans"/>
+                        </a:rPr>
+                        <a:t>20</a:t>
+                      </a:r>
+                    </a:p>
+                  </a:txBody>
+                  <a:tcPr marL="54864" marR="54864" marT="18288" marB="18288" anchor="ctr">
+                    <a:solidFill>
+                      <a:srgbClr val="EEF2F6"/>
+                    </a:solidFill>
+                  </a:tcPr>
+                </a:tc>
+                <a:tc>
+                  <a:txBody>
+                    <a:bodyPr/>
+                    <a:lstStyle/>
+                    <a:p>
+                      <a:pPr algn="ctr"/>
+                      <a:r>
+                        <a:rPr sz="1000">
+                          <a:solidFill>
+                            <a:srgbClr val="2B2A35"/>
+                          </a:solidFill>
+                          <a:latin typeface="Work Sans"/>
+                        </a:rPr>
+                        <a:t>2</a:t>
+                      </a:r>
+                    </a:p>
+                  </a:txBody>
+                  <a:tcPr marL="54864" marR="54864" marT="18288" marB="18288" anchor="ctr">
+                    <a:solidFill>
+                      <a:srgbClr val="EEF2F6"/>
+                    </a:solidFill>
+                  </a:tcPr>
+                </a:tc>
+                <a:tc>
+                  <a:txBody>
+                    <a:bodyPr/>
+                    <a:lstStyle/>
+                    <a:p>
+                      <a:r>
+                        <a:rPr sz="1000">
+                          <a:solidFill>
+                            <a:srgbClr val="2B2A35"/>
+                          </a:solidFill>
+                          <a:latin typeface="Work Sans"/>
+                        </a:rPr>
+                        <a:t>vidéo · 35</a:t>
+                      </a:r>
+                    </a:p>
+                  </a:txBody>
+                  <a:tcPr marL="54864" marR="54864" marT="18288" marB="18288" anchor="ctr">
+                    <a:solidFill>
+                      <a:srgbClr val="EEF2F6"/>
+                    </a:solidFill>
+                  </a:tcPr>
+                </a:tc>
+              </a:tr>
+              <a:tr h="365760">
+                <a:tc>
+                  <a:txBody>
+                    <a:bodyPr/>
+                    <a:lstStyle/>
+                    <a:p>
+                      <a:r>
+                        <a:rPr sz="1000">
+                          <a:solidFill>
+                            <a:srgbClr val="2B2A35"/>
+                          </a:solidFill>
+                          <a:latin typeface="Work Sans"/>
+                        </a:rPr>
+                        <a:t>GTBank (NG)</a:t>
+                      </a:r>
+                    </a:p>
+                  </a:txBody>
+                  <a:tcPr marL="54864" marR="54864" marT="18288" marB="18288" anchor="ctr">
+                    <a:solidFill>
+                      <a:srgbClr val="FFFFFF"/>
+                    </a:solidFill>
+                  </a:tcPr>
+                </a:tc>
+                <a:tc>
+                  <a:txBody>
+                    <a:bodyPr/>
+                    <a:lstStyle/>
+                    <a:p>
+                      <a:pPr algn="ctr"/>
+                      <a:r>
+                        <a:rPr sz="1000">
+                          <a:solidFill>
+                            <a:srgbClr val="2B2A35"/>
+                          </a:solidFill>
+                          <a:latin typeface="Work Sans"/>
+                        </a:rPr>
+                        <a:t>19/10/26 au 24/10</a:t>
+                      </a:r>
+                    </a:p>
+                  </a:txBody>
+                  <a:tcPr marL="54864" marR="54864" marT="18288" marB="18288" anchor="ctr">
+                    <a:solidFill>
+                      <a:srgbClr val="FFFFFF"/>
+                    </a:solidFill>
+                  </a:tcPr>
+                </a:tc>
+                <a:tc>
+                  <a:txBody>
+                    <a:bodyPr/>
+                    <a:lstStyle/>
+                    <a:p>
+                      <a:pPr algn="ctr"/>
+                      <a:r>
+                        <a:rPr sz="1000">
+                          <a:solidFill>
+                            <a:srgbClr val="2B2A35"/>
+                          </a:solidFill>
+                          <a:latin typeface="Work Sans"/>
+                        </a:rPr>
+                        <a:t>34</a:t>
+                      </a:r>
+                    </a:p>
+                  </a:txBody>
+                  <a:tcPr marL="54864" marR="54864" marT="18288" marB="18288" anchor="ctr">
+                    <a:solidFill>
+                      <a:srgbClr val="FFFFFF"/>
+                    </a:solidFill>
+                  </a:tcPr>
+                </a:tc>
+                <a:tc>
+                  <a:txBody>
+                    <a:bodyPr/>
+                    <a:lstStyle/>
+                    <a:p>
+                      <a:pPr algn="ctr"/>
+                      <a:r>
+                        <a:rPr sz="1000">
+                          <a:solidFill>
+                            <a:srgbClr val="2B2A35"/>
+                          </a:solidFill>
+                          <a:latin typeface="Work Sans"/>
+                        </a:rPr>
+                        <a:t>1</a:t>
+                      </a:r>
+                    </a:p>
+                  </a:txBody>
+                  <a:tcPr marL="54864" marR="54864" marT="18288" marB="18288" anchor="ctr">
+                    <a:solidFill>
+                      <a:srgbClr val="FFFFFF"/>
+                    </a:solidFill>
+                  </a:tcPr>
+                </a:tc>
+                <a:tc>
+                  <a:txBody>
+                    <a:bodyPr/>
+                    <a:lstStyle/>
+                    <a:p>
+                      <a:r>
+                        <a:rPr sz="1000">
+                          <a:solidFill>
+                            <a:srgbClr val="2B2A35"/>
+                          </a:solidFill>
+                          <a:latin typeface="Work Sans"/>
+                        </a:rPr>
+                        <a:t>vidéo · 1 155</a:t>
+                      </a:r>
+                    </a:p>
+                  </a:txBody>
+                  <a:tcPr marL="54864" marR="54864" marT="18288" marB="18288" anchor="ctr">
+                    <a:solidFill>
+                      <a:srgbClr val="FFFFFF"/>
+                    </a:solidFill>
+                  </a:tcPr>
+                </a:tc>
+              </a:tr>
+              <a:tr h="365760">
+                <a:tc>
+                  <a:txBody>
+                    <a:bodyPr/>
+                    <a:lstStyle/>
+                    <a:p>
+                      <a:r>
+                        <a:rPr sz="1000">
+                          <a:solidFill>
+                            <a:srgbClr val="2B2A35"/>
+                          </a:solidFill>
+                          <a:latin typeface="Work Sans"/>
+                        </a:rPr>
+                        <a:t>Moniepoint (NG)</a:t>
+                      </a:r>
+                    </a:p>
+                  </a:txBody>
+                  <a:tcPr marL="54864" marR="54864" marT="18288" marB="18288" anchor="ctr">
+                    <a:solidFill>
+                      <a:srgbClr val="EEF2F6"/>
+                    </a:solidFill>
+                  </a:tcPr>
+                </a:tc>
+                <a:tc>
+                  <a:txBody>
+                    <a:bodyPr/>
+                    <a:lstStyle/>
+                    <a:p>
+                      <a:pPr algn="ctr"/>
+                      <a:r>
+                        <a:rPr sz="1000">
+                          <a:solidFill>
+                            <a:srgbClr val="2B2A35"/>
+                          </a:solidFill>
+                          <a:latin typeface="Work Sans"/>
+                        </a:rPr>
+                        <a:t>24/07/26 au 23/10</a:t>
+                      </a:r>
+                    </a:p>
+                  </a:txBody>
+                  <a:tcPr marL="54864" marR="54864" marT="18288" marB="18288" anchor="ctr">
+                    <a:solidFill>
+                      <a:srgbClr val="EEF2F6"/>
+                    </a:solidFill>
+                  </a:tcPr>
+                </a:tc>
+                <a:tc>
+                  <a:txBody>
+                    <a:bodyPr/>
+                    <a:lstStyle/>
+                    <a:p>
+                      <a:pPr algn="ctr"/>
+                      <a:r>
+                        <a:rPr sz="1000">
+                          <a:solidFill>
+                            <a:srgbClr val="2B2A35"/>
+                          </a:solidFill>
+                          <a:latin typeface="Work Sans"/>
+                        </a:rPr>
+                        <a:t>157</a:t>
+                      </a:r>
+                    </a:p>
+                  </a:txBody>
+                  <a:tcPr marL="54864" marR="54864" marT="18288" marB="18288" anchor="ctr">
+                    <a:solidFill>
+                      <a:srgbClr val="EEF2F6"/>
+                    </a:solidFill>
+                  </a:tcPr>
+                </a:tc>
+                <a:tc>
+                  <a:txBody>
+                    <a:bodyPr/>
+                    <a:lstStyle/>
+                    <a:p>
+                      <a:pPr algn="ctr"/>
+                      <a:r>
+                        <a:rPr sz="1000">
+                          <a:solidFill>
+                            <a:srgbClr val="2B2A35"/>
+                          </a:solidFill>
+                          <a:latin typeface="Work Sans"/>
+                        </a:rPr>
+                        <a:t>47</a:t>
+                      </a:r>
+                    </a:p>
+                  </a:txBody>
+                  <a:tcPr marL="54864" marR="54864" marT="18288" marB="18288" anchor="ctr">
+                    <a:solidFill>
+                      <a:srgbClr val="EEF2F6"/>
+                    </a:solidFill>
+                  </a:tcPr>
+                </a:tc>
+                <a:tc>
+                  <a:txBody>
+                    <a:bodyPr/>
+                    <a:lstStyle/>
+                    <a:p>
+                      <a:r>
+                        <a:rPr sz="1000">
+                          <a:solidFill>
+                            <a:srgbClr val="2B2A35"/>
+                          </a:solidFill>
+                          <a:latin typeface="Work Sans"/>
+                        </a:rPr>
+                        <a:t>image · 502</a:t>
+                      </a:r>
+                    </a:p>
+                  </a:txBody>
+                  <a:tcPr marL="54864" marR="54864" marT="18288" marB="18288" anchor="ctr">
+                    <a:solidFill>
+                      <a:srgbClr val="EEF2F6"/>
+                    </a:solidFill>
+                  </a:tcPr>
+                </a:tc>
+              </a:tr>
+              <a:tr h="365760">
+                <a:tc>
+                  <a:txBody>
+                    <a:bodyPr/>
+                    <a:lstStyle/>
+                    <a:p>
+                      <a:r>
+                        <a:rPr sz="1000">
+                          <a:solidFill>
+                            <a:srgbClr val="2B2A35"/>
+                          </a:solidFill>
+                          <a:latin typeface="Work Sans"/>
+                        </a:rPr>
+                        <a:t>Paystack (NG)</a:t>
+                      </a:r>
+                    </a:p>
+                  </a:txBody>
+                  <a:tcPr marL="54864" marR="54864" marT="18288" marB="18288" anchor="ctr">
+                    <a:solidFill>
+                      <a:srgbClr val="FFFFFF"/>
+                    </a:solidFill>
+                  </a:tcPr>
+                </a:tc>
+                <a:tc>
+                  <a:txBody>
+                    <a:bodyPr/>
+                    <a:lstStyle/>
+                    <a:p>
+                      <a:pPr algn="ctr"/>
+                      <a:r>
+                        <a:rPr sz="1000">
+                          <a:solidFill>
+                            <a:srgbClr val="2B2A35"/>
+                          </a:solidFill>
+                          <a:latin typeface="Work Sans"/>
+                        </a:rPr>
+                        <a:t>16/07/26 au 13/10</a:t>
+                      </a:r>
+                    </a:p>
+                  </a:txBody>
+                  <a:tcPr marL="54864" marR="54864" marT="18288" marB="18288" anchor="ctr">
+                    <a:solidFill>
+                      <a:srgbClr val="FFFFFF"/>
+                    </a:solidFill>
+                  </a:tcPr>
+                </a:tc>
+                <a:tc>
+                  <a:txBody>
+                    <a:bodyPr/>
+                    <a:lstStyle/>
+                    <a:p>
+                      <a:pPr algn="ctr"/>
+                      <a:r>
+                        <a:rPr sz="1000">
+                          <a:solidFill>
+                            <a:srgbClr val="2B2A35"/>
+                          </a:solidFill>
+                          <a:latin typeface="Work Sans"/>
+                        </a:rPr>
+                        <a:t>11</a:t>
+                      </a:r>
+                    </a:p>
+                  </a:txBody>
+                  <a:tcPr marL="54864" marR="54864" marT="18288" marB="18288" anchor="ctr">
+                    <a:solidFill>
+                      <a:srgbClr val="FFFFFF"/>
+                    </a:solidFill>
+                  </a:tcPr>
+                </a:tc>
+                <a:tc>
+                  <a:txBody>
+                    <a:bodyPr/>
+                    <a:lstStyle/>
+                    <a:p>
+                      <a:pPr algn="ctr"/>
+                      <a:r>
+                        <a:rPr sz="1000">
+                          <a:solidFill>
+                            <a:srgbClr val="2B2A35"/>
+                          </a:solidFill>
+                          <a:latin typeface="Work Sans"/>
+                        </a:rPr>
+                        <a:t>27</a:t>
+                      </a:r>
+                    </a:p>
+                  </a:txBody>
+                  <a:tcPr marL="54864" marR="54864" marT="18288" marB="18288" anchor="ctr">
+                    <a:solidFill>
+                      <a:srgbClr val="FFFFFF"/>
+                    </a:solidFill>
+                  </a:tcPr>
+                </a:tc>
+                <a:tc>
+                  <a:txBody>
+                    <a:bodyPr/>
+                    <a:lstStyle/>
+                    <a:p>
+                      <a:r>
+                        <a:rPr sz="1000">
+                          <a:solidFill>
+                            <a:srgbClr val="2B2A35"/>
+                          </a:solidFill>
+                          <a:latin typeface="Work Sans"/>
+                        </a:rPr>
+                        <a:t>album · 20</a:t>
+                      </a:r>
+                    </a:p>
+                  </a:txBody>
+                  <a:tcPr marL="54864" marR="54864" marT="18288" marB="18288" anchor="ctr">
+                    <a:solidFill>
+                      <a:srgbClr val="FFFFFF"/>
+                    </a:solidFill>
+                  </a:tcPr>
+                </a:tc>
+              </a:tr>
+              <a:tr h="365760">
+                <a:tc>
+                  <a:txBody>
+                    <a:bodyPr/>
+                    <a:lstStyle/>
+                    <a:p>
+                      <a:r>
+                        <a:rPr sz="1000">
+                          <a:solidFill>
+                            <a:srgbClr val="2B2A35"/>
+                          </a:solidFill>
+                          <a:latin typeface="Work Sans"/>
+                        </a:rPr>
+                        <a:t>Flutterwave (NG)</a:t>
+                      </a:r>
+                    </a:p>
+                  </a:txBody>
+                  <a:tcPr marL="54864" marR="54864" marT="18288" marB="18288" anchor="ctr">
+                    <a:solidFill>
+                      <a:srgbClr val="EEF2F6"/>
+                    </a:solidFill>
+                  </a:tcPr>
+                </a:tc>
+                <a:tc>
+                  <a:txBody>
+                    <a:bodyPr/>
+                    <a:lstStyle/>
+                    <a:p>
+                      <a:pPr algn="ctr"/>
+                      <a:r>
+                        <a:rPr sz="1000">
+                          <a:solidFill>
+                            <a:srgbClr val="2B2A35"/>
+                          </a:solidFill>
+                          <a:latin typeface="Work Sans"/>
+                        </a:rPr>
+                        <a:t>24/09/26 au 23/10</a:t>
+                      </a:r>
+                    </a:p>
+                  </a:txBody>
+                  <a:tcPr marL="54864" marR="54864" marT="18288" marB="18288" anchor="ctr">
+                    <a:solidFill>
+                      <a:srgbClr val="EEF2F6"/>
+                    </a:solidFill>
+                  </a:tcPr>
+                </a:tc>
+                <a:tc>
+                  <a:txBody>
+                    <a:bodyPr/>
+                    <a:lstStyle/>
+                    <a:p>
+                      <a:pPr algn="ctr"/>
+                      <a:r>
+                        <a:rPr sz="1000">
+                          <a:solidFill>
+                            <a:srgbClr val="2B2A35"/>
+                          </a:solidFill>
+                          <a:latin typeface="Work Sans"/>
+                        </a:rPr>
+                        <a:t>5</a:t>
+                      </a:r>
+                    </a:p>
+                  </a:txBody>
+                  <a:tcPr marL="54864" marR="54864" marT="18288" marB="18288" anchor="ctr">
+                    <a:solidFill>
+                      <a:srgbClr val="EEF2F6"/>
+                    </a:solidFill>
+                  </a:tcPr>
+                </a:tc>
+                <a:tc>
+                  <a:txBody>
+                    <a:bodyPr/>
+                    <a:lstStyle/>
+                    <a:p>
+                      <a:pPr algn="ctr"/>
+                      <a:r>
+                        <a:rPr sz="1000">
+                          <a:solidFill>
+                            <a:srgbClr val="2B2A35"/>
+                          </a:solidFill>
+                          <a:latin typeface="Work Sans"/>
+                        </a:rPr>
+                        <a:t>0</a:t>
+                      </a:r>
+                    </a:p>
+                  </a:txBody>
+                  <a:tcPr marL="54864" marR="54864" marT="18288" marB="18288" anchor="ctr">
+                    <a:solidFill>
+                      <a:srgbClr val="EEF2F6"/>
+                    </a:solidFill>
+                  </a:tcPr>
+                </a:tc>
+                <a:tc>
+                  <a:txBody>
+                    <a:bodyPr/>
+                    <a:lstStyle/>
+                    <a:p>
+                      <a:r>
+                        <a:rPr sz="1000">
+                          <a:solidFill>
+                            <a:srgbClr val="2B2A35"/>
+                          </a:solidFill>
+                          <a:latin typeface="Work Sans"/>
+                        </a:rPr>
+                        <a:t>image · 14</a:t>
+                      </a:r>
+                    </a:p>
+                  </a:txBody>
+                  <a:tcPr marL="54864" marR="54864" marT="18288" marB="18288" anchor="ctr">
+                    <a:solidFill>
+                      <a:srgbClr val="EEF2F6"/>
+                    </a:solidFill>
+                  </a:tcPr>
+                </a:tc>
+              </a:tr>
+              <a:tr h="365760">
+                <a:tc>
+                  <a:txBody>
+                    <a:bodyPr/>
+                    <a:lstStyle/>
+                    <a:p>
+                      <a:r>
+                        <a:rPr sz="1000">
+                          <a:solidFill>
+                            <a:srgbClr val="2B2A35"/>
+                          </a:solidFill>
+                          <a:latin typeface="Work Sans"/>
+                        </a:rPr>
+                        <a:t>Burger King (FR)</a:t>
+                      </a:r>
+                    </a:p>
+                  </a:txBody>
+                  <a:tcPr marL="54864" marR="54864" marT="18288" marB="18288" anchor="ctr">
+                    <a:solidFill>
+                      <a:srgbClr val="FFFFFF"/>
+                    </a:solidFill>
+                  </a:tcPr>
+                </a:tc>
+                <a:tc>
+                  <a:txBody>
+                    <a:bodyPr/>
+                    <a:lstStyle/>
+                    <a:p>
+                      <a:pPr algn="ctr"/>
+                      <a:r>
+                        <a:rPr sz="1000">
+                          <a:solidFill>
+                            <a:srgbClr val="2B2A35"/>
+                          </a:solidFill>
+                          <a:latin typeface="Work Sans"/>
+                        </a:rPr>
+                        <a:t>22/09/26 au 23/10</a:t>
+                      </a:r>
+                    </a:p>
+                  </a:txBody>
+                  <a:tcPr marL="54864" marR="54864" marT="18288" marB="18288" anchor="ctr">
+                    <a:solidFill>
+                      <a:srgbClr val="FFFFFF"/>
+                    </a:solidFill>
+                  </a:tcPr>
+                </a:tc>
+                <a:tc>
+                  <a:txBody>
+                    <a:bodyPr/>
+                    <a:lstStyle/>
+                    <a:p>
+                      <a:pPr algn="ctr"/>
+                      <a:r>
+                        <a:rPr sz="1000">
+                          <a:solidFill>
+                            <a:srgbClr val="2B2A35"/>
+                          </a:solidFill>
+                          <a:latin typeface="Work Sans"/>
+                        </a:rPr>
+                        <a:t>1 089</a:t>
+                      </a:r>
+                    </a:p>
+                  </a:txBody>
+                  <a:tcPr marL="54864" marR="54864" marT="18288" marB="18288" anchor="ctr">
+                    <a:solidFill>
+                      <a:srgbClr val="FFFFFF"/>
+                    </a:solidFill>
+                  </a:tcPr>
+                </a:tc>
+                <a:tc>
+                  <a:txBody>
+                    <a:bodyPr/>
+                    <a:lstStyle/>
+                    <a:p>
+                      <a:pPr algn="ctr"/>
+                      <a:r>
+                        <a:rPr sz="1000">
+                          <a:solidFill>
+                            <a:srgbClr val="2B2A35"/>
+                          </a:solidFill>
+                          <a:latin typeface="Work Sans"/>
+                        </a:rPr>
+                        <a:t>38</a:t>
+                      </a:r>
+                    </a:p>
+                  </a:txBody>
+                  <a:tcPr marL="54864" marR="54864" marT="18288" marB="18288" anchor="ctr">
+                    <a:solidFill>
+                      <a:srgbClr val="FFFFFF"/>
+                    </a:solidFill>
+                  </a:tcPr>
+                </a:tc>
+                <a:tc>
+                  <a:txBody>
+                    <a:bodyPr/>
+                    <a:lstStyle/>
+                    <a:p>
+                      <a:r>
+                        <a:rPr sz="1000">
+                          <a:solidFill>
+                            <a:srgbClr val="2B2A35"/>
+                          </a:solidFill>
+                          <a:latin typeface="Work Sans"/>
+                        </a:rPr>
+                        <a:t>vidéo · 5 915</a:t>
+                      </a:r>
+                    </a:p>
+                  </a:txBody>
+                  <a:tcPr marL="54864" marR="54864" marT="18288" marB="18288" anchor="ctr">
+                    <a:solidFill>
+                      <a:srgbClr val="FFFFFF"/>
+                    </a:solidFill>
+                  </a:tcPr>
+                </a:tc>
+              </a:tr>
+              <a:tr h="365760">
+                <a:tc>
+                  <a:txBody>
+                    <a:bodyPr/>
+                    <a:lstStyle/>
+                    <a:p>
+                      <a:r>
+                        <a:rPr sz="1000">
+                          <a:solidFill>
+                            <a:srgbClr val="2B2A35"/>
+                          </a:solidFill>
+                          <a:latin typeface="Work Sans"/>
+                        </a:rPr>
+                        <a:t>Decathlon (FR)</a:t>
+                      </a:r>
+                    </a:p>
+                  </a:txBody>
+                  <a:tcPr marL="54864" marR="54864" marT="18288" marB="18288" anchor="ctr">
+                    <a:solidFill>
+                      <a:srgbClr val="EEF2F6"/>
+                    </a:solidFill>
+                  </a:tcPr>
+                </a:tc>
+                <a:tc>
+                  <a:txBody>
+                    <a:bodyPr/>
+                    <a:lstStyle/>
+                    <a:p>
+                      <a:pPr algn="ctr"/>
+                      <a:r>
+                        <a:rPr sz="1000">
+                          <a:solidFill>
+                            <a:srgbClr val="2B2A35"/>
+                          </a:solidFill>
+                          <a:latin typeface="Work Sans"/>
+                        </a:rPr>
+                        <a:t>15/05/26 au 19/10</a:t>
+                      </a:r>
+                    </a:p>
+                  </a:txBody>
+                  <a:tcPr marL="54864" marR="54864" marT="18288" marB="18288" anchor="ctr">
+                    <a:solidFill>
+                      <a:srgbClr val="EEF2F6"/>
+                    </a:solidFill>
+                  </a:tcPr>
+                </a:tc>
+                <a:tc>
+                  <a:txBody>
+                    <a:bodyPr/>
+                    <a:lstStyle/>
+                    <a:p>
+                      <a:pPr algn="ctr"/>
+                      <a:r>
+                        <a:rPr sz="1000">
+                          <a:solidFill>
+                            <a:srgbClr val="2B2A35"/>
+                          </a:solidFill>
+                          <a:latin typeface="Work Sans"/>
+                        </a:rPr>
+                        <a:t>317</a:t>
+                      </a:r>
+                    </a:p>
+                  </a:txBody>
+                  <a:tcPr marL="54864" marR="54864" marT="18288" marB="18288" anchor="ctr">
+                    <a:solidFill>
+                      <a:srgbClr val="EEF2F6"/>
+                    </a:solidFill>
+                  </a:tcPr>
+                </a:tc>
+                <a:tc>
+                  <a:txBody>
+                    <a:bodyPr/>
+                    <a:lstStyle/>
+                    <a:p>
+                      <a:pPr algn="ctr"/>
+                      <a:r>
+                        <a:rPr sz="1000">
+                          <a:solidFill>
+                            <a:srgbClr val="2B2A35"/>
+                          </a:solidFill>
+                          <a:latin typeface="Work Sans"/>
+                        </a:rPr>
+                        <a:t>64</a:t>
+                      </a:r>
+                    </a:p>
+                  </a:txBody>
+                  <a:tcPr marL="54864" marR="54864" marT="18288" marB="18288" anchor="ctr">
+                    <a:solidFill>
+                      <a:srgbClr val="EEF2F6"/>
+                    </a:solidFill>
+                  </a:tcPr>
+                </a:tc>
+                <a:tc>
+                  <a:txBody>
+                    <a:bodyPr/>
+                    <a:lstStyle/>
+                    <a:p>
+                      <a:r>
+                        <a:rPr sz="1000">
+                          <a:solidFill>
+                            <a:srgbClr val="2B2A35"/>
+                          </a:solidFill>
+                          <a:latin typeface="Work Sans"/>
+                        </a:rPr>
+                        <a:t>vidéo · 14 226</a:t>
+                      </a:r>
+                    </a:p>
+                  </a:txBody>
+                  <a:tcPr marL="54864" marR="54864" marT="18288" marB="18288" anchor="ctr">
+                    <a:solidFill>
+                      <a:srgbClr val="EEF2F6"/>
+                    </a:solidFill>
+                  </a:tcPr>
+                </a:tc>
+              </a:tr>
+              <a:tr h="365760">
+                <a:tc>
+                  <a:txBody>
+                    <a:bodyPr/>
+                    <a:lstStyle/>
+                    <a:p>
+                      <a:r>
+                        <a:rPr sz="1000">
+                          <a:solidFill>
+                            <a:srgbClr val="2B2A35"/>
+                          </a:solidFill>
+                          <a:latin typeface="Work Sans"/>
+                        </a:rPr>
+                        <a:t>Back Market (FR)</a:t>
+                      </a:r>
+                    </a:p>
+                  </a:txBody>
+                  <a:tcPr marL="54864" marR="54864" marT="18288" marB="18288" anchor="ctr">
+                    <a:solidFill>
+                      <a:srgbClr val="FFFFFF"/>
+                    </a:solidFill>
+                  </a:tcPr>
+                </a:tc>
+                <a:tc>
+                  <a:txBody>
+                    <a:bodyPr/>
+                    <a:lstStyle/>
+                    <a:p>
+                      <a:pPr algn="ctr"/>
+                      <a:r>
+                        <a:rPr sz="1000">
+                          <a:solidFill>
+                            <a:srgbClr val="2B2A35"/>
+                          </a:solidFill>
+                          <a:latin typeface="Work Sans"/>
+                        </a:rPr>
+                        <a:t>23/09/26 au 23/10</a:t>
+                      </a:r>
+                    </a:p>
+                  </a:txBody>
+                  <a:tcPr marL="54864" marR="54864" marT="18288" marB="18288" anchor="ctr">
+                    <a:solidFill>
+                      <a:srgbClr val="FFFFFF"/>
+                    </a:solidFill>
+                  </a:tcPr>
+                </a:tc>
+                <a:tc>
+                  <a:txBody>
+                    <a:bodyPr/>
+                    <a:lstStyle/>
+                    <a:p>
+                      <a:pPr algn="ctr"/>
+                      <a:r>
+                        <a:rPr sz="1000">
+                          <a:solidFill>
+                            <a:srgbClr val="2B2A35"/>
+                          </a:solidFill>
+                          <a:latin typeface="Work Sans"/>
+                        </a:rPr>
+                        <a:t>6</a:t>
+                      </a:r>
+                    </a:p>
+                  </a:txBody>
+                  <a:tcPr marL="54864" marR="54864" marT="18288" marB="18288" anchor="ctr">
+                    <a:solidFill>
+                      <a:srgbClr val="FFFFFF"/>
+                    </a:solidFill>
+                  </a:tcPr>
+                </a:tc>
+                <a:tc>
+                  <a:txBody>
+                    <a:bodyPr/>
+                    <a:lstStyle/>
+                    <a:p>
+                      <a:pPr algn="ctr"/>
+                      <a:r>
+                        <a:rPr sz="1000">
+                          <a:solidFill>
+                            <a:srgbClr val="2B2A35"/>
+                          </a:solidFill>
+                          <a:latin typeface="Work Sans"/>
+                        </a:rPr>
+                        <a:t>0</a:t>
+                      </a:r>
+                    </a:p>
+                  </a:txBody>
+                  <a:tcPr marL="54864" marR="54864" marT="18288" marB="18288" anchor="ctr">
+                    <a:solidFill>
+                      <a:srgbClr val="FFFFFF"/>
+                    </a:solidFill>
+                  </a:tcPr>
+                </a:tc>
+                <a:tc>
+                  <a:txBody>
+                    <a:bodyPr/>
+                    <a:lstStyle/>
+                    <a:p>
+                      <a:r>
+                        <a:rPr sz="1000">
+                          <a:solidFill>
+                            <a:srgbClr val="2B2A35"/>
+                          </a:solidFill>
+                          <a:latin typeface="Work Sans"/>
+                        </a:rPr>
+                        <a:t>vidéo · 14</a:t>
+                      </a:r>
+                    </a:p>
+                  </a:txBody>
+                  <a:tcPr marL="54864" marR="54864" marT="18288" marB="18288" anchor="ctr">
+                    <a:solidFill>
+                      <a:srgbClr val="FFFFFF"/>
+                    </a:solidFill>
+                  </a:tcPr>
+                </a:tc>
+              </a:tr>
+              <a:tr h="365760">
+                <a:tc>
+                  <a:txBody>
+                    <a:bodyPr/>
+                    <a:lstStyle/>
+                    <a:p>
+                      <a:r>
+                        <a:rPr sz="1000">
+                          <a:solidFill>
+                            <a:srgbClr val="2B2A35"/>
+                          </a:solidFill>
+                          <a:latin typeface="Work Sans"/>
+                        </a:rPr>
+                        <a:t>Qonto (FR)</a:t>
+                      </a:r>
+                    </a:p>
+                  </a:txBody>
+                  <a:tcPr marL="54864" marR="54864" marT="18288" marB="18288" anchor="ctr">
+                    <a:solidFill>
+                      <a:srgbClr val="EEF2F6"/>
+                    </a:solidFill>
+                  </a:tcPr>
+                </a:tc>
+                <a:tc>
+                  <a:txBody>
+                    <a:bodyPr/>
+                    <a:lstStyle/>
+                    <a:p>
+                      <a:pPr algn="ctr"/>
+                      <a:r>
+                        <a:rPr sz="1000">
+                          <a:solidFill>
+                            <a:srgbClr val="2B2A35"/>
+                          </a:solidFill>
+                          <a:latin typeface="Work Sans"/>
+                        </a:rPr>
+                        <a:t>28/12/23 au 29/09</a:t>
+                      </a:r>
+                    </a:p>
+                  </a:txBody>
+                  <a:tcPr marL="54864" marR="54864" marT="18288" marB="18288" anchor="ctr">
+                    <a:solidFill>
+                      <a:srgbClr val="EEF2F6"/>
+                    </a:solidFill>
+                  </a:tcPr>
+                </a:tc>
+                <a:tc>
+                  <a:txBody>
+                    <a:bodyPr/>
+                    <a:lstStyle/>
+                    <a:p>
+                      <a:pPr algn="ctr"/>
+                      <a:r>
+                        <a:rPr sz="1000">
+                          <a:solidFill>
+                            <a:srgbClr val="2B2A35"/>
+                          </a:solidFill>
+                          <a:latin typeface="Work Sans"/>
+                        </a:rPr>
+                        <a:t>52</a:t>
+                      </a:r>
+                    </a:p>
+                  </a:txBody>
+                  <a:tcPr marL="54864" marR="54864" marT="18288" marB="18288" anchor="ctr">
+                    <a:solidFill>
+                      <a:srgbClr val="EEF2F6"/>
+                    </a:solidFill>
+                  </a:tcPr>
+                </a:tc>
+                <a:tc>
+                  <a:txBody>
+                    <a:bodyPr/>
+                    <a:lstStyle/>
+                    <a:p>
+                      <a:pPr algn="ctr"/>
+                      <a:r>
+                        <a:rPr sz="1000">
+                          <a:solidFill>
+                            <a:srgbClr val="2B2A35"/>
+                          </a:solidFill>
+                          <a:latin typeface="Work Sans"/>
+                        </a:rPr>
+                        <a:t>14</a:t>
+                      </a:r>
+                    </a:p>
+                  </a:txBody>
+                  <a:tcPr marL="54864" marR="54864" marT="18288" marB="18288" anchor="ctr">
+                    <a:solidFill>
+                      <a:srgbClr val="EEF2F6"/>
+                    </a:solidFill>
+                  </a:tcPr>
+                </a:tc>
+                <a:tc>
+                  <a:txBody>
+                    <a:bodyPr/>
+                    <a:lstStyle/>
+                    <a:p>
+                      <a:r>
+                        <a:rPr sz="1000">
+                          <a:solidFill>
+                            <a:srgbClr val="2B2A35"/>
+                          </a:solidFill>
+                          <a:latin typeface="Work Sans"/>
+                        </a:rPr>
+                        <a:t>album · 337</a:t>
+                      </a:r>
+                    </a:p>
+                  </a:txBody>
+                  <a:tcPr marL="54864" marR="54864" marT="18288" marB="18288" anchor="ctr">
+                    <a:solidFill>
+                      <a:srgbClr val="EEF2F6"/>
+                    </a:solidFill>
+                  </a:tcPr>
+                </a:tc>
+              </a:tr>
+              <a:tr h="365760">
+                <a:tc>
+                  <a:txBody>
+                    <a:bodyPr/>
+                    <a:lstStyle/>
+                    <a:p>
+                      <a:r>
+                        <a:rPr sz="1000">
+                          <a:solidFill>
+                            <a:srgbClr val="2B2A35"/>
+                          </a:solidFill>
+                          <a:latin typeface="Work Sans"/>
+                        </a:rPr>
+                        <a:t>PayFit (FR)</a:t>
+                      </a:r>
+                    </a:p>
+                  </a:txBody>
+                  <a:tcPr marL="54864" marR="54864" marT="18288" marB="18288" anchor="ctr">
+                    <a:solidFill>
+                      <a:srgbClr val="FFFFFF"/>
+                    </a:solidFill>
+                  </a:tcPr>
+                </a:tc>
+                <a:tc>
+                  <a:txBody>
+                    <a:bodyPr/>
+                    <a:lstStyle/>
+                    <a:p>
+                      <a:pPr algn="ctr"/>
+                      <a:r>
+                        <a:rPr sz="1000">
+                          <a:solidFill>
+                            <a:srgbClr val="2B2A35"/>
+                          </a:solidFill>
+                          <a:latin typeface="Work Sans"/>
+                        </a:rPr>
+                        <a:t>12/05/26 au 13/10</a:t>
+                      </a:r>
+                    </a:p>
+                  </a:txBody>
+                  <a:tcPr marL="54864" marR="54864" marT="18288" marB="18288" anchor="ctr">
+                    <a:solidFill>
+                      <a:srgbClr val="FFFFFF"/>
+                    </a:solidFill>
+                  </a:tcPr>
+                </a:tc>
+                <a:tc>
+                  <a:txBody>
+                    <a:bodyPr/>
+                    <a:lstStyle/>
+                    <a:p>
+                      <a:pPr algn="ctr"/>
+                      <a:r>
+                        <a:rPr sz="1000">
+                          <a:solidFill>
+                            <a:srgbClr val="2B2A35"/>
+                          </a:solidFill>
+                          <a:latin typeface="Work Sans"/>
+                        </a:rPr>
+                        <a:t>0</a:t>
+                      </a:r>
+                    </a:p>
+                  </a:txBody>
+                  <a:tcPr marL="54864" marR="54864" marT="18288" marB="18288" anchor="ctr">
+                    <a:solidFill>
+                      <a:srgbClr val="FFFFFF"/>
+                    </a:solidFill>
+                  </a:tcPr>
+                </a:tc>
+                <a:tc>
+                  <a:txBody>
+                    <a:bodyPr/>
+                    <a:lstStyle/>
+                    <a:p>
+                      <a:pPr algn="ctr"/>
+                      <a:r>
+                        <a:rPr sz="1000">
+                          <a:solidFill>
+                            <a:srgbClr val="2B2A35"/>
+                          </a:solidFill>
+                          <a:latin typeface="Work Sans"/>
+                        </a:rPr>
+                        <a:t>0</a:t>
+                      </a:r>
+                    </a:p>
+                  </a:txBody>
+                  <a:tcPr marL="54864" marR="54864" marT="18288" marB="18288" anchor="ctr">
+                    <a:solidFill>
+                      <a:srgbClr val="FFFFFF"/>
+                    </a:solidFill>
+                  </a:tcPr>
+                </a:tc>
+                <a:tc>
+                  <a:txBody>
+                    <a:bodyPr/>
+                    <a:lstStyle/>
+                    <a:p>
+                      <a:r>
+                        <a:rPr sz="1000">
+                          <a:solidFill>
+                            <a:srgbClr val="2B2A35"/>
+                          </a:solidFill>
+                          <a:latin typeface="Work Sans"/>
+                        </a:rPr>
+                        <a:t>vidéo · 61</a:t>
+                      </a:r>
+                    </a:p>
+                  </a:txBody>
+                  <a:tcPr marL="54864" marR="54864" marT="18288" marB="18288" anchor="ctr">
+                    <a:solidFill>
+                      <a:srgbClr val="FFFFFF"/>
+                    </a:solidFill>
+                  </a:tcPr>
+                </a:tc>
+              </a:tr>
+              <a:tr h="365760">
+                <a:tc>
+                  <a:txBody>
+                    <a:bodyPr/>
+                    <a:lstStyle/>
+                    <a:p>
+                      <a:r>
+                        <a:rPr sz="1000">
+                          <a:solidFill>
+                            <a:srgbClr val="2B2A35"/>
+                          </a:solidFill>
+                          <a:latin typeface="Work Sans"/>
+                        </a:rPr>
+                        <a:t>Doctolib (FR)</a:t>
+                      </a:r>
+                    </a:p>
+                  </a:txBody>
+                  <a:tcPr marL="54864" marR="54864" marT="18288" marB="18288" anchor="ctr">
+                    <a:solidFill>
+                      <a:srgbClr val="EEF2F6"/>
+                    </a:solidFill>
+                  </a:tcPr>
+                </a:tc>
+                <a:tc>
+                  <a:txBody>
+                    <a:bodyPr/>
+                    <a:lstStyle/>
+                    <a:p>
+                      <a:pPr algn="ctr"/>
+                      <a:r>
+                        <a:rPr sz="1000">
+                          <a:solidFill>
+                            <a:srgbClr val="2B2A35"/>
+                          </a:solidFill>
+                          <a:latin typeface="Work Sans"/>
+                        </a:rPr>
+                        <a:t>28/09/26 au 23/10</a:t>
+                      </a:r>
+                    </a:p>
+                  </a:txBody>
+                  <a:tcPr marL="54864" marR="54864" marT="18288" marB="18288" anchor="ctr">
+                    <a:solidFill>
+                      <a:srgbClr val="EEF2F6"/>
+                    </a:solidFill>
+                  </a:tcPr>
+                </a:tc>
+                <a:tc>
+                  <a:txBody>
+                    <a:bodyPr/>
+                    <a:lstStyle/>
+                    <a:p>
+                      <a:pPr algn="ctr"/>
+                      <a:r>
+                        <a:rPr sz="1000">
+                          <a:solidFill>
+                            <a:srgbClr val="2B2A35"/>
+                          </a:solidFill>
+                          <a:latin typeface="Work Sans"/>
+                        </a:rPr>
+                        <a:t>7</a:t>
+                      </a:r>
+                    </a:p>
+                  </a:txBody>
+                  <a:tcPr marL="54864" marR="54864" marT="18288" marB="18288" anchor="ctr">
+                    <a:solidFill>
+                      <a:srgbClr val="EEF2F6"/>
+                    </a:solidFill>
+                  </a:tcPr>
+                </a:tc>
+                <a:tc>
+                  <a:txBody>
+                    <a:bodyPr/>
+                    <a:lstStyle/>
+                    <a:p>
+                      <a:pPr algn="ctr"/>
+                      <a:r>
+                        <a:rPr sz="1000">
+                          <a:solidFill>
+                            <a:srgbClr val="2B2A35"/>
+                          </a:solidFill>
+                          <a:latin typeface="Work Sans"/>
+                        </a:rPr>
+                        <a:t>0</a:t>
+                      </a:r>
+                    </a:p>
+                  </a:txBody>
+                  <a:tcPr marL="54864" marR="54864" marT="18288" marB="18288" anchor="ctr">
+                    <a:solidFill>
+                      <a:srgbClr val="EEF2F6"/>
+                    </a:solidFill>
+                  </a:tcPr>
+                </a:tc>
+                <a:tc>
+                  <a:txBody>
+                    <a:bodyPr/>
+                    <a:lstStyle/>
+                    <a:p>
+                      <a:r>
+                        <a:rPr sz="1000">
+                          <a:solidFill>
+                            <a:srgbClr val="2B2A35"/>
+                          </a:solidFill>
+                          <a:latin typeface="Work Sans"/>
+                        </a:rPr>
+                        <a:t>album · 16</a:t>
+                      </a:r>
+                    </a:p>
+                  </a:txBody>
+                  <a:tcPr marL="54864" marR="54864" marT="18288" marB="18288" anchor="ctr">
+                    <a:solidFill>
+                      <a:srgbClr val="EEF2F6"/>
+                    </a:solidFill>
+                  </a:tcPr>
+                </a:tc>
+              </a:tr>
+            </a:tbl>
+          </a:graphicData>
+        </a:graphic>
+      </p:graphicFrame>
+      <p:sp>
+        <p:nvSpPr>
+          <p:cNvPr id="10" name="TextBox 9"/>
           <p:cNvSpPr txBox="1"/>
           <p:nvPr/>
         </p:nvSpPr>
         <p:spPr>
           <a:xfrm>
-            <a:off x="822959" y="1600200"/>
-            <a:ext cx="5029200" cy="411480"/>
+            <a:off x="7863840" y="1371600"/>
+            <a:ext cx="3776472" cy="5029200"/>
           </a:xfrm>
           <a:prstGeom prst="rect">
             <a:avLst/>
@@ -13750,581 +15184,150 @@
                 <a:spcPct val="110000"/>
               </a:lnSpc>
               <a:spcAft>
-                <a:spcPts val="600"/>
-              </a:spcAft>
-            </a:pPr>
-            <a:r>
-              <a:rPr sz="1600" b="1">
+                <a:spcPts val="100"/>
+              </a:spcAft>
+            </a:pPr>
+            <a:r>
+              <a:rPr sz="1100" b="1">
                 <a:solidFill>
                   <a:srgbClr val="232754"/>
                 </a:solidFill>
-                <a:latin typeface="Funnel Display"/>
-              </a:rPr>
-              <a:t>Visuels de marque</a:t>
-            </a:r>
-          </a:p>
-        </p:txBody>
-      </p:sp>
-      <p:sp>
-        <p:nvSpPr>
-          <p:cNvPr id="12" name="TextBox 11"/>
-          <p:cNvSpPr txBox="1"/>
-          <p:nvPr/>
-        </p:nvSpPr>
-        <p:spPr>
-          <a:xfrm>
-            <a:off x="822959" y="2057400"/>
-            <a:ext cx="5029200" cy="1645920"/>
-          </a:xfrm>
-          <a:prstGeom prst="rect">
-            <a:avLst/>
-          </a:prstGeom>
-          <a:noFill/>
-        </p:spPr>
-        <p:txBody>
-          <a:bodyPr wrap="square" anchor="t" lIns="45720" rIns="45720" tIns="27432" bIns="27432">
-            <a:spAutoFit/>
-          </a:bodyPr>
-          <a:lstStyle/>
+                <a:latin typeface="Work Sans"/>
+              </a:rPr>
+              <a:t>Peu de réactions, sauf pour le grand public.</a:t>
+            </a:r>
+          </a:p>
           <a:p>
             <a:pPr algn="l">
               <a:lnSpc>
                 <a:spcPct val="110000"/>
               </a:lnSpc>
               <a:spcAft>
-                <a:spcPts val="600"/>
-              </a:spcAft>
-            </a:pPr>
-            <a:r>
-              <a:rPr sz="1200" b="0">
+                <a:spcPts val="900"/>
+              </a:spcAft>
+            </a:pPr>
+            <a:r>
+              <a:rPr sz="1000" b="0">
                 <a:solidFill>
                   <a:srgbClr val="2B2A35"/>
                 </a:solidFill>
                 <a:latin typeface="Work Sans"/>
               </a:rPr>
-              <a:t>Ce qui marche : une photo forte et peu de mots (Burger King), ou une grille très reconnaissable (Wave CI, Chowdeck). Ce qui ne marche pas : l'affiche promo qui empile prix, forfaits et codes.</a:t>
-            </a:r>
-          </a:p>
-        </p:txBody>
-      </p:sp>
-      <p:sp>
-        <p:nvSpPr>
-          <p:cNvPr id="13" name="Rectangle 12"/>
-          <p:cNvSpPr/>
-          <p:nvPr/>
-        </p:nvSpPr>
-        <p:spPr>
-          <a:xfrm>
-            <a:off x="6172200" y="1463040"/>
-            <a:ext cx="5468112" cy="2286000"/>
-          </a:xfrm>
-          <a:prstGeom prst="rect">
-            <a:avLst/>
-          </a:prstGeom>
-          <a:solidFill>
-            <a:srgbClr val="FFFFFF"/>
-          </a:solidFill>
-          <a:ln w="12700">
-            <a:solidFill>
-              <a:srgbClr val="E4E8ED"/>
-            </a:solidFill>
-          </a:ln>
-          <a:effectLst/>
-        </p:spPr>
-        <p:style>
-          <a:lnRef idx="1">
-            <a:schemeClr val="accent1"/>
-          </a:lnRef>
-          <a:fillRef idx="3">
-            <a:schemeClr val="accent1"/>
-          </a:fillRef>
-          <a:effectRef idx="2">
-            <a:schemeClr val="accent1"/>
-          </a:effectRef>
-          <a:fontRef idx="minor">
-            <a:schemeClr val="lt1"/>
-          </a:fontRef>
-        </p:style>
-        <p:txBody>
-          <a:bodyPr rtlCol="0" anchor="ctr"/>
-          <a:lstStyle/>
-          <a:p>
-            <a:pPr algn="ctr"/>
-          </a:p>
-        </p:txBody>
-      </p:sp>
-      <p:sp>
-        <p:nvSpPr>
-          <p:cNvPr id="14" name="Rectangle 13"/>
-          <p:cNvSpPr/>
-          <p:nvPr/>
-        </p:nvSpPr>
-        <p:spPr>
-          <a:xfrm>
-            <a:off x="6172200" y="1463040"/>
-            <a:ext cx="82296" cy="2286000"/>
-          </a:xfrm>
-          <a:prstGeom prst="rect">
-            <a:avLst/>
-          </a:prstGeom>
-          <a:solidFill>
-            <a:srgbClr val="00AED4"/>
-          </a:solidFill>
-          <a:ln>
-            <a:noFill/>
-          </a:ln>
-          <a:effectLst/>
-        </p:spPr>
-        <p:style>
-          <a:lnRef idx="1">
-            <a:schemeClr val="accent1"/>
-          </a:lnRef>
-          <a:fillRef idx="3">
-            <a:schemeClr val="accent1"/>
-          </a:fillRef>
-          <a:effectRef idx="2">
-            <a:schemeClr val="accent1"/>
-          </a:effectRef>
-          <a:fontRef idx="minor">
-            <a:schemeClr val="lt1"/>
-          </a:fontRef>
-        </p:style>
-        <p:txBody>
-          <a:bodyPr rtlCol="0" anchor="ctr"/>
-          <a:lstStyle/>
-          <a:p>
-            <a:pPr algn="ctr"/>
-          </a:p>
-        </p:txBody>
-      </p:sp>
-      <p:sp>
-        <p:nvSpPr>
-          <p:cNvPr id="15" name="TextBox 14"/>
-          <p:cNvSpPr txBox="1"/>
-          <p:nvPr/>
-        </p:nvSpPr>
-        <p:spPr>
-          <a:xfrm>
-            <a:off x="6446520" y="1600200"/>
-            <a:ext cx="5029200" cy="411480"/>
-          </a:xfrm>
-          <a:prstGeom prst="rect">
-            <a:avLst/>
-          </a:prstGeom>
-          <a:noFill/>
-        </p:spPr>
-        <p:txBody>
-          <a:bodyPr wrap="square" anchor="t" lIns="45720" rIns="45720" tIns="27432" bIns="27432">
-            <a:spAutoFit/>
-          </a:bodyPr>
-          <a:lstStyle/>
+              <a:t>Burger King (1 089 en médiane) et Decathlon (317) sortent du lot. Paystack, Flutterwave, Back Market, Doctolib et PayFit restent sous 15.</a:t>
+            </a:r>
+          </a:p>
           <a:p>
             <a:pPr algn="l">
               <a:lnSpc>
                 <a:spcPct val="110000"/>
               </a:lnSpc>
               <a:spcAft>
-                <a:spcPts val="600"/>
-              </a:spcAft>
-            </a:pPr>
-            <a:r>
-              <a:rPr sz="1600" b="1">
+                <a:spcPts val="100"/>
+              </a:spcAft>
+            </a:pPr>
+            <a:r>
+              <a:rPr sz="1100" b="1">
                 <a:solidFill>
                   <a:srgbClr val="232754"/>
                 </a:solidFill>
-                <a:latin typeface="Funnel Display"/>
-              </a:rPr>
-              <a:t>Photos d'illustration</a:t>
-            </a:r>
-          </a:p>
-        </p:txBody>
-      </p:sp>
-      <p:sp>
-        <p:nvSpPr>
-          <p:cNvPr id="16" name="TextBox 15"/>
-          <p:cNvSpPr txBox="1"/>
-          <p:nvPr/>
-        </p:nvSpPr>
-        <p:spPr>
-          <a:xfrm>
-            <a:off x="6446520" y="2057400"/>
-            <a:ext cx="5029200" cy="1645920"/>
-          </a:xfrm>
-          <a:prstGeom prst="rect">
-            <a:avLst/>
-          </a:prstGeom>
-          <a:noFill/>
-        </p:spPr>
-        <p:txBody>
-          <a:bodyPr wrap="square" anchor="t" lIns="45720" rIns="45720" tIns="27432" bIns="27432">
-            <a:spAutoFit/>
-          </a:bodyPr>
-          <a:lstStyle/>
+                <a:latin typeface="Work Sans"/>
+              </a:rPr>
+              <a:t>Des pages qui tournent au ralenti.</a:t>
+            </a:r>
+          </a:p>
           <a:p>
             <a:pPr algn="l">
               <a:lnSpc>
                 <a:spcPct val="110000"/>
               </a:lnSpc>
               <a:spcAft>
-                <a:spcPts val="600"/>
-              </a:spcAft>
-            </a:pPr>
-            <a:r>
-              <a:rPr sz="1200" b="0">
+                <a:spcPts val="900"/>
+              </a:spcAft>
+            </a:pPr>
+            <a:r>
+              <a:rPr sz="1000" b="0">
                 <a:solidFill>
                   <a:srgbClr val="2B2A35"/>
                 </a:solidFill>
                 <a:latin typeface="Work Sans"/>
               </a:rPr>
-              <a:t>À l'œil, presque aucune photo de banque d'images : les marques montrent de vraies personnes, chez elles, en boutique, dans la rue. Les marques africaines castent des visages locaux.</a:t>
-            </a:r>
-          </a:p>
-        </p:txBody>
-      </p:sp>
-      <p:sp>
-        <p:nvSpPr>
-          <p:cNvPr id="17" name="Rectangle 16"/>
-          <p:cNvSpPr/>
-          <p:nvPr/>
-        </p:nvSpPr>
-        <p:spPr>
-          <a:xfrm>
-            <a:off x="548640" y="3931920"/>
-            <a:ext cx="5468112" cy="2286000"/>
-          </a:xfrm>
-          <a:prstGeom prst="rect">
-            <a:avLst/>
-          </a:prstGeom>
-          <a:solidFill>
-            <a:srgbClr val="FFFFFF"/>
-          </a:solidFill>
-          <a:ln w="12700">
-            <a:solidFill>
-              <a:srgbClr val="E4E8ED"/>
-            </a:solidFill>
-          </a:ln>
-          <a:effectLst/>
-        </p:spPr>
-        <p:style>
-          <a:lnRef idx="1">
-            <a:schemeClr val="accent1"/>
-          </a:lnRef>
-          <a:fillRef idx="3">
-            <a:schemeClr val="accent1"/>
-          </a:fillRef>
-          <a:effectRef idx="2">
-            <a:schemeClr val="accent1"/>
-          </a:effectRef>
-          <a:fontRef idx="minor">
-            <a:schemeClr val="lt1"/>
-          </a:fontRef>
-        </p:style>
-        <p:txBody>
-          <a:bodyPr rtlCol="0" anchor="ctr"/>
-          <a:lstStyle/>
-          <a:p>
-            <a:pPr algn="ctr"/>
-          </a:p>
-        </p:txBody>
-      </p:sp>
-      <p:sp>
-        <p:nvSpPr>
-          <p:cNvPr id="18" name="Rectangle 17"/>
-          <p:cNvSpPr/>
-          <p:nvPr/>
-        </p:nvSpPr>
-        <p:spPr>
-          <a:xfrm>
-            <a:off x="548640" y="3931920"/>
-            <a:ext cx="82296" cy="2286000"/>
-          </a:xfrm>
-          <a:prstGeom prst="rect">
-            <a:avLst/>
-          </a:prstGeom>
-          <a:solidFill>
-            <a:srgbClr val="00ADA4"/>
-          </a:solidFill>
-          <a:ln>
-            <a:noFill/>
-          </a:ln>
-          <a:effectLst/>
-        </p:spPr>
-        <p:style>
-          <a:lnRef idx="1">
-            <a:schemeClr val="accent1"/>
-          </a:lnRef>
-          <a:fillRef idx="3">
-            <a:schemeClr val="accent1"/>
-          </a:fillRef>
-          <a:effectRef idx="2">
-            <a:schemeClr val="accent1"/>
-          </a:effectRef>
-          <a:fontRef idx="minor">
-            <a:schemeClr val="lt1"/>
-          </a:fontRef>
-        </p:style>
-        <p:txBody>
-          <a:bodyPr rtlCol="0" anchor="ctr"/>
-          <a:lstStyle/>
-          <a:p>
-            <a:pPr algn="ctr"/>
-          </a:p>
-        </p:txBody>
-      </p:sp>
-      <p:sp>
-        <p:nvSpPr>
-          <p:cNvPr id="19" name="TextBox 18"/>
-          <p:cNvSpPr txBox="1"/>
-          <p:nvPr/>
-        </p:nvSpPr>
-        <p:spPr>
-          <a:xfrm>
-            <a:off x="822959" y="4069080"/>
-            <a:ext cx="5029200" cy="411480"/>
-          </a:xfrm>
-          <a:prstGeom prst="rect">
-            <a:avLst/>
-          </a:prstGeom>
-          <a:noFill/>
-        </p:spPr>
-        <p:txBody>
-          <a:bodyPr wrap="square" anchor="t" lIns="45720" rIns="45720" tIns="27432" bIns="27432">
-            <a:spAutoFit/>
-          </a:bodyPr>
-          <a:lstStyle/>
+              <a:t>Les 15 derniers posts de Qonto couvrent près de trois ans. Ceux de Decathlon remontent à mai.</a:t>
+            </a:r>
+          </a:p>
           <a:p>
             <a:pPr algn="l">
               <a:lnSpc>
                 <a:spcPct val="110000"/>
               </a:lnSpc>
               <a:spcAft>
-                <a:spcPts val="600"/>
-              </a:spcAft>
-            </a:pPr>
-            <a:r>
-              <a:rPr sz="1600" b="1">
+                <a:spcPts val="100"/>
+              </a:spcAft>
+            </a:pPr>
+            <a:r>
+              <a:rPr sz="1100" b="1">
                 <a:solidFill>
                   <a:srgbClr val="232754"/>
                 </a:solidFill>
-                <a:latin typeface="Funnel Display"/>
-              </a:rPr>
-              <a:t>Vidéos courtes et voix off</a:t>
-            </a:r>
-          </a:p>
-        </p:txBody>
-      </p:sp>
-      <p:sp>
-        <p:nvSpPr>
-          <p:cNvPr id="20" name="TextBox 19"/>
-          <p:cNvSpPr txBox="1"/>
-          <p:nvPr/>
-        </p:nvSpPr>
-        <p:spPr>
-          <a:xfrm>
-            <a:off x="822959" y="4526280"/>
-            <a:ext cx="5029200" cy="1645920"/>
-          </a:xfrm>
-          <a:prstGeom prst="rect">
-            <a:avLst/>
-          </a:prstGeom>
-          <a:noFill/>
-        </p:spPr>
-        <p:txBody>
-          <a:bodyPr wrap="square" anchor="t" lIns="45720" rIns="45720" tIns="27432" bIns="27432">
-            <a:spAutoFit/>
-          </a:bodyPr>
-          <a:lstStyle/>
+                <a:latin typeface="Work Sans"/>
+              </a:rPr>
+              <a:t>La vidéo fait les gros scores.</a:t>
+            </a:r>
+          </a:p>
           <a:p>
             <a:pPr algn="l">
               <a:lnSpc>
                 <a:spcPct val="110000"/>
               </a:lnSpc>
               <a:spcAft>
-                <a:spcPts val="600"/>
-              </a:spcAft>
-            </a:pPr>
-            <a:r>
-              <a:rPr sz="1200" b="0">
+                <a:spcPts val="900"/>
+              </a:spcAft>
+            </a:pPr>
+            <a:r>
+              <a:rPr sz="1000" b="0">
                 <a:solidFill>
                   <a:srgbClr val="2B2A35"/>
                 </a:solidFill>
                 <a:latin typeface="Work Sans"/>
               </a:rPr>
-              <a:t>52 % des posts. Gagnent : sketch, face caméra, scène du quotidien en langue locale, récit (Doctolib). Le son n'a pas été analysé : on ne peut pas dire qui utilise une voix off.</a:t>
-            </a:r>
-          </a:p>
-        </p:txBody>
-      </p:sp>
-      <p:sp>
-        <p:nvSpPr>
-          <p:cNvPr id="21" name="Rectangle 20"/>
-          <p:cNvSpPr/>
-          <p:nvPr/>
-        </p:nvSpPr>
-        <p:spPr>
-          <a:xfrm>
-            <a:off x="6172200" y="3931920"/>
-            <a:ext cx="5468112" cy="2286000"/>
-          </a:xfrm>
-          <a:prstGeom prst="rect">
-            <a:avLst/>
-          </a:prstGeom>
-          <a:solidFill>
-            <a:srgbClr val="FFFFFF"/>
-          </a:solidFill>
-          <a:ln w="12700">
-            <a:solidFill>
-              <a:srgbClr val="E4E8ED"/>
-            </a:solidFill>
-          </a:ln>
-          <a:effectLst/>
-        </p:spPr>
-        <p:style>
-          <a:lnRef idx="1">
-            <a:schemeClr val="accent1"/>
-          </a:lnRef>
-          <a:fillRef idx="3">
-            <a:schemeClr val="accent1"/>
-          </a:fillRef>
-          <a:effectRef idx="2">
-            <a:schemeClr val="accent1"/>
-          </a:effectRef>
-          <a:fontRef idx="minor">
-            <a:schemeClr val="lt1"/>
-          </a:fontRef>
-        </p:style>
-        <p:txBody>
-          <a:bodyPr rtlCol="0" anchor="ctr"/>
-          <a:lstStyle/>
-          <a:p>
-            <a:pPr algn="ctr"/>
-          </a:p>
-        </p:txBody>
-      </p:sp>
-      <p:sp>
-        <p:nvSpPr>
-          <p:cNvPr id="22" name="Rectangle 21"/>
-          <p:cNvSpPr/>
-          <p:nvPr/>
-        </p:nvSpPr>
-        <p:spPr>
-          <a:xfrm>
-            <a:off x="6172200" y="3931920"/>
-            <a:ext cx="82296" cy="2286000"/>
-          </a:xfrm>
-          <a:prstGeom prst="rect">
-            <a:avLst/>
-          </a:prstGeom>
-          <a:solidFill>
-            <a:srgbClr val="232754"/>
-          </a:solidFill>
-          <a:ln>
-            <a:noFill/>
-          </a:ln>
-          <a:effectLst/>
-        </p:spPr>
-        <p:style>
-          <a:lnRef idx="1">
-            <a:schemeClr val="accent1"/>
-          </a:lnRef>
-          <a:fillRef idx="3">
-            <a:schemeClr val="accent1"/>
-          </a:fillRef>
-          <a:effectRef idx="2">
-            <a:schemeClr val="accent1"/>
-          </a:effectRef>
-          <a:fontRef idx="minor">
-            <a:schemeClr val="lt1"/>
-          </a:fontRef>
-        </p:style>
-        <p:txBody>
-          <a:bodyPr rtlCol="0" anchor="ctr"/>
-          <a:lstStyle/>
-          <a:p>
-            <a:pPr algn="ctr"/>
-          </a:p>
-        </p:txBody>
-      </p:sp>
-      <p:sp>
-        <p:nvSpPr>
-          <p:cNvPr id="23" name="TextBox 22"/>
-          <p:cNvSpPr txBox="1"/>
-          <p:nvPr/>
-        </p:nvSpPr>
-        <p:spPr>
-          <a:xfrm>
-            <a:off x="6446520" y="4069080"/>
-            <a:ext cx="5029200" cy="411480"/>
-          </a:xfrm>
-          <a:prstGeom prst="rect">
-            <a:avLst/>
-          </a:prstGeom>
-          <a:noFill/>
-        </p:spPr>
-        <p:txBody>
-          <a:bodyPr wrap="square" anchor="t" lIns="45720" rIns="45720" tIns="27432" bIns="27432">
-            <a:spAutoFit/>
-          </a:bodyPr>
-          <a:lstStyle/>
+              <a:t>Decathlon : 14 226 réactions et 892 864 vues pour une vidéo sur la victoire d'une équipe. GTBank : 1,7 million de vues pour le portrait d'une entreprise fondée par trois femmes.</a:t>
+            </a:r>
+          </a:p>
           <a:p>
             <a:pPr algn="l">
               <a:lnSpc>
                 <a:spcPct val="110000"/>
               </a:lnSpc>
               <a:spcAft>
-                <a:spcPts val="600"/>
-              </a:spcAft>
-            </a:pPr>
-            <a:r>
-              <a:rPr sz="1600" b="1">
+                <a:spcPts val="100"/>
+              </a:spcAft>
+            </a:pPr>
+            <a:r>
+              <a:rPr sz="1100" b="1">
                 <a:solidFill>
                   <a:srgbClr val="232754"/>
                 </a:solidFill>
-                <a:latin typeface="Funnel Display"/>
-              </a:rPr>
-              <a:t>Témoignages clients</a:t>
-            </a:r>
-          </a:p>
-        </p:txBody>
-      </p:sp>
-      <p:sp>
-        <p:nvSpPr>
-          <p:cNvPr id="24" name="TextBox 23"/>
-          <p:cNvSpPr txBox="1"/>
-          <p:nvPr/>
-        </p:nvSpPr>
-        <p:spPr>
-          <a:xfrm>
-            <a:off x="6446520" y="4526280"/>
-            <a:ext cx="5029200" cy="1645920"/>
-          </a:xfrm>
-          <a:prstGeom prst="rect">
-            <a:avLst/>
-          </a:prstGeom>
-          <a:noFill/>
-        </p:spPr>
-        <p:txBody>
-          <a:bodyPr wrap="square" anchor="t" lIns="45720" rIns="45720" tIns="27432" bIns="27432">
-            <a:spAutoFit/>
-          </a:bodyPr>
-          <a:lstStyle/>
+                <a:latin typeface="Work Sans"/>
+              </a:rPr>
+              <a:t>Contraste avec l'Afrique de l'Ouest francophone.</a:t>
+            </a:r>
+          </a:p>
           <a:p>
             <a:pPr algn="l">
               <a:lnSpc>
                 <a:spcPct val="110000"/>
               </a:lnSpc>
               <a:spcAft>
-                <a:spcPts val="600"/>
-              </a:spcAft>
-            </a:pPr>
-            <a:r>
-              <a:rPr sz="1200" b="0">
+                <a:spcPts val="900"/>
+              </a:spcAft>
+            </a:pPr>
+            <a:r>
+              <a:rPr sz="1000" b="0">
                 <a:solidFill>
                   <a:srgbClr val="2B2A35"/>
                 </a:solidFill>
                 <a:latin typeface="Work Sans"/>
               </a:rPr>
-              <a:t>Aucune carte témoignage classique. À la place : le client héros d'un récit vidéo (Doctolib), le commerçant mis en avant (Paystack), le message de client mis en forme (Wave CI).</a:t>
+              <a:t>Wave Sénégal (525) et Moov Africa CI (409) font plus de réactions médianes que toutes les marques B2B du Nigeria et de France.</a:t>
             </a:r>
           </a:p>
         </p:txBody>
@@ -14436,7 +15439,7 @@
                 </a:solidFill>
                 <a:latin typeface="Space Grotesk"/>
               </a:rPr>
-              <a:t>LES QUATRE FAMILLES DE CONTENU</a:t>
+              <a:t>FACEBOOK ET TIKTOK</a:t>
             </a:r>
           </a:p>
         </p:txBody>
@@ -14478,7 +15481,7 @@
                 </a:solidFill>
                 <a:latin typeface="Funnel Display"/>
               </a:rPr>
-              <a:t>Témoignages : trois façons de faire parler le client</a:t>
+              <a:t>TikTok au Nigeria et en France : la puissance vient du payant</a:t>
             </a:r>
           </a:p>
         </p:txBody>
@@ -14635,88 +15638,1196 @@
           </a:p>
         </p:txBody>
       </p:sp>
-      <p:sp>
-        <p:nvSpPr>
-          <p:cNvPr id="9" name="Rectangle 8"/>
-          <p:cNvSpPr/>
-          <p:nvPr/>
-        </p:nvSpPr>
-        <p:spPr>
-          <a:xfrm>
-            <a:off x="548640" y="1463040"/>
-            <a:ext cx="2011680" cy="2651760"/>
-          </a:xfrm>
-          <a:prstGeom prst="rect">
-            <a:avLst/>
-          </a:prstGeom>
-          <a:solidFill>
-            <a:srgbClr val="FFFFFF"/>
-          </a:solidFill>
-          <a:ln w="12700">
-            <a:solidFill>
-              <a:srgbClr val="E4E8ED"/>
-            </a:solidFill>
-          </a:ln>
-          <a:effectLst/>
-        </p:spPr>
-        <p:style>
-          <a:lnRef idx="1">
-            <a:schemeClr val="accent1"/>
-          </a:lnRef>
-          <a:fillRef idx="3">
-            <a:schemeClr val="accent1"/>
-          </a:fillRef>
-          <a:effectRef idx="2">
-            <a:schemeClr val="accent1"/>
-          </a:effectRef>
-          <a:fontRef idx="minor">
-            <a:schemeClr val="lt1"/>
-          </a:fontRef>
-        </p:style>
-        <p:txBody>
-          <a:bodyPr rtlCol="0" anchor="ctr"/>
-          <a:lstStyle/>
-          <a:p>
-            <a:pPr algn="ctr"/>
-          </a:p>
-        </p:txBody>
-      </p:sp>
-      <p:pic>
-        <p:nvPicPr>
-          <p:cNvPr id="10" name="Picture 9" descr="doctolib__Dd6r680N9Fx.jpg">
-            <a:hlinkClick r:id="rId4"/>
-          </p:cNvPr>
-          <p:cNvPicPr>
-            <a:picLocks noChangeAspect="1"/>
-          </p:cNvPicPr>
-          <p:nvPr/>
-        </p:nvPicPr>
-        <p:blipFill>
-          <a:blip r:embed="rId3"/>
-          <a:stretch>
-            <a:fillRect/>
-          </a:stretch>
-        </p:blipFill>
-        <p:spPr>
-          <a:xfrm>
-            <a:off x="809777" y="1463039"/>
-            <a:ext cx="1489405" cy="2651760"/>
-          </a:xfrm>
-          <a:prstGeom prst="rect">
-            <a:avLst/>
-          </a:prstGeom>
-        </p:spPr>
-      </p:pic>
-      <p:sp>
-        <p:nvSpPr>
-          <p:cNvPr id="11" name="TextBox 10"/>
+      <p:graphicFrame>
+        <p:nvGraphicFramePr>
+          <p:cNvPr id="9" name="Table 8"/>
+          <p:cNvGraphicFramePr>
+            <a:graphicFrameLocks noGrp="1"/>
+          </p:cNvGraphicFramePr>
+          <p:nvPr/>
+        </p:nvGraphicFramePr>
+        <p:xfrm>
+          <a:off x="548640" y="1371600"/>
+          <a:ext cx="7223760" cy="4389120"/>
+        </p:xfrm>
+        <a:graphic>
+          <a:graphicData uri="http://schemas.openxmlformats.org/drawingml/2006/table">
+            <a:tbl>
+              <a:tblPr firstRow="1" bandRow="1">
+                <a:tableStyleId>{5C22544A-7EE6-4342-B048-85BDC9FD1C3A}</a:tableStyleId>
+              </a:tblPr>
+              <a:tblGrid>
+                <a:gridCol w="1920240"/>
+                <a:gridCol w="1097280"/>
+                <a:gridCol w="1280160"/>
+                <a:gridCol w="1508760"/>
+                <a:gridCol w="1417320"/>
+              </a:tblGrid>
+              <a:tr h="438912">
+                <a:tc>
+                  <a:txBody>
+                    <a:bodyPr/>
+                    <a:lstStyle/>
+                    <a:p>
+                      <a:r>
+                        <a:rPr sz="1000" b="1">
+                          <a:solidFill>
+                            <a:srgbClr val="FFFFFF"/>
+                          </a:solidFill>
+                          <a:latin typeface="Space Grotesk"/>
+                        </a:rPr>
+                        <a:t>Compte TikTok</a:t>
+                      </a:r>
+                    </a:p>
+                  </a:txBody>
+                  <a:tcPr marL="54864" marR="54864" marT="18288" marB="18288" anchor="ctr">
+                    <a:solidFill>
+                      <a:srgbClr val="232754"/>
+                    </a:solidFill>
+                  </a:tcPr>
+                </a:tc>
+                <a:tc>
+                  <a:txBody>
+                    <a:bodyPr/>
+                    <a:lstStyle/>
+                    <a:p>
+                      <a:r>
+                        <a:rPr sz="1000" b="1">
+                          <a:solidFill>
+                            <a:srgbClr val="FFFFFF"/>
+                          </a:solidFill>
+                          <a:latin typeface="Space Grotesk"/>
+                        </a:rPr>
+                        <a:t>Abonnés</a:t>
+                      </a:r>
+                    </a:p>
+                  </a:txBody>
+                  <a:tcPr marL="54864" marR="54864" marT="18288" marB="18288" anchor="ctr">
+                    <a:solidFill>
+                      <a:srgbClr val="232754"/>
+                    </a:solidFill>
+                  </a:tcPr>
+                </a:tc>
+                <a:tc>
+                  <a:txBody>
+                    <a:bodyPr/>
+                    <a:lstStyle/>
+                    <a:p>
+                      <a:r>
+                        <a:rPr sz="1000" b="1">
+                          <a:solidFill>
+                            <a:srgbClr val="FFFFFF"/>
+                          </a:solidFill>
+                          <a:latin typeface="Space Grotesk"/>
+                        </a:rPr>
+                        <a:t>Vidéos sponsorisées</a:t>
+                      </a:r>
+                    </a:p>
+                  </a:txBody>
+                  <a:tcPr marL="54864" marR="54864" marT="18288" marB="18288" anchor="ctr">
+                    <a:solidFill>
+                      <a:srgbClr val="232754"/>
+                    </a:solidFill>
+                  </a:tcPr>
+                </a:tc>
+                <a:tc>
+                  <a:txBody>
+                    <a:bodyPr/>
+                    <a:lstStyle/>
+                    <a:p>
+                      <a:r>
+                        <a:rPr sz="1000" b="1">
+                          <a:solidFill>
+                            <a:srgbClr val="FFFFFF"/>
+                          </a:solidFill>
+                          <a:latin typeface="Space Grotesk"/>
+                        </a:rPr>
+                        <a:t>Vues médianes non sponsorisées</a:t>
+                      </a:r>
+                    </a:p>
+                  </a:txBody>
+                  <a:tcPr marL="54864" marR="54864" marT="18288" marB="18288" anchor="ctr">
+                    <a:solidFill>
+                      <a:srgbClr val="232754"/>
+                    </a:solidFill>
+                  </a:tcPr>
+                </a:tc>
+                <a:tc>
+                  <a:txBody>
+                    <a:bodyPr/>
+                    <a:lstStyle/>
+                    <a:p>
+                      <a:r>
+                        <a:rPr sz="1000" b="1">
+                          <a:solidFill>
+                            <a:srgbClr val="FFFFFF"/>
+                          </a:solidFill>
+                          <a:latin typeface="Space Grotesk"/>
+                        </a:rPr>
+                        <a:t>Vues médianes sponsorisées</a:t>
+                      </a:r>
+                    </a:p>
+                  </a:txBody>
+                  <a:tcPr marL="54864" marR="54864" marT="18288" marB="18288" anchor="ctr">
+                    <a:solidFill>
+                      <a:srgbClr val="232754"/>
+                    </a:solidFill>
+                  </a:tcPr>
+                </a:tc>
+              </a:tr>
+              <a:tr h="438912">
+                <a:tc>
+                  <a:txBody>
+                    <a:bodyPr/>
+                    <a:lstStyle/>
+                    <a:p>
+                      <a:r>
+                        <a:rPr sz="1000">
+                          <a:solidFill>
+                            <a:srgbClr val="2B2A35"/>
+                          </a:solidFill>
+                          <a:latin typeface="Work Sans"/>
+                        </a:rPr>
+                        <a:t>MTN Nigeria (NG)</a:t>
+                      </a:r>
+                    </a:p>
+                  </a:txBody>
+                  <a:tcPr marL="54864" marR="54864" marT="18288" marB="18288" anchor="ctr">
+                    <a:solidFill>
+                      <a:srgbClr val="FFFFFF"/>
+                    </a:solidFill>
+                  </a:tcPr>
+                </a:tc>
+                <a:tc>
+                  <a:txBody>
+                    <a:bodyPr/>
+                    <a:lstStyle/>
+                    <a:p>
+                      <a:pPr algn="ctr"/>
+                      <a:r>
+                        <a:rPr sz="1000">
+                          <a:solidFill>
+                            <a:srgbClr val="2B2A35"/>
+                          </a:solidFill>
+                          <a:latin typeface="Work Sans"/>
+                        </a:rPr>
+                        <a:t>98 900</a:t>
+                      </a:r>
+                    </a:p>
+                  </a:txBody>
+                  <a:tcPr marL="54864" marR="54864" marT="18288" marB="18288" anchor="ctr">
+                    <a:solidFill>
+                      <a:srgbClr val="FFFFFF"/>
+                    </a:solidFill>
+                  </a:tcPr>
+                </a:tc>
+                <a:tc>
+                  <a:txBody>
+                    <a:bodyPr/>
+                    <a:lstStyle/>
+                    <a:p>
+                      <a:pPr algn="ctr"/>
+                      <a:r>
+                        <a:rPr sz="1000">
+                          <a:solidFill>
+                            <a:srgbClr val="2B2A35"/>
+                          </a:solidFill>
+                          <a:latin typeface="Work Sans"/>
+                        </a:rPr>
+                        <a:t>0 / 15</a:t>
+                      </a:r>
+                    </a:p>
+                  </a:txBody>
+                  <a:tcPr marL="54864" marR="54864" marT="18288" marB="18288" anchor="ctr">
+                    <a:solidFill>
+                      <a:srgbClr val="FFFFFF"/>
+                    </a:solidFill>
+                  </a:tcPr>
+                </a:tc>
+                <a:tc>
+                  <a:txBody>
+                    <a:bodyPr/>
+                    <a:lstStyle/>
+                    <a:p>
+                      <a:pPr algn="ctr"/>
+                      <a:r>
+                        <a:rPr sz="1000">
+                          <a:solidFill>
+                            <a:srgbClr val="2B2A35"/>
+                          </a:solidFill>
+                          <a:latin typeface="Work Sans"/>
+                        </a:rPr>
+                        <a:t>419</a:t>
+                      </a:r>
+                    </a:p>
+                  </a:txBody>
+                  <a:tcPr marL="54864" marR="54864" marT="18288" marB="18288" anchor="ctr">
+                    <a:solidFill>
+                      <a:srgbClr val="FFFFFF"/>
+                    </a:solidFill>
+                  </a:tcPr>
+                </a:tc>
+                <a:tc>
+                  <a:txBody>
+                    <a:bodyPr/>
+                    <a:lstStyle/>
+                    <a:p>
+                      <a:r>
+                        <a:rPr sz="1000">
+                          <a:solidFill>
+                            <a:srgbClr val="2B2A35"/>
+                          </a:solidFill>
+                          <a:latin typeface="Work Sans"/>
+                        </a:rPr>
+                        <a:t>aucune</a:t>
+                      </a:r>
+                    </a:p>
+                  </a:txBody>
+                  <a:tcPr marL="54864" marR="54864" marT="18288" marB="18288" anchor="ctr">
+                    <a:solidFill>
+                      <a:srgbClr val="FFFFFF"/>
+                    </a:solidFill>
+                  </a:tcPr>
+                </a:tc>
+              </a:tr>
+              <a:tr h="438912">
+                <a:tc>
+                  <a:txBody>
+                    <a:bodyPr/>
+                    <a:lstStyle/>
+                    <a:p>
+                      <a:r>
+                        <a:rPr sz="1000">
+                          <a:solidFill>
+                            <a:srgbClr val="2B2A35"/>
+                          </a:solidFill>
+                          <a:latin typeface="Work Sans"/>
+                        </a:rPr>
+                        <a:t>Chowdeck (NG)</a:t>
+                      </a:r>
+                    </a:p>
+                  </a:txBody>
+                  <a:tcPr marL="54864" marR="54864" marT="18288" marB="18288" anchor="ctr">
+                    <a:solidFill>
+                      <a:srgbClr val="EEF2F6"/>
+                    </a:solidFill>
+                  </a:tcPr>
+                </a:tc>
+                <a:tc>
+                  <a:txBody>
+                    <a:bodyPr/>
+                    <a:lstStyle/>
+                    <a:p>
+                      <a:pPr algn="ctr"/>
+                      <a:r>
+                        <a:rPr sz="1000">
+                          <a:solidFill>
+                            <a:srgbClr val="2B2A35"/>
+                          </a:solidFill>
+                          <a:latin typeface="Work Sans"/>
+                        </a:rPr>
+                        <a:t>41 600</a:t>
+                      </a:r>
+                    </a:p>
+                  </a:txBody>
+                  <a:tcPr marL="54864" marR="54864" marT="18288" marB="18288" anchor="ctr">
+                    <a:solidFill>
+                      <a:srgbClr val="EEF2F6"/>
+                    </a:solidFill>
+                  </a:tcPr>
+                </a:tc>
+                <a:tc>
+                  <a:txBody>
+                    <a:bodyPr/>
+                    <a:lstStyle/>
+                    <a:p>
+                      <a:pPr algn="ctr"/>
+                      <a:r>
+                        <a:rPr sz="1000">
+                          <a:solidFill>
+                            <a:srgbClr val="2B2A35"/>
+                          </a:solidFill>
+                          <a:latin typeface="Work Sans"/>
+                        </a:rPr>
+                        <a:t>0 / 15</a:t>
+                      </a:r>
+                    </a:p>
+                  </a:txBody>
+                  <a:tcPr marL="54864" marR="54864" marT="18288" marB="18288" anchor="ctr">
+                    <a:solidFill>
+                      <a:srgbClr val="EEF2F6"/>
+                    </a:solidFill>
+                  </a:tcPr>
+                </a:tc>
+                <a:tc>
+                  <a:txBody>
+                    <a:bodyPr/>
+                    <a:lstStyle/>
+                    <a:p>
+                      <a:pPr algn="ctr"/>
+                      <a:r>
+                        <a:rPr sz="1000">
+                          <a:solidFill>
+                            <a:srgbClr val="2B2A35"/>
+                          </a:solidFill>
+                          <a:latin typeface="Work Sans"/>
+                        </a:rPr>
+                        <a:t>4 554</a:t>
+                      </a:r>
+                    </a:p>
+                  </a:txBody>
+                  <a:tcPr marL="54864" marR="54864" marT="18288" marB="18288" anchor="ctr">
+                    <a:solidFill>
+                      <a:srgbClr val="EEF2F6"/>
+                    </a:solidFill>
+                  </a:tcPr>
+                </a:tc>
+                <a:tc>
+                  <a:txBody>
+                    <a:bodyPr/>
+                    <a:lstStyle/>
+                    <a:p>
+                      <a:r>
+                        <a:rPr sz="1000">
+                          <a:solidFill>
+                            <a:srgbClr val="2B2A35"/>
+                          </a:solidFill>
+                          <a:latin typeface="Work Sans"/>
+                        </a:rPr>
+                        <a:t>aucune</a:t>
+                      </a:r>
+                    </a:p>
+                  </a:txBody>
+                  <a:tcPr marL="54864" marR="54864" marT="18288" marB="18288" anchor="ctr">
+                    <a:solidFill>
+                      <a:srgbClr val="EEF2F6"/>
+                    </a:solidFill>
+                  </a:tcPr>
+                </a:tc>
+              </a:tr>
+              <a:tr h="438912">
+                <a:tc>
+                  <a:txBody>
+                    <a:bodyPr/>
+                    <a:lstStyle/>
+                    <a:p>
+                      <a:r>
+                        <a:rPr sz="1000">
+                          <a:solidFill>
+                            <a:srgbClr val="2B2A35"/>
+                          </a:solidFill>
+                          <a:latin typeface="Work Sans"/>
+                        </a:rPr>
+                        <a:t>Moniepoint (NG)</a:t>
+                      </a:r>
+                    </a:p>
+                  </a:txBody>
+                  <a:tcPr marL="54864" marR="54864" marT="18288" marB="18288" anchor="ctr">
+                    <a:solidFill>
+                      <a:srgbClr val="FFFFFF"/>
+                    </a:solidFill>
+                  </a:tcPr>
+                </a:tc>
+                <a:tc>
+                  <a:txBody>
+                    <a:bodyPr/>
+                    <a:lstStyle/>
+                    <a:p>
+                      <a:pPr algn="ctr"/>
+                      <a:r>
+                        <a:rPr sz="1000">
+                          <a:solidFill>
+                            <a:srgbClr val="2B2A35"/>
+                          </a:solidFill>
+                          <a:latin typeface="Work Sans"/>
+                        </a:rPr>
+                        <a:t>551 800</a:t>
+                      </a:r>
+                    </a:p>
+                  </a:txBody>
+                  <a:tcPr marL="54864" marR="54864" marT="18288" marB="18288" anchor="ctr">
+                    <a:solidFill>
+                      <a:srgbClr val="FFFFFF"/>
+                    </a:solidFill>
+                  </a:tcPr>
+                </a:tc>
+                <a:tc>
+                  <a:txBody>
+                    <a:bodyPr/>
+                    <a:lstStyle/>
+                    <a:p>
+                      <a:pPr algn="ctr"/>
+                      <a:r>
+                        <a:rPr sz="1000">
+                          <a:solidFill>
+                            <a:srgbClr val="2B2A35"/>
+                          </a:solidFill>
+                          <a:latin typeface="Work Sans"/>
+                        </a:rPr>
+                        <a:t>8 / 15</a:t>
+                      </a:r>
+                    </a:p>
+                  </a:txBody>
+                  <a:tcPr marL="54864" marR="54864" marT="18288" marB="18288" anchor="ctr">
+                    <a:solidFill>
+                      <a:srgbClr val="FFFFFF"/>
+                    </a:solidFill>
+                  </a:tcPr>
+                </a:tc>
+                <a:tc>
+                  <a:txBody>
+                    <a:bodyPr/>
+                    <a:lstStyle/>
+                    <a:p>
+                      <a:pPr algn="ctr"/>
+                      <a:r>
+                        <a:rPr sz="1000">
+                          <a:solidFill>
+                            <a:srgbClr val="2B2A35"/>
+                          </a:solidFill>
+                          <a:latin typeface="Work Sans"/>
+                        </a:rPr>
+                        <a:t>9 590</a:t>
+                      </a:r>
+                    </a:p>
+                  </a:txBody>
+                  <a:tcPr marL="54864" marR="54864" marT="18288" marB="18288" anchor="ctr">
+                    <a:solidFill>
+                      <a:srgbClr val="FFFFFF"/>
+                    </a:solidFill>
+                  </a:tcPr>
+                </a:tc>
+                <a:tc>
+                  <a:txBody>
+                    <a:bodyPr/>
+                    <a:lstStyle/>
+                    <a:p>
+                      <a:pPr algn="ctr"/>
+                      <a:r>
+                        <a:rPr sz="1000">
+                          <a:solidFill>
+                            <a:srgbClr val="2B2A35"/>
+                          </a:solidFill>
+                          <a:latin typeface="Work Sans"/>
+                        </a:rPr>
+                        <a:t>2 400 000</a:t>
+                      </a:r>
+                    </a:p>
+                  </a:txBody>
+                  <a:tcPr marL="54864" marR="54864" marT="18288" marB="18288" anchor="ctr">
+                    <a:solidFill>
+                      <a:srgbClr val="FFFFFF"/>
+                    </a:solidFill>
+                  </a:tcPr>
+                </a:tc>
+              </a:tr>
+              <a:tr h="438912">
+                <a:tc>
+                  <a:txBody>
+                    <a:bodyPr/>
+                    <a:lstStyle/>
+                    <a:p>
+                      <a:r>
+                        <a:rPr sz="1000">
+                          <a:solidFill>
+                            <a:srgbClr val="2B2A35"/>
+                          </a:solidFill>
+                          <a:latin typeface="Work Sans"/>
+                        </a:rPr>
+                        <a:t>Flutterwave (NG)</a:t>
+                      </a:r>
+                    </a:p>
+                  </a:txBody>
+                  <a:tcPr marL="54864" marR="54864" marT="18288" marB="18288" anchor="ctr">
+                    <a:solidFill>
+                      <a:srgbClr val="EEF2F6"/>
+                    </a:solidFill>
+                  </a:tcPr>
+                </a:tc>
+                <a:tc>
+                  <a:txBody>
+                    <a:bodyPr/>
+                    <a:lstStyle/>
+                    <a:p>
+                      <a:pPr algn="ctr"/>
+                      <a:r>
+                        <a:rPr sz="1000">
+                          <a:solidFill>
+                            <a:srgbClr val="2B2A35"/>
+                          </a:solidFill>
+                          <a:latin typeface="Work Sans"/>
+                        </a:rPr>
+                        <a:t>4 067</a:t>
+                      </a:r>
+                    </a:p>
+                  </a:txBody>
+                  <a:tcPr marL="54864" marR="54864" marT="18288" marB="18288" anchor="ctr">
+                    <a:solidFill>
+                      <a:srgbClr val="EEF2F6"/>
+                    </a:solidFill>
+                  </a:tcPr>
+                </a:tc>
+                <a:tc>
+                  <a:txBody>
+                    <a:bodyPr/>
+                    <a:lstStyle/>
+                    <a:p>
+                      <a:pPr algn="ctr"/>
+                      <a:r>
+                        <a:rPr sz="1000">
+                          <a:solidFill>
+                            <a:srgbClr val="2B2A35"/>
+                          </a:solidFill>
+                          <a:latin typeface="Work Sans"/>
+                        </a:rPr>
+                        <a:t>0 / 12</a:t>
+                      </a:r>
+                    </a:p>
+                  </a:txBody>
+                  <a:tcPr marL="54864" marR="54864" marT="18288" marB="18288" anchor="ctr">
+                    <a:solidFill>
+                      <a:srgbClr val="EEF2F6"/>
+                    </a:solidFill>
+                  </a:tcPr>
+                </a:tc>
+                <a:tc>
+                  <a:txBody>
+                    <a:bodyPr/>
+                    <a:lstStyle/>
+                    <a:p>
+                      <a:pPr algn="ctr"/>
+                      <a:r>
+                        <a:rPr sz="1000">
+                          <a:solidFill>
+                            <a:srgbClr val="2B2A35"/>
+                          </a:solidFill>
+                          <a:latin typeface="Work Sans"/>
+                        </a:rPr>
+                        <a:t>668</a:t>
+                      </a:r>
+                    </a:p>
+                  </a:txBody>
+                  <a:tcPr marL="54864" marR="54864" marT="18288" marB="18288" anchor="ctr">
+                    <a:solidFill>
+                      <a:srgbClr val="EEF2F6"/>
+                    </a:solidFill>
+                  </a:tcPr>
+                </a:tc>
+                <a:tc>
+                  <a:txBody>
+                    <a:bodyPr/>
+                    <a:lstStyle/>
+                    <a:p>
+                      <a:r>
+                        <a:rPr sz="1000">
+                          <a:solidFill>
+                            <a:srgbClr val="2B2A35"/>
+                          </a:solidFill>
+                          <a:latin typeface="Work Sans"/>
+                        </a:rPr>
+                        <a:t>aucune</a:t>
+                      </a:r>
+                    </a:p>
+                  </a:txBody>
+                  <a:tcPr marL="54864" marR="54864" marT="18288" marB="18288" anchor="ctr">
+                    <a:solidFill>
+                      <a:srgbClr val="EEF2F6"/>
+                    </a:solidFill>
+                  </a:tcPr>
+                </a:tc>
+              </a:tr>
+              <a:tr h="438912">
+                <a:tc>
+                  <a:txBody>
+                    <a:bodyPr/>
+                    <a:lstStyle/>
+                    <a:p>
+                      <a:r>
+                        <a:rPr sz="1000">
+                          <a:solidFill>
+                            <a:srgbClr val="2B2A35"/>
+                          </a:solidFill>
+                          <a:latin typeface="Work Sans"/>
+                        </a:rPr>
+                        <a:t>Burger King (FR)</a:t>
+                      </a:r>
+                    </a:p>
+                  </a:txBody>
+                  <a:tcPr marL="54864" marR="54864" marT="18288" marB="18288" anchor="ctr">
+                    <a:solidFill>
+                      <a:srgbClr val="FFFFFF"/>
+                    </a:solidFill>
+                  </a:tcPr>
+                </a:tc>
+                <a:tc>
+                  <a:txBody>
+                    <a:bodyPr/>
+                    <a:lstStyle/>
+                    <a:p>
+                      <a:pPr algn="ctr"/>
+                      <a:r>
+                        <a:rPr sz="1000">
+                          <a:solidFill>
+                            <a:srgbClr val="2B2A35"/>
+                          </a:solidFill>
+                          <a:latin typeface="Work Sans"/>
+                        </a:rPr>
+                        <a:t>1 000 000</a:t>
+                      </a:r>
+                    </a:p>
+                  </a:txBody>
+                  <a:tcPr marL="54864" marR="54864" marT="18288" marB="18288" anchor="ctr">
+                    <a:solidFill>
+                      <a:srgbClr val="FFFFFF"/>
+                    </a:solidFill>
+                  </a:tcPr>
+                </a:tc>
+                <a:tc>
+                  <a:txBody>
+                    <a:bodyPr/>
+                    <a:lstStyle/>
+                    <a:p>
+                      <a:pPr algn="ctr"/>
+                      <a:r>
+                        <a:rPr sz="1000">
+                          <a:solidFill>
+                            <a:srgbClr val="2B2A35"/>
+                          </a:solidFill>
+                          <a:latin typeface="Work Sans"/>
+                        </a:rPr>
+                        <a:t>12 / 15</a:t>
+                      </a:r>
+                    </a:p>
+                  </a:txBody>
+                  <a:tcPr marL="54864" marR="54864" marT="18288" marB="18288" anchor="ctr">
+                    <a:solidFill>
+                      <a:srgbClr val="FFFFFF"/>
+                    </a:solidFill>
+                  </a:tcPr>
+                </a:tc>
+                <a:tc>
+                  <a:txBody>
+                    <a:bodyPr/>
+                    <a:lstStyle/>
+                    <a:p>
+                      <a:pPr algn="ctr"/>
+                      <a:r>
+                        <a:rPr sz="1000">
+                          <a:solidFill>
+                            <a:srgbClr val="2B2A35"/>
+                          </a:solidFill>
+                          <a:latin typeface="Work Sans"/>
+                        </a:rPr>
+                        <a:t>3 767</a:t>
+                      </a:r>
+                    </a:p>
+                  </a:txBody>
+                  <a:tcPr marL="54864" marR="54864" marT="18288" marB="18288" anchor="ctr">
+                    <a:solidFill>
+                      <a:srgbClr val="FFFFFF"/>
+                    </a:solidFill>
+                  </a:tcPr>
+                </a:tc>
+                <a:tc>
+                  <a:txBody>
+                    <a:bodyPr/>
+                    <a:lstStyle/>
+                    <a:p>
+                      <a:pPr algn="ctr"/>
+                      <a:r>
+                        <a:rPr sz="1000">
+                          <a:solidFill>
+                            <a:srgbClr val="2B2A35"/>
+                          </a:solidFill>
+                          <a:latin typeface="Work Sans"/>
+                        </a:rPr>
+                        <a:t>383 400</a:t>
+                      </a:r>
+                    </a:p>
+                  </a:txBody>
+                  <a:tcPr marL="54864" marR="54864" marT="18288" marB="18288" anchor="ctr">
+                    <a:solidFill>
+                      <a:srgbClr val="FFFFFF"/>
+                    </a:solidFill>
+                  </a:tcPr>
+                </a:tc>
+              </a:tr>
+              <a:tr h="438912">
+                <a:tc>
+                  <a:txBody>
+                    <a:bodyPr/>
+                    <a:lstStyle/>
+                    <a:p>
+                      <a:r>
+                        <a:rPr sz="1000">
+                          <a:solidFill>
+                            <a:srgbClr val="2B2A35"/>
+                          </a:solidFill>
+                          <a:latin typeface="Work Sans"/>
+                        </a:rPr>
+                        <a:t>Decathlon (FR)</a:t>
+                      </a:r>
+                    </a:p>
+                  </a:txBody>
+                  <a:tcPr marL="54864" marR="54864" marT="18288" marB="18288" anchor="ctr">
+                    <a:solidFill>
+                      <a:srgbClr val="EEF2F6"/>
+                    </a:solidFill>
+                  </a:tcPr>
+                </a:tc>
+                <a:tc>
+                  <a:txBody>
+                    <a:bodyPr/>
+                    <a:lstStyle/>
+                    <a:p>
+                      <a:pPr algn="ctr"/>
+                      <a:r>
+                        <a:rPr sz="1000">
+                          <a:solidFill>
+                            <a:srgbClr val="2B2A35"/>
+                          </a:solidFill>
+                          <a:latin typeface="Work Sans"/>
+                        </a:rPr>
+                        <a:t>436 100</a:t>
+                      </a:r>
+                    </a:p>
+                  </a:txBody>
+                  <a:tcPr marL="54864" marR="54864" marT="18288" marB="18288" anchor="ctr">
+                    <a:solidFill>
+                      <a:srgbClr val="EEF2F6"/>
+                    </a:solidFill>
+                  </a:tcPr>
+                </a:tc>
+                <a:tc>
+                  <a:txBody>
+                    <a:bodyPr/>
+                    <a:lstStyle/>
+                    <a:p>
+                      <a:pPr algn="ctr"/>
+                      <a:r>
+                        <a:rPr sz="1000">
+                          <a:solidFill>
+                            <a:srgbClr val="2B2A35"/>
+                          </a:solidFill>
+                          <a:latin typeface="Work Sans"/>
+                        </a:rPr>
+                        <a:t>12 / 15</a:t>
+                      </a:r>
+                    </a:p>
+                  </a:txBody>
+                  <a:tcPr marL="54864" marR="54864" marT="18288" marB="18288" anchor="ctr">
+                    <a:solidFill>
+                      <a:srgbClr val="EEF2F6"/>
+                    </a:solidFill>
+                  </a:tcPr>
+                </a:tc>
+                <a:tc>
+                  <a:txBody>
+                    <a:bodyPr/>
+                    <a:lstStyle/>
+                    <a:p>
+                      <a:pPr algn="ctr"/>
+                      <a:r>
+                        <a:rPr sz="1000">
+                          <a:solidFill>
+                            <a:srgbClr val="2B2A35"/>
+                          </a:solidFill>
+                          <a:latin typeface="Work Sans"/>
+                        </a:rPr>
+                        <a:t>10 600</a:t>
+                      </a:r>
+                    </a:p>
+                  </a:txBody>
+                  <a:tcPr marL="54864" marR="54864" marT="18288" marB="18288" anchor="ctr">
+                    <a:solidFill>
+                      <a:srgbClr val="EEF2F6"/>
+                    </a:solidFill>
+                  </a:tcPr>
+                </a:tc>
+                <a:tc>
+                  <a:txBody>
+                    <a:bodyPr/>
+                    <a:lstStyle/>
+                    <a:p>
+                      <a:pPr algn="ctr"/>
+                      <a:r>
+                        <a:rPr sz="1000">
+                          <a:solidFill>
+                            <a:srgbClr val="2B2A35"/>
+                          </a:solidFill>
+                          <a:latin typeface="Work Sans"/>
+                        </a:rPr>
+                        <a:t>167 800</a:t>
+                      </a:r>
+                    </a:p>
+                  </a:txBody>
+                  <a:tcPr marL="54864" marR="54864" marT="18288" marB="18288" anchor="ctr">
+                    <a:solidFill>
+                      <a:srgbClr val="EEF2F6"/>
+                    </a:solidFill>
+                  </a:tcPr>
+                </a:tc>
+              </a:tr>
+              <a:tr h="438912">
+                <a:tc>
+                  <a:txBody>
+                    <a:bodyPr/>
+                    <a:lstStyle/>
+                    <a:p>
+                      <a:r>
+                        <a:rPr sz="1000">
+                          <a:solidFill>
+                            <a:srgbClr val="2B2A35"/>
+                          </a:solidFill>
+                          <a:latin typeface="Work Sans"/>
+                        </a:rPr>
+                        <a:t>Back Market (FR)</a:t>
+                      </a:r>
+                    </a:p>
+                  </a:txBody>
+                  <a:tcPr marL="54864" marR="54864" marT="18288" marB="18288" anchor="ctr">
+                    <a:solidFill>
+                      <a:srgbClr val="FFFFFF"/>
+                    </a:solidFill>
+                  </a:tcPr>
+                </a:tc>
+                <a:tc>
+                  <a:txBody>
+                    <a:bodyPr/>
+                    <a:lstStyle/>
+                    <a:p>
+                      <a:pPr algn="ctr"/>
+                      <a:r>
+                        <a:rPr sz="1000">
+                          <a:solidFill>
+                            <a:srgbClr val="2B2A35"/>
+                          </a:solidFill>
+                          <a:latin typeface="Work Sans"/>
+                        </a:rPr>
+                        <a:t>164 000</a:t>
+                      </a:r>
+                    </a:p>
+                  </a:txBody>
+                  <a:tcPr marL="54864" marR="54864" marT="18288" marB="18288" anchor="ctr">
+                    <a:solidFill>
+                      <a:srgbClr val="FFFFFF"/>
+                    </a:solidFill>
+                  </a:tcPr>
+                </a:tc>
+                <a:tc>
+                  <a:txBody>
+                    <a:bodyPr/>
+                    <a:lstStyle/>
+                    <a:p>
+                      <a:pPr algn="ctr"/>
+                      <a:r>
+                        <a:rPr sz="1000">
+                          <a:solidFill>
+                            <a:srgbClr val="2B2A35"/>
+                          </a:solidFill>
+                          <a:latin typeface="Work Sans"/>
+                        </a:rPr>
+                        <a:t>15 / 15</a:t>
+                      </a:r>
+                    </a:p>
+                  </a:txBody>
+                  <a:tcPr marL="54864" marR="54864" marT="18288" marB="18288" anchor="ctr">
+                    <a:solidFill>
+                      <a:srgbClr val="FFFFFF"/>
+                    </a:solidFill>
+                  </a:tcPr>
+                </a:tc>
+                <a:tc>
+                  <a:txBody>
+                    <a:bodyPr/>
+                    <a:lstStyle/>
+                    <a:p>
+                      <a:r>
+                        <a:rPr sz="1000">
+                          <a:solidFill>
+                            <a:srgbClr val="2B2A35"/>
+                          </a:solidFill>
+                          <a:latin typeface="Work Sans"/>
+                        </a:rPr>
+                        <a:t>aucune</a:t>
+                      </a:r>
+                    </a:p>
+                  </a:txBody>
+                  <a:tcPr marL="54864" marR="54864" marT="18288" marB="18288" anchor="ctr">
+                    <a:solidFill>
+                      <a:srgbClr val="FFFFFF"/>
+                    </a:solidFill>
+                  </a:tcPr>
+                </a:tc>
+                <a:tc>
+                  <a:txBody>
+                    <a:bodyPr/>
+                    <a:lstStyle/>
+                    <a:p>
+                      <a:pPr algn="ctr"/>
+                      <a:r>
+                        <a:rPr sz="1000">
+                          <a:solidFill>
+                            <a:srgbClr val="2B2A35"/>
+                          </a:solidFill>
+                          <a:latin typeface="Work Sans"/>
+                        </a:rPr>
+                        <a:t>11 100</a:t>
+                      </a:r>
+                    </a:p>
+                  </a:txBody>
+                  <a:tcPr marL="54864" marR="54864" marT="18288" marB="18288" anchor="ctr">
+                    <a:solidFill>
+                      <a:srgbClr val="FFFFFF"/>
+                    </a:solidFill>
+                  </a:tcPr>
+                </a:tc>
+              </a:tr>
+              <a:tr h="438912">
+                <a:tc>
+                  <a:txBody>
+                    <a:bodyPr/>
+                    <a:lstStyle/>
+                    <a:p>
+                      <a:r>
+                        <a:rPr sz="1000">
+                          <a:solidFill>
+                            <a:srgbClr val="2B2A35"/>
+                          </a:solidFill>
+                          <a:latin typeface="Work Sans"/>
+                        </a:rPr>
+                        <a:t>Qonto (FR)</a:t>
+                      </a:r>
+                    </a:p>
+                  </a:txBody>
+                  <a:tcPr marL="54864" marR="54864" marT="18288" marB="18288" anchor="ctr">
+                    <a:solidFill>
+                      <a:srgbClr val="EEF2F6"/>
+                    </a:solidFill>
+                  </a:tcPr>
+                </a:tc>
+                <a:tc>
+                  <a:txBody>
+                    <a:bodyPr/>
+                    <a:lstStyle/>
+                    <a:p>
+                      <a:pPr algn="ctr"/>
+                      <a:r>
+                        <a:rPr sz="1000">
+                          <a:solidFill>
+                            <a:srgbClr val="2B2A35"/>
+                          </a:solidFill>
+                          <a:latin typeface="Work Sans"/>
+                        </a:rPr>
+                        <a:t>14 200</a:t>
+                      </a:r>
+                    </a:p>
+                  </a:txBody>
+                  <a:tcPr marL="54864" marR="54864" marT="18288" marB="18288" anchor="ctr">
+                    <a:solidFill>
+                      <a:srgbClr val="EEF2F6"/>
+                    </a:solidFill>
+                  </a:tcPr>
+                </a:tc>
+                <a:tc>
+                  <a:txBody>
+                    <a:bodyPr/>
+                    <a:lstStyle/>
+                    <a:p>
+                      <a:pPr algn="ctr"/>
+                      <a:r>
+                        <a:rPr sz="1000">
+                          <a:solidFill>
+                            <a:srgbClr val="2B2A35"/>
+                          </a:solidFill>
+                          <a:latin typeface="Work Sans"/>
+                        </a:rPr>
+                        <a:t>13 / 13</a:t>
+                      </a:r>
+                    </a:p>
+                  </a:txBody>
+                  <a:tcPr marL="54864" marR="54864" marT="18288" marB="18288" anchor="ctr">
+                    <a:solidFill>
+                      <a:srgbClr val="EEF2F6"/>
+                    </a:solidFill>
+                  </a:tcPr>
+                </a:tc>
+                <a:tc>
+                  <a:txBody>
+                    <a:bodyPr/>
+                    <a:lstStyle/>
+                    <a:p>
+                      <a:r>
+                        <a:rPr sz="1000">
+                          <a:solidFill>
+                            <a:srgbClr val="2B2A35"/>
+                          </a:solidFill>
+                          <a:latin typeface="Work Sans"/>
+                        </a:rPr>
+                        <a:t>aucune</a:t>
+                      </a:r>
+                    </a:p>
+                  </a:txBody>
+                  <a:tcPr marL="54864" marR="54864" marT="18288" marB="18288" anchor="ctr">
+                    <a:solidFill>
+                      <a:srgbClr val="EEF2F6"/>
+                    </a:solidFill>
+                  </a:tcPr>
+                </a:tc>
+                <a:tc>
+                  <a:txBody>
+                    <a:bodyPr/>
+                    <a:lstStyle/>
+                    <a:p>
+                      <a:pPr algn="ctr"/>
+                      <a:r>
+                        <a:rPr sz="1000">
+                          <a:solidFill>
+                            <a:srgbClr val="2B2A35"/>
+                          </a:solidFill>
+                          <a:latin typeface="Work Sans"/>
+                        </a:rPr>
+                        <a:t>109 100</a:t>
+                      </a:r>
+                    </a:p>
+                  </a:txBody>
+                  <a:tcPr marL="54864" marR="54864" marT="18288" marB="18288" anchor="ctr">
+                    <a:solidFill>
+                      <a:srgbClr val="EEF2F6"/>
+                    </a:solidFill>
+                  </a:tcPr>
+                </a:tc>
+              </a:tr>
+              <a:tr h="438912">
+                <a:tc>
+                  <a:txBody>
+                    <a:bodyPr/>
+                    <a:lstStyle/>
+                    <a:p>
+                      <a:r>
+                        <a:rPr sz="1000">
+                          <a:solidFill>
+                            <a:srgbClr val="2B2A35"/>
+                          </a:solidFill>
+                          <a:latin typeface="Work Sans"/>
+                        </a:rPr>
+                        <a:t>Doctolib (FR)</a:t>
+                      </a:r>
+                    </a:p>
+                  </a:txBody>
+                  <a:tcPr marL="54864" marR="54864" marT="18288" marB="18288" anchor="ctr">
+                    <a:solidFill>
+                      <a:srgbClr val="FFFFFF"/>
+                    </a:solidFill>
+                  </a:tcPr>
+                </a:tc>
+                <a:tc>
+                  <a:txBody>
+                    <a:bodyPr/>
+                    <a:lstStyle/>
+                    <a:p>
+                      <a:pPr algn="ctr"/>
+                      <a:r>
+                        <a:rPr sz="1000">
+                          <a:solidFill>
+                            <a:srgbClr val="2B2A35"/>
+                          </a:solidFill>
+                          <a:latin typeface="Work Sans"/>
+                        </a:rPr>
+                        <a:t>113 800</a:t>
+                      </a:r>
+                    </a:p>
+                  </a:txBody>
+                  <a:tcPr marL="54864" marR="54864" marT="18288" marB="18288" anchor="ctr">
+                    <a:solidFill>
+                      <a:srgbClr val="FFFFFF"/>
+                    </a:solidFill>
+                  </a:tcPr>
+                </a:tc>
+                <a:tc>
+                  <a:txBody>
+                    <a:bodyPr/>
+                    <a:lstStyle/>
+                    <a:p>
+                      <a:pPr algn="ctr"/>
+                      <a:r>
+                        <a:rPr sz="1000">
+                          <a:solidFill>
+                            <a:srgbClr val="2B2A35"/>
+                          </a:solidFill>
+                          <a:latin typeface="Work Sans"/>
+                        </a:rPr>
+                        <a:t>5 / 15</a:t>
+                      </a:r>
+                    </a:p>
+                  </a:txBody>
+                  <a:tcPr marL="54864" marR="54864" marT="18288" marB="18288" anchor="ctr">
+                    <a:solidFill>
+                      <a:srgbClr val="FFFFFF"/>
+                    </a:solidFill>
+                  </a:tcPr>
+                </a:tc>
+                <a:tc>
+                  <a:txBody>
+                    <a:bodyPr/>
+                    <a:lstStyle/>
+                    <a:p>
+                      <a:pPr algn="ctr"/>
+                      <a:r>
+                        <a:rPr sz="1000">
+                          <a:solidFill>
+                            <a:srgbClr val="2B2A35"/>
+                          </a:solidFill>
+                          <a:latin typeface="Work Sans"/>
+                        </a:rPr>
+                        <a:t>1 101</a:t>
+                      </a:r>
+                    </a:p>
+                  </a:txBody>
+                  <a:tcPr marL="54864" marR="54864" marT="18288" marB="18288" anchor="ctr">
+                    <a:solidFill>
+                      <a:srgbClr val="FFFFFF"/>
+                    </a:solidFill>
+                  </a:tcPr>
+                </a:tc>
+                <a:tc>
+                  <a:txBody>
+                    <a:bodyPr/>
+                    <a:lstStyle/>
+                    <a:p>
+                      <a:pPr algn="ctr"/>
+                      <a:r>
+                        <a:rPr sz="1000">
+                          <a:solidFill>
+                            <a:srgbClr val="2B2A35"/>
+                          </a:solidFill>
+                          <a:latin typeface="Work Sans"/>
+                        </a:rPr>
+                        <a:t>85 800</a:t>
+                      </a:r>
+                    </a:p>
+                  </a:txBody>
+                  <a:tcPr marL="54864" marR="54864" marT="18288" marB="18288" anchor="ctr">
+                    <a:solidFill>
+                      <a:srgbClr val="FFFFFF"/>
+                    </a:solidFill>
+                  </a:tcPr>
+                </a:tc>
+              </a:tr>
+            </a:tbl>
+          </a:graphicData>
+        </a:graphic>
+      </p:graphicFrame>
+      <p:sp>
+        <p:nvSpPr>
+          <p:cNvPr id="10" name="TextBox 9"/>
           <p:cNvSpPr txBox="1"/>
           <p:nvPr/>
         </p:nvSpPr>
         <p:spPr>
           <a:xfrm>
-            <a:off x="502919" y="4142232"/>
-            <a:ext cx="2103120" cy="457200"/>
+            <a:off x="548640" y="5852160"/>
+            <a:ext cx="7223760" cy="548640"/>
           </a:xfrm>
           <a:prstGeom prst="rect">
             <a:avLst/>
@@ -14729,9 +16840,9 @@
           </a:bodyPr>
           <a:lstStyle/>
           <a:p>
-            <a:pPr algn="ctr">
-              <a:lnSpc>
-                <a:spcPct val="100000"/>
+            <a:pPr algn="l">
+              <a:lnSpc>
+                <a:spcPct val="110000"/>
               </a:lnSpc>
               <a:spcAft>
                 <a:spcPts val="600"/>
@@ -14740,97 +16851,25 @@
             <a:r>
               <a:rPr sz="900" b="0">
                 <a:solidFill>
-                  <a:srgbClr val="2B2A35"/>
+                  <a:srgbClr val="8F8F9A"/>
                 </a:solidFill>
                 <a:latin typeface="Work Sans"/>
               </a:rPr>
-              <a:t>Doctolib · récit d'un patient · 12 994</a:t>
-            </a:r>
-          </a:p>
-        </p:txBody>
-      </p:sp>
-      <p:sp>
-        <p:nvSpPr>
-          <p:cNvPr id="12" name="Rectangle 11"/>
-          <p:cNvSpPr/>
-          <p:nvPr/>
-        </p:nvSpPr>
-        <p:spPr>
-          <a:xfrm>
-            <a:off x="2834640" y="1463040"/>
-            <a:ext cx="2011680" cy="2651760"/>
-          </a:xfrm>
-          <a:prstGeom prst="rect">
-            <a:avLst/>
-          </a:prstGeom>
-          <a:solidFill>
-            <a:srgbClr val="FFFFFF"/>
-          </a:solidFill>
-          <a:ln w="12700">
-            <a:solidFill>
-              <a:srgbClr val="E4E8ED"/>
-            </a:solidFill>
-          </a:ln>
-          <a:effectLst/>
-        </p:spPr>
-        <p:style>
-          <a:lnRef idx="1">
-            <a:schemeClr val="accent1"/>
-          </a:lnRef>
-          <a:fillRef idx="3">
-            <a:schemeClr val="accent1"/>
-          </a:fillRef>
-          <a:effectRef idx="2">
-            <a:schemeClr val="accent1"/>
-          </a:effectRef>
-          <a:fontRef idx="minor">
-            <a:schemeClr val="lt1"/>
-          </a:fontRef>
-        </p:style>
-        <p:txBody>
-          <a:bodyPr rtlCol="0" anchor="ctr"/>
-          <a:lstStyle/>
-          <a:p>
-            <a:pPr algn="ctr"/>
-          </a:p>
-        </p:txBody>
-      </p:sp>
-      <p:pic>
-        <p:nvPicPr>
-          <p:cNvPr id="13" name="Picture 12" descr="wave.ci__Del2CQilt3O.jpg">
-            <a:hlinkClick r:id="rId6"/>
-          </p:cNvPr>
-          <p:cNvPicPr>
-            <a:picLocks noChangeAspect="1"/>
-          </p:cNvPicPr>
-          <p:nvPr/>
-        </p:nvPicPr>
-        <p:blipFill>
-          <a:blip r:embed="rId5"/>
-          <a:stretch>
-            <a:fillRect/>
-          </a:stretch>
-        </p:blipFill>
-        <p:spPr>
-          <a:xfrm>
-            <a:off x="2834640" y="1539429"/>
-            <a:ext cx="2011680" cy="2498981"/>
-          </a:xfrm>
-          <a:prstGeom prst="rect">
-            <a:avLst/>
-          </a:prstGeom>
-        </p:spPr>
-      </p:pic>
-      <p:sp>
-        <p:nvSpPr>
-          <p:cNvPr id="14" name="TextBox 13"/>
+              <a:t>« Sponsorisée » : vidéo signalée comme publicité par TikTok le jour du relevé. Vidéos épinglées exclues. Pas de compte TikTok officiel trouvé pour GTBank, Paystack et PayFit.</a:t>
+            </a:r>
+          </a:p>
+        </p:txBody>
+      </p:sp>
+      <p:sp>
+        <p:nvSpPr>
+          <p:cNvPr id="11" name="TextBox 10"/>
           <p:cNvSpPr txBox="1"/>
           <p:nvPr/>
         </p:nvSpPr>
         <p:spPr>
           <a:xfrm>
-            <a:off x="2788920" y="4142232"/>
-            <a:ext cx="2103120" cy="457200"/>
+            <a:off x="8046720" y="1371600"/>
+            <a:ext cx="3593592" cy="5029200"/>
           </a:xfrm>
           <a:prstGeom prst="rect">
             <a:avLst/>
@@ -14843,161 +16882,81 @@
           </a:bodyPr>
           <a:lstStyle/>
           <a:p>
-            <a:pPr algn="ctr">
-              <a:lnSpc>
-                <a:spcPct val="100000"/>
-              </a:lnSpc>
-              <a:spcAft>
-                <a:spcPts val="600"/>
-              </a:spcAft>
-            </a:pPr>
-            <a:r>
-              <a:rPr sz="900" b="0">
+            <a:pPr algn="l">
+              <a:lnSpc>
+                <a:spcPct val="110000"/>
+              </a:lnSpc>
+              <a:spcAft>
+                <a:spcPts val="100"/>
+              </a:spcAft>
+            </a:pPr>
+            <a:r>
+              <a:rPr sz="1100" b="1">
+                <a:solidFill>
+                  <a:srgbClr val="232754"/>
+                </a:solidFill>
+                <a:latin typeface="Work Sans"/>
+              </a:rPr>
+              <a:t>Les gros chiffres sont achetés.</a:t>
+            </a:r>
+          </a:p>
+          <a:p>
+            <a:pPr algn="l">
+              <a:lnSpc>
+                <a:spcPct val="110000"/>
+              </a:lnSpc>
+              <a:spcAft>
+                <a:spcPts val="900"/>
+              </a:spcAft>
+            </a:pPr>
+            <a:r>
+              <a:rPr sz="1000" b="0">
                 <a:solidFill>
                   <a:srgbClr val="2B2A35"/>
                 </a:solidFill>
                 <a:latin typeface="Work Sans"/>
               </a:rPr>
-              <a:t>Wave CI · message de client mis en forme · 36</a:t>
-            </a:r>
-          </a:p>
-        </p:txBody>
-      </p:sp>
-      <p:sp>
-        <p:nvSpPr>
-          <p:cNvPr id="15" name="Rectangle 14"/>
-          <p:cNvSpPr/>
-          <p:nvPr/>
-        </p:nvSpPr>
-        <p:spPr>
-          <a:xfrm>
-            <a:off x="5120640" y="1463040"/>
-            <a:ext cx="2011680" cy="2651760"/>
-          </a:xfrm>
-          <a:prstGeom prst="rect">
-            <a:avLst/>
-          </a:prstGeom>
-          <a:solidFill>
-            <a:srgbClr val="FFFFFF"/>
-          </a:solidFill>
-          <a:ln w="12700">
-            <a:solidFill>
-              <a:srgbClr val="E4E8ED"/>
-            </a:solidFill>
-          </a:ln>
-          <a:effectLst/>
-        </p:spPr>
-        <p:style>
-          <a:lnRef idx="1">
-            <a:schemeClr val="accent1"/>
-          </a:lnRef>
-          <a:fillRef idx="3">
-            <a:schemeClr val="accent1"/>
-          </a:fillRef>
-          <a:effectRef idx="2">
-            <a:schemeClr val="accent1"/>
-          </a:effectRef>
-          <a:fontRef idx="minor">
-            <a:schemeClr val="lt1"/>
-          </a:fontRef>
-        </p:style>
-        <p:txBody>
-          <a:bodyPr rtlCol="0" anchor="ctr"/>
-          <a:lstStyle/>
-          <a:p>
-            <a:pPr algn="ctr"/>
-          </a:p>
-        </p:txBody>
-      </p:sp>
-      <p:pic>
-        <p:nvPicPr>
-          <p:cNvPr id="16" name="Picture 15" descr="orangecotedivoire__DePPkBRIQcs.jpg">
-            <a:hlinkClick r:id="rId8"/>
-          </p:cNvPr>
-          <p:cNvPicPr>
-            <a:picLocks noChangeAspect="1"/>
-          </p:cNvPicPr>
-          <p:nvPr/>
-        </p:nvPicPr>
-        <p:blipFill>
-          <a:blip r:embed="rId7"/>
-          <a:stretch>
-            <a:fillRect/>
-          </a:stretch>
-        </p:blipFill>
-        <p:spPr>
-          <a:xfrm>
-            <a:off x="5381777" y="1463039"/>
-            <a:ext cx="1489405" cy="2651760"/>
-          </a:xfrm>
-          <a:prstGeom prst="rect">
-            <a:avLst/>
-          </a:prstGeom>
-        </p:spPr>
-      </p:pic>
-      <p:sp>
-        <p:nvSpPr>
-          <p:cNvPr id="17" name="TextBox 16"/>
-          <p:cNvSpPr txBox="1"/>
-          <p:nvPr/>
-        </p:nvSpPr>
-        <p:spPr>
-          <a:xfrm>
-            <a:off x="5074920" y="4142232"/>
-            <a:ext cx="2103120" cy="457200"/>
-          </a:xfrm>
-          <a:prstGeom prst="rect">
-            <a:avLst/>
-          </a:prstGeom>
-          <a:noFill/>
-        </p:spPr>
-        <p:txBody>
-          <a:bodyPr wrap="square" anchor="t" lIns="45720" rIns="45720" tIns="27432" bIns="27432">
-            <a:spAutoFit/>
-          </a:bodyPr>
-          <a:lstStyle/>
-          <a:p>
-            <a:pPr algn="ctr">
-              <a:lnSpc>
-                <a:spcPct val="100000"/>
-              </a:lnSpc>
-              <a:spcAft>
-                <a:spcPts val="600"/>
-              </a:spcAft>
-            </a:pPr>
-            <a:r>
-              <a:rPr sz="900" b="0">
+              <a:t>Back Market et Qonto : toutes leurs vidéos récentes sont sponsorisées. La vidéo la plus vue de Moniepoint (32,7 millions de vues) est une publicité.</a:t>
+            </a:r>
+          </a:p>
+          <a:p>
+            <a:pPr algn="l">
+              <a:lnSpc>
+                <a:spcPct val="110000"/>
+              </a:lnSpc>
+              <a:spcAft>
+                <a:spcPts val="100"/>
+              </a:spcAft>
+            </a:pPr>
+            <a:r>
+              <a:rPr sz="1100" b="1">
+                <a:solidFill>
+                  <a:srgbClr val="232754"/>
+                </a:solidFill>
+                <a:latin typeface="Work Sans"/>
+              </a:rPr>
+              <a:t>Sans payant, l'écart est énorme.</a:t>
+            </a:r>
+          </a:p>
+          <a:p>
+            <a:pPr algn="l">
+              <a:lnSpc>
+                <a:spcPct val="110000"/>
+              </a:lnSpc>
+              <a:spcAft>
+                <a:spcPts val="900"/>
+              </a:spcAft>
+            </a:pPr>
+            <a:r>
+              <a:rPr sz="1000" b="0">
                 <a:solidFill>
                   <a:srgbClr val="2B2A35"/>
                 </a:solidFill>
                 <a:latin typeface="Work Sans"/>
               </a:rPr>
-              <a:t>Orange CI · dirigeants chez les clients · 151</a:t>
-            </a:r>
-          </a:p>
-        </p:txBody>
-      </p:sp>
-      <p:sp>
-        <p:nvSpPr>
-          <p:cNvPr id="18" name="TextBox 17"/>
-          <p:cNvSpPr txBox="1"/>
-          <p:nvPr/>
-        </p:nvSpPr>
-        <p:spPr>
-          <a:xfrm>
-            <a:off x="7498079" y="1463040"/>
-            <a:ext cx="4142232" cy="4846320"/>
-          </a:xfrm>
-          <a:prstGeom prst="rect">
-            <a:avLst/>
-          </a:prstGeom>
-          <a:noFill/>
-        </p:spPr>
-        <p:txBody>
-          <a:bodyPr wrap="square" anchor="t" lIns="45720" rIns="45720" tIns="27432" bIns="27432">
-            <a:spAutoFit/>
-          </a:bodyPr>
-          <a:lstStyle/>
+              <a:t>Moniepoint : 9 590 vues en médiane sans payant, contre 2,4 millions avec. Burger King : 3 767 contre 383 400.</a:t>
+            </a:r>
+          </a:p>
           <a:p>
             <a:pPr algn="l">
               <a:lnSpc>
@@ -15008,13 +16967,13 @@
               </a:spcAft>
             </a:pPr>
             <a:r>
-              <a:rPr sz="1200" b="1">
+              <a:rPr sz="1100" b="1">
                 <a:solidFill>
                   <a:srgbClr val="232754"/>
                 </a:solidFill>
                 <a:latin typeface="Work Sans"/>
               </a:rPr>
-              <a:t>1. Le récit vidéo</a:t>
+              <a:t>Chowdeck gagne en organique.</a:t>
             </a:r>
           </a:p>
           <a:p>
@@ -15027,13 +16986,13 @@
               </a:spcAft>
             </a:pPr>
             <a:r>
-              <a:rPr sz="1100" b="0">
+              <a:rPr sz="1000" b="0">
                 <a:solidFill>
                   <a:srgbClr val="2B2A35"/>
                 </a:solidFill>
                 <a:latin typeface="Work Sans"/>
               </a:rPr>
-              <a:t>Un client, son problème, ce qui a changé. C'est le seul format de témoignage qui fait de gros chiffres dans le panel.</a:t>
+              <a:t>Aucune vidéo sponsorisée, 4 554 vues médianes, et 106 200 pour sa livraison dans la maison de Big Brother Naija.</a:t>
             </a:r>
           </a:p>
           <a:p>
@@ -15046,13 +17005,13 @@
               </a:spcAft>
             </a:pPr>
             <a:r>
-              <a:rPr sz="1200" b="1">
+              <a:rPr sz="1100" b="1">
                 <a:solidFill>
                   <a:srgbClr val="232754"/>
                 </a:solidFill>
                 <a:latin typeface="Work Sans"/>
               </a:rPr>
-              <a:t>2. Le message de client</a:t>
+              <a:t>Les coulisses d'équipe marchent.</a:t>
             </a:r>
           </a:p>
           <a:p>
@@ -15065,89 +17024,13 @@
               </a:spcAft>
             </a:pPr>
             <a:r>
-              <a:rPr sz="1100" b="0">
+              <a:rPr sz="1000" b="0">
                 <a:solidFill>
                   <a:srgbClr val="2B2A35"/>
                 </a:solidFill>
                 <a:latin typeface="Work Sans"/>
               </a:rPr>
-              <a:t>Rapide à produire, cohérent avec la grille, mais peu de réactions s'il n'y a pas de visage.</a:t>
-            </a:r>
-          </a:p>
-          <a:p>
-            <a:pPr algn="l">
-              <a:lnSpc>
-                <a:spcPct val="110000"/>
-              </a:lnSpc>
-              <a:spcAft>
-                <a:spcPts val="100"/>
-              </a:spcAft>
-            </a:pPr>
-            <a:r>
-              <a:rPr sz="1200" b="1">
-                <a:solidFill>
-                  <a:srgbClr val="232754"/>
-                </a:solidFill>
-                <a:latin typeface="Work Sans"/>
-              </a:rPr>
-              <a:t>3. L'équipe chez le client</a:t>
-            </a:r>
-          </a:p>
-          <a:p>
-            <a:pPr algn="l">
-              <a:lnSpc>
-                <a:spcPct val="110000"/>
-              </a:lnSpc>
-              <a:spcAft>
-                <a:spcPts val="900"/>
-              </a:spcAft>
-            </a:pPr>
-            <a:r>
-              <a:rPr sz="1100" b="0">
-                <a:solidFill>
-                  <a:srgbClr val="2B2A35"/>
-                </a:solidFill>
-                <a:latin typeface="Work Sans"/>
-              </a:rPr>
-              <a:t>Montre l'écoute plutôt que le résultat. Bon pour l'image, moyen pour l'engagement.</a:t>
-            </a:r>
-          </a:p>
-          <a:p>
-            <a:pPr algn="l">
-              <a:lnSpc>
-                <a:spcPct val="110000"/>
-              </a:lnSpc>
-              <a:spcAft>
-                <a:spcPts val="100"/>
-              </a:spcAft>
-            </a:pPr>
-            <a:r>
-              <a:rPr sz="1200" b="1">
-                <a:solidFill>
-                  <a:srgbClr val="232754"/>
-                </a:solidFill>
-                <a:latin typeface="Work Sans"/>
-              </a:rPr>
-              <a:t>Une règle</a:t>
-            </a:r>
-          </a:p>
-          <a:p>
-            <a:pPr algn="l">
-              <a:lnSpc>
-                <a:spcPct val="110000"/>
-              </a:lnSpc>
-              <a:spcAft>
-                <a:spcPts val="900"/>
-              </a:spcAft>
-            </a:pPr>
-            <a:r>
-              <a:rPr sz="1100" b="0">
-                <a:solidFill>
-                  <a:srgbClr val="2B2A35"/>
-                </a:solidFill>
-                <a:latin typeface="Work Sans"/>
-              </a:rPr>
-              <a:t>Un vrai client, son accord écrit, ses vrais mots. Jamais de citation inventée.</a:t>
+              <a:t>Flutterwave : 71 500 vues pour un jeu entre collègues, sur un compte de 4 067 abonnés.</a:t>
             </a:r>
           </a:p>
         </p:txBody>
@@ -15259,7 +17142,7 @@
                 </a:solidFill>
                 <a:latin typeface="Space Grotesk"/>
               </a:rPr>
-              <a:t>RECOMMANDATIONS</a:t>
+              <a:t>FACEBOOK ET TIKTOK</a:t>
             </a:r>
           </a:p>
         </p:txBody>
@@ -15301,7 +17184,7 @@
                 </a:solidFill>
                 <a:latin typeface="Funnel Display"/>
               </a:rPr>
-              <a:t>Ce qu'on en tire pour nos startups</a:t>
+              <a:t>Nigeria et France : ce qui marche sur TikTok et Facebook, en images</a:t>
             </a:r>
           </a:p>
         </p:txBody>
@@ -15466,8 +17349,8 @@
         </p:nvSpPr>
         <p:spPr>
           <a:xfrm>
-            <a:off x="548640" y="1463040"/>
-            <a:ext cx="3593592" cy="2240280"/>
+            <a:off x="548640" y="1371600"/>
+            <a:ext cx="2651760" cy="2011680"/>
           </a:xfrm>
           <a:prstGeom prst="rect">
             <a:avLst/>
@@ -15504,50 +17387,32 @@
           </a:p>
         </p:txBody>
       </p:sp>
-      <p:sp>
-        <p:nvSpPr>
-          <p:cNvPr id="10" name="Rectangle 9"/>
-          <p:cNvSpPr/>
-          <p:nvPr/>
-        </p:nvSpPr>
-        <p:spPr>
-          <a:xfrm>
-            <a:off x="731520" y="1645920"/>
-            <a:ext cx="457200" cy="457200"/>
-          </a:xfrm>
-          <a:prstGeom prst="rect">
-            <a:avLst/>
-          </a:prstGeom>
-          <a:solidFill>
-            <a:srgbClr val="007ABB"/>
-          </a:solidFill>
-          <a:ln>
-            <a:noFill/>
-          </a:ln>
-          <a:effectLst/>
-        </p:spPr>
-        <p:style>
-          <a:lnRef idx="1">
-            <a:schemeClr val="accent1"/>
-          </a:lnRef>
-          <a:fillRef idx="3">
-            <a:schemeClr val="accent1"/>
-          </a:fillRef>
-          <a:effectRef idx="2">
-            <a:schemeClr val="accent1"/>
-          </a:effectRef>
-          <a:fontRef idx="minor">
-            <a:schemeClr val="lt1"/>
-          </a:fontRef>
-        </p:style>
-        <p:txBody>
-          <a:bodyPr rtlCol="0" anchor="ctr"/>
-          <a:lstStyle/>
-          <a:p>
-            <a:pPr algn="ctr"/>
-          </a:p>
-        </p:txBody>
-      </p:sp>
+      <p:pic>
+        <p:nvPicPr>
+          <p:cNvPr id="10" name="Picture 9" descr="t_chow.jpg">
+            <a:hlinkClick r:id="rId4"/>
+          </p:cNvPr>
+          <p:cNvPicPr>
+            <a:picLocks noChangeAspect="1"/>
+          </p:cNvPicPr>
+          <p:nvPr/>
+        </p:nvPicPr>
+        <p:blipFill>
+          <a:blip r:embed="rId3"/>
+          <a:stretch>
+            <a:fillRect/>
+          </a:stretch>
+        </p:blipFill>
+        <p:spPr>
+          <a:xfrm>
+            <a:off x="1182166" y="1371600"/>
+            <a:ext cx="1384706" cy="2011680"/>
+          </a:xfrm>
+          <a:prstGeom prst="rect">
+            <a:avLst/>
+          </a:prstGeom>
+        </p:spPr>
+      </p:pic>
       <p:sp>
         <p:nvSpPr>
           <p:cNvPr id="11" name="TextBox 10"/>
@@ -15556,50 +17421,8 @@
         </p:nvSpPr>
         <p:spPr>
           <a:xfrm>
-            <a:off x="731520" y="1645920"/>
-            <a:ext cx="457200" cy="457200"/>
-          </a:xfrm>
-          <a:prstGeom prst="rect">
-            <a:avLst/>
-          </a:prstGeom>
-          <a:noFill/>
-        </p:spPr>
-        <p:txBody>
-          <a:bodyPr wrap="square" anchor="ctr" lIns="45720" rIns="45720" tIns="27432" bIns="27432">
-            <a:spAutoFit/>
-          </a:bodyPr>
-          <a:lstStyle/>
-          <a:p>
-            <a:pPr algn="ctr">
-              <a:lnSpc>
-                <a:spcPct val="110000"/>
-              </a:lnSpc>
-              <a:spcAft>
-                <a:spcPts val="600"/>
-              </a:spcAft>
-            </a:pPr>
-            <a:r>
-              <a:rPr sz="1600" b="1">
-                <a:solidFill>
-                  <a:srgbClr val="FFFFFF"/>
-                </a:solidFill>
-                <a:latin typeface="Space Grotesk"/>
-              </a:rPr>
-              <a:t>1</a:t>
-            </a:r>
-          </a:p>
-        </p:txBody>
-      </p:sp>
-      <p:sp>
-        <p:nvSpPr>
-          <p:cNvPr id="12" name="TextBox 11"/>
-          <p:cNvSpPr txBox="1"/>
-          <p:nvPr/>
-        </p:nvSpPr>
-        <p:spPr>
-          <a:xfrm>
-            <a:off x="1325880" y="1627632"/>
-            <a:ext cx="2697480" cy="731520"/>
+            <a:off x="548640" y="3410712"/>
+            <a:ext cx="2651760" cy="365760"/>
           </a:xfrm>
           <a:prstGeom prst="rect">
             <a:avLst/>
@@ -15612,7 +17435,7 @@
           </a:bodyPr>
           <a:lstStyle/>
           <a:p>
-            <a:pPr algn="l">
+            <a:pPr algn="ctr">
               <a:lnSpc>
                 <a:spcPct val="110000"/>
               </a:lnSpc>
@@ -15621,69 +17444,27 @@
               </a:spcAft>
             </a:pPr>
             <a:r>
-              <a:rPr sz="1400" b="1">
-                <a:solidFill>
-                  <a:srgbClr val="232754"/>
-                </a:solidFill>
-                <a:latin typeface="Funnel Display"/>
-              </a:rPr>
-              <a:t>Passer à la vidéo verticale d'abord</a:t>
-            </a:r>
-          </a:p>
-        </p:txBody>
-      </p:sp>
-      <p:sp>
-        <p:nvSpPr>
-          <p:cNvPr id="13" name="TextBox 12"/>
-          <p:cNvSpPr txBox="1"/>
-          <p:nvPr/>
-        </p:nvSpPr>
-        <p:spPr>
-          <a:xfrm>
-            <a:off x="731520" y="2377440"/>
-            <a:ext cx="3246120" cy="1280160"/>
-          </a:xfrm>
-          <a:prstGeom prst="rect">
-            <a:avLst/>
-          </a:prstGeom>
-          <a:noFill/>
-        </p:spPr>
-        <p:txBody>
-          <a:bodyPr wrap="square" anchor="t" lIns="45720" rIns="45720" tIns="27432" bIns="27432">
-            <a:spAutoFit/>
-          </a:bodyPr>
-          <a:lstStyle/>
-          <a:p>
-            <a:pPr algn="l">
-              <a:lnSpc>
-                <a:spcPct val="110000"/>
-              </a:lnSpc>
-              <a:spcAft>
-                <a:spcPts val="600"/>
-              </a:spcAft>
-            </a:pPr>
-            <a:r>
-              <a:rPr sz="1200" b="0">
+              <a:rPr sz="1000" b="0">
                 <a:solidFill>
                   <a:srgbClr val="2B2A35"/>
                 </a:solidFill>
                 <a:latin typeface="Work Sans"/>
               </a:rPr>
-              <a:t>Viser une publication sur deux en vidéo de 15 à 40 s : face caméra, sketch ou scène du quotidien.</a:t>
-            </a:r>
-          </a:p>
-        </p:txBody>
-      </p:sp>
-      <p:sp>
-        <p:nvSpPr>
-          <p:cNvPr id="14" name="Rectangle 13"/>
+              <a:t>TikTok · Chowdeck · 106 200 vues</a:t>
+            </a:r>
+          </a:p>
+        </p:txBody>
+      </p:sp>
+      <p:sp>
+        <p:nvSpPr>
+          <p:cNvPr id="12" name="Rectangle 11"/>
           <p:cNvSpPr/>
           <p:nvPr/>
         </p:nvSpPr>
         <p:spPr>
           <a:xfrm>
-            <a:off x="4297679" y="1463040"/>
-            <a:ext cx="3593592" cy="2240280"/>
+            <a:off x="3383280" y="1371600"/>
+            <a:ext cx="2651760" cy="2011680"/>
           </a:xfrm>
           <a:prstGeom prst="rect">
             <a:avLst/>
@@ -15720,102 +17501,42 @@
           </a:p>
         </p:txBody>
       </p:sp>
-      <p:sp>
-        <p:nvSpPr>
-          <p:cNvPr id="15" name="Rectangle 14"/>
-          <p:cNvSpPr/>
-          <p:nvPr/>
-        </p:nvSpPr>
-        <p:spPr>
-          <a:xfrm>
-            <a:off x="4480559" y="1645920"/>
-            <a:ext cx="457200" cy="457200"/>
-          </a:xfrm>
-          <a:prstGeom prst="rect">
-            <a:avLst/>
-          </a:prstGeom>
-          <a:solidFill>
-            <a:srgbClr val="007ABB"/>
-          </a:solidFill>
-          <a:ln>
-            <a:noFill/>
-          </a:ln>
-          <a:effectLst/>
-        </p:spPr>
-        <p:style>
-          <a:lnRef idx="1">
-            <a:schemeClr val="accent1"/>
-          </a:lnRef>
-          <a:fillRef idx="3">
-            <a:schemeClr val="accent1"/>
-          </a:fillRef>
-          <a:effectRef idx="2">
-            <a:schemeClr val="accent1"/>
-          </a:effectRef>
-          <a:fontRef idx="minor">
-            <a:schemeClr val="lt1"/>
-          </a:fontRef>
-        </p:style>
-        <p:txBody>
-          <a:bodyPr rtlCol="0" anchor="ctr"/>
-          <a:lstStyle/>
-          <a:p>
-            <a:pPr algn="ctr"/>
-          </a:p>
-        </p:txBody>
-      </p:sp>
-      <p:sp>
-        <p:nvSpPr>
-          <p:cNvPr id="16" name="TextBox 15"/>
+      <p:pic>
+        <p:nvPicPr>
+          <p:cNvPr id="13" name="Picture 12" descr="t_flw.jpg">
+            <a:hlinkClick r:id="rId6"/>
+          </p:cNvPr>
+          <p:cNvPicPr>
+            <a:picLocks noChangeAspect="1"/>
+          </p:cNvPicPr>
+          <p:nvPr/>
+        </p:nvPicPr>
+        <p:blipFill>
+          <a:blip r:embed="rId5"/>
+          <a:stretch>
+            <a:fillRect/>
+          </a:stretch>
+        </p:blipFill>
+        <p:spPr>
+          <a:xfrm>
+            <a:off x="4144213" y="1371600"/>
+            <a:ext cx="1129893" cy="2011680"/>
+          </a:xfrm>
+          <a:prstGeom prst="rect">
+            <a:avLst/>
+          </a:prstGeom>
+        </p:spPr>
+      </p:pic>
+      <p:sp>
+        <p:nvSpPr>
+          <p:cNvPr id="14" name="TextBox 13"/>
           <p:cNvSpPr txBox="1"/>
           <p:nvPr/>
         </p:nvSpPr>
         <p:spPr>
           <a:xfrm>
-            <a:off x="4480559" y="1645920"/>
-            <a:ext cx="457200" cy="457200"/>
-          </a:xfrm>
-          <a:prstGeom prst="rect">
-            <a:avLst/>
-          </a:prstGeom>
-          <a:noFill/>
-        </p:spPr>
-        <p:txBody>
-          <a:bodyPr wrap="square" anchor="ctr" lIns="45720" rIns="45720" tIns="27432" bIns="27432">
-            <a:spAutoFit/>
-          </a:bodyPr>
-          <a:lstStyle/>
-          <a:p>
-            <a:pPr algn="ctr">
-              <a:lnSpc>
-                <a:spcPct val="110000"/>
-              </a:lnSpc>
-              <a:spcAft>
-                <a:spcPts val="600"/>
-              </a:spcAft>
-            </a:pPr>
-            <a:r>
-              <a:rPr sz="1600" b="1">
-                <a:solidFill>
-                  <a:srgbClr val="FFFFFF"/>
-                </a:solidFill>
-                <a:latin typeface="Space Grotesk"/>
-              </a:rPr>
-              <a:t>2</a:t>
-            </a:r>
-          </a:p>
-        </p:txBody>
-      </p:sp>
-      <p:sp>
-        <p:nvSpPr>
-          <p:cNvPr id="17" name="TextBox 16"/>
-          <p:cNvSpPr txBox="1"/>
-          <p:nvPr/>
-        </p:nvSpPr>
-        <p:spPr>
-          <a:xfrm>
-            <a:off x="5074919" y="1627632"/>
-            <a:ext cx="2697480" cy="731520"/>
+            <a:off x="3383280" y="3410712"/>
+            <a:ext cx="2651760" cy="365760"/>
           </a:xfrm>
           <a:prstGeom prst="rect">
             <a:avLst/>
@@ -15828,7 +17549,7 @@
           </a:bodyPr>
           <a:lstStyle/>
           <a:p>
-            <a:pPr algn="l">
+            <a:pPr algn="ctr">
               <a:lnSpc>
                 <a:spcPct val="110000"/>
               </a:lnSpc>
@@ -15837,69 +17558,27 @@
               </a:spcAft>
             </a:pPr>
             <a:r>
-              <a:rPr sz="1400" b="1">
-                <a:solidFill>
-                  <a:srgbClr val="232754"/>
-                </a:solidFill>
-                <a:latin typeface="Funnel Display"/>
-              </a:rPr>
-              <a:t>Budgéter un créateur par mois</a:t>
-            </a:r>
-          </a:p>
-        </p:txBody>
-      </p:sp>
-      <p:sp>
-        <p:nvSpPr>
-          <p:cNvPr id="18" name="TextBox 17"/>
-          <p:cNvSpPr txBox="1"/>
-          <p:nvPr/>
-        </p:nvSpPr>
-        <p:spPr>
-          <a:xfrm>
-            <a:off x="4480559" y="2377440"/>
-            <a:ext cx="3246120" cy="1280160"/>
-          </a:xfrm>
-          <a:prstGeom prst="rect">
-            <a:avLst/>
-          </a:prstGeom>
-          <a:noFill/>
-        </p:spPr>
-        <p:txBody>
-          <a:bodyPr wrap="square" anchor="t" lIns="45720" rIns="45720" tIns="27432" bIns="27432">
-            <a:spAutoFit/>
-          </a:bodyPr>
-          <a:lstStyle/>
-          <a:p>
-            <a:pPr algn="l">
-              <a:lnSpc>
-                <a:spcPct val="110000"/>
-              </a:lnSpc>
-              <a:spcAft>
-                <a:spcPts val="600"/>
-              </a:spcAft>
-            </a:pPr>
-            <a:r>
-              <a:rPr sz="1200" b="0">
+              <a:rPr sz="1000" b="0">
                 <a:solidFill>
                   <a:srgbClr val="2B2A35"/>
                 </a:solidFill>
                 <a:latin typeface="Work Sans"/>
               </a:rPr>
-              <a:t>C'est le levier le plus fort du panel (× 4,3). Commencer petit, avec un brief clair et un code de suivi.</a:t>
-            </a:r>
-          </a:p>
-        </p:txBody>
-      </p:sp>
-      <p:sp>
-        <p:nvSpPr>
-          <p:cNvPr id="19" name="Rectangle 18"/>
+              <a:t>TikTok · Flutterwave · 71 500 vues</a:t>
+            </a:r>
+          </a:p>
+        </p:txBody>
+      </p:sp>
+      <p:sp>
+        <p:nvSpPr>
+          <p:cNvPr id="15" name="Rectangle 14"/>
           <p:cNvSpPr/>
           <p:nvPr/>
         </p:nvSpPr>
         <p:spPr>
           <a:xfrm>
-            <a:off x="8046719" y="1463040"/>
-            <a:ext cx="3593592" cy="2240280"/>
+            <a:off x="6217920" y="1371600"/>
+            <a:ext cx="2651760" cy="2011680"/>
           </a:xfrm>
           <a:prstGeom prst="rect">
             <a:avLst/>
@@ -15936,102 +17615,42 @@
           </a:p>
         </p:txBody>
       </p:sp>
-      <p:sp>
-        <p:nvSpPr>
-          <p:cNvPr id="20" name="Rectangle 19"/>
-          <p:cNvSpPr/>
-          <p:nvPr/>
-        </p:nvSpPr>
-        <p:spPr>
-          <a:xfrm>
-            <a:off x="8229599" y="1645920"/>
-            <a:ext cx="457200" cy="457200"/>
-          </a:xfrm>
-          <a:prstGeom prst="rect">
-            <a:avLst/>
-          </a:prstGeom>
-          <a:solidFill>
-            <a:srgbClr val="007ABB"/>
-          </a:solidFill>
-          <a:ln>
-            <a:noFill/>
-          </a:ln>
-          <a:effectLst/>
-        </p:spPr>
-        <p:style>
-          <a:lnRef idx="1">
-            <a:schemeClr val="accent1"/>
-          </a:lnRef>
-          <a:fillRef idx="3">
-            <a:schemeClr val="accent1"/>
-          </a:fillRef>
-          <a:effectRef idx="2">
-            <a:schemeClr val="accent1"/>
-          </a:effectRef>
-          <a:fontRef idx="minor">
-            <a:schemeClr val="lt1"/>
-          </a:fontRef>
-        </p:style>
-        <p:txBody>
-          <a:bodyPr rtlCol="0" anchor="ctr"/>
-          <a:lstStyle/>
-          <a:p>
-            <a:pPr algn="ctr"/>
-          </a:p>
-        </p:txBody>
-      </p:sp>
-      <p:sp>
-        <p:nvSpPr>
-          <p:cNvPr id="21" name="TextBox 20"/>
+      <p:pic>
+        <p:nvPicPr>
+          <p:cNvPr id="16" name="Picture 15" descr="t_monie.jpg">
+            <a:hlinkClick r:id="rId8"/>
+          </p:cNvPr>
+          <p:cNvPicPr>
+            <a:picLocks noChangeAspect="1"/>
+          </p:cNvPicPr>
+          <p:nvPr/>
+        </p:nvPicPr>
+        <p:blipFill>
+          <a:blip r:embed="rId7"/>
+          <a:stretch>
+            <a:fillRect/>
+          </a:stretch>
+        </p:blipFill>
+        <p:spPr>
+          <a:xfrm>
+            <a:off x="6217920" y="1630527"/>
+            <a:ext cx="2651760" cy="1493824"/>
+          </a:xfrm>
+          <a:prstGeom prst="rect">
+            <a:avLst/>
+          </a:prstGeom>
+        </p:spPr>
+      </p:pic>
+      <p:sp>
+        <p:nvSpPr>
+          <p:cNvPr id="17" name="TextBox 16"/>
           <p:cNvSpPr txBox="1"/>
           <p:nvPr/>
         </p:nvSpPr>
         <p:spPr>
           <a:xfrm>
-            <a:off x="8229599" y="1645920"/>
-            <a:ext cx="457200" cy="457200"/>
-          </a:xfrm>
-          <a:prstGeom prst="rect">
-            <a:avLst/>
-          </a:prstGeom>
-          <a:noFill/>
-        </p:spPr>
-        <p:txBody>
-          <a:bodyPr wrap="square" anchor="ctr" lIns="45720" rIns="45720" tIns="27432" bIns="27432">
-            <a:spAutoFit/>
-          </a:bodyPr>
-          <a:lstStyle/>
-          <a:p>
-            <a:pPr algn="ctr">
-              <a:lnSpc>
-                <a:spcPct val="110000"/>
-              </a:lnSpc>
-              <a:spcAft>
-                <a:spcPts val="600"/>
-              </a:spcAft>
-            </a:pPr>
-            <a:r>
-              <a:rPr sz="1600" b="1">
-                <a:solidFill>
-                  <a:srgbClr val="FFFFFF"/>
-                </a:solidFill>
-                <a:latin typeface="Space Grotesk"/>
-              </a:rPr>
-              <a:t>3</a:t>
-            </a:r>
-          </a:p>
-        </p:txBody>
-      </p:sp>
-      <p:sp>
-        <p:nvSpPr>
-          <p:cNvPr id="22" name="TextBox 21"/>
-          <p:cNvSpPr txBox="1"/>
-          <p:nvPr/>
-        </p:nvSpPr>
-        <p:spPr>
-          <a:xfrm>
-            <a:off x="8823959" y="1627632"/>
-            <a:ext cx="2697480" cy="731520"/>
+            <a:off x="6217920" y="3410712"/>
+            <a:ext cx="2651760" cy="365760"/>
           </a:xfrm>
           <a:prstGeom prst="rect">
             <a:avLst/>
@@ -16044,7 +17663,7 @@
           </a:bodyPr>
           <a:lstStyle/>
           <a:p>
-            <a:pPr algn="l">
+            <a:pPr algn="ctr">
               <a:lnSpc>
                 <a:spcPct val="110000"/>
               </a:lnSpc>
@@ -16053,69 +17672,27 @@
               </a:spcAft>
             </a:pPr>
             <a:r>
-              <a:rPr sz="1400" b="1">
-                <a:solidFill>
-                  <a:srgbClr val="232754"/>
-                </a:solidFill>
-                <a:latin typeface="Funnel Display"/>
-              </a:rPr>
-              <a:t>Parler la langue des clients</a:t>
-            </a:r>
-          </a:p>
-        </p:txBody>
-      </p:sp>
-      <p:sp>
-        <p:nvSpPr>
-          <p:cNvPr id="23" name="TextBox 22"/>
-          <p:cNvSpPr txBox="1"/>
-          <p:nvPr/>
-        </p:nvSpPr>
-        <p:spPr>
-          <a:xfrm>
-            <a:off x="8229599" y="2377440"/>
-            <a:ext cx="3246120" cy="1280160"/>
-          </a:xfrm>
-          <a:prstGeom prst="rect">
-            <a:avLst/>
-          </a:prstGeom>
-          <a:noFill/>
-        </p:spPr>
-        <p:txBody>
-          <a:bodyPr wrap="square" anchor="t" lIns="45720" rIns="45720" tIns="27432" bIns="27432">
-            <a:spAutoFit/>
-          </a:bodyPr>
-          <a:lstStyle/>
-          <a:p>
-            <a:pPr algn="l">
-              <a:lnSpc>
-                <a:spcPct val="110000"/>
-              </a:lnSpc>
-              <a:spcAft>
-                <a:spcPts val="600"/>
-              </a:spcAft>
-            </a:pPr>
-            <a:r>
-              <a:rPr sz="1200" b="0">
+              <a:rPr sz="1000" b="0">
                 <a:solidFill>
                   <a:srgbClr val="2B2A35"/>
                 </a:solidFill>
                 <a:latin typeface="Work Sans"/>
               </a:rPr>
-              <a:t>Nouchi léger à Abidjan, wolof à Dakar, pidgin à Lagos, quand la cible s'y retrouve.</a:t>
-            </a:r>
-          </a:p>
-        </p:txBody>
-      </p:sp>
-      <p:sp>
-        <p:nvSpPr>
-          <p:cNvPr id="24" name="Rectangle 23"/>
+              <a:t>TikTok · Moniepoint, série bureau · 13 200 vues</a:t>
+            </a:r>
+          </a:p>
+        </p:txBody>
+      </p:sp>
+      <p:sp>
+        <p:nvSpPr>
+          <p:cNvPr id="18" name="Rectangle 17"/>
           <p:cNvSpPr/>
           <p:nvPr/>
         </p:nvSpPr>
         <p:spPr>
           <a:xfrm>
-            <a:off x="548640" y="3886200"/>
-            <a:ext cx="3593592" cy="2240280"/>
+            <a:off x="9052560" y="1371600"/>
+            <a:ext cx="2651760" cy="2011680"/>
           </a:xfrm>
           <a:prstGeom prst="rect">
             <a:avLst/>
@@ -16152,102 +17729,42 @@
           </a:p>
         </p:txBody>
       </p:sp>
-      <p:sp>
-        <p:nvSpPr>
-          <p:cNvPr id="25" name="Rectangle 24"/>
-          <p:cNvSpPr/>
-          <p:nvPr/>
-        </p:nvSpPr>
-        <p:spPr>
-          <a:xfrm>
-            <a:off x="731520" y="4069080"/>
-            <a:ext cx="457200" cy="457200"/>
-          </a:xfrm>
-          <a:prstGeom prst="rect">
-            <a:avLst/>
-          </a:prstGeom>
-          <a:solidFill>
-            <a:srgbClr val="007ABB"/>
-          </a:solidFill>
-          <a:ln>
-            <a:noFill/>
-          </a:ln>
-          <a:effectLst/>
-        </p:spPr>
-        <p:style>
-          <a:lnRef idx="1">
-            <a:schemeClr val="accent1"/>
-          </a:lnRef>
-          <a:fillRef idx="3">
-            <a:schemeClr val="accent1"/>
-          </a:fillRef>
-          <a:effectRef idx="2">
-            <a:schemeClr val="accent1"/>
-          </a:effectRef>
-          <a:fontRef idx="minor">
-            <a:schemeClr val="lt1"/>
-          </a:fontRef>
-        </p:style>
-        <p:txBody>
-          <a:bodyPr rtlCol="0" anchor="ctr"/>
-          <a:lstStyle/>
-          <a:p>
-            <a:pPr algn="ctr"/>
-          </a:p>
-        </p:txBody>
-      </p:sp>
-      <p:sp>
-        <p:nvSpPr>
-          <p:cNvPr id="26" name="TextBox 25"/>
+      <p:pic>
+        <p:nvPicPr>
+          <p:cNvPr id="19" name="Picture 18" descr="t_docto.jpg">
+            <a:hlinkClick r:id="rId10"/>
+          </p:cNvPr>
+          <p:cNvPicPr>
+            <a:picLocks noChangeAspect="1"/>
+          </p:cNvPicPr>
+          <p:nvPr/>
+        </p:nvPicPr>
+        <p:blipFill>
+          <a:blip r:embed="rId9"/>
+          <a:stretch>
+            <a:fillRect/>
+          </a:stretch>
+        </p:blipFill>
+        <p:spPr>
+          <a:xfrm>
+            <a:off x="9570415" y="1371600"/>
+            <a:ext cx="1616049" cy="2011680"/>
+          </a:xfrm>
+          <a:prstGeom prst="rect">
+            <a:avLst/>
+          </a:prstGeom>
+        </p:spPr>
+      </p:pic>
+      <p:sp>
+        <p:nvSpPr>
+          <p:cNvPr id="20" name="TextBox 19"/>
           <p:cNvSpPr txBox="1"/>
           <p:nvPr/>
         </p:nvSpPr>
         <p:spPr>
           <a:xfrm>
-            <a:off x="731520" y="4069080"/>
-            <a:ext cx="457200" cy="457200"/>
-          </a:xfrm>
-          <a:prstGeom prst="rect">
-            <a:avLst/>
-          </a:prstGeom>
-          <a:noFill/>
-        </p:spPr>
-        <p:txBody>
-          <a:bodyPr wrap="square" anchor="ctr" lIns="45720" rIns="45720" tIns="27432" bIns="27432">
-            <a:spAutoFit/>
-          </a:bodyPr>
-          <a:lstStyle/>
-          <a:p>
-            <a:pPr algn="ctr">
-              <a:lnSpc>
-                <a:spcPct val="110000"/>
-              </a:lnSpc>
-              <a:spcAft>
-                <a:spcPts val="600"/>
-              </a:spcAft>
-            </a:pPr>
-            <a:r>
-              <a:rPr sz="1600" b="1">
-                <a:solidFill>
-                  <a:srgbClr val="FFFFFF"/>
-                </a:solidFill>
-                <a:latin typeface="Space Grotesk"/>
-              </a:rPr>
-              <a:t>4</a:t>
-            </a:r>
-          </a:p>
-        </p:txBody>
-      </p:sp>
-      <p:sp>
-        <p:nvSpPr>
-          <p:cNvPr id="27" name="TextBox 26"/>
-          <p:cNvSpPr txBox="1"/>
-          <p:nvPr/>
-        </p:nvSpPr>
-        <p:spPr>
-          <a:xfrm>
-            <a:off x="1325880" y="4050791"/>
-            <a:ext cx="2697480" cy="731520"/>
+            <a:off x="9052560" y="3410712"/>
+            <a:ext cx="2651760" cy="365760"/>
           </a:xfrm>
           <a:prstGeom prst="rect">
             <a:avLst/>
@@ -16260,7 +17777,7 @@
           </a:bodyPr>
           <a:lstStyle/>
           <a:p>
-            <a:pPr algn="l">
+            <a:pPr algn="ctr">
               <a:lnSpc>
                 <a:spcPct val="110000"/>
               </a:lnSpc>
@@ -16269,69 +17786,27 @@
               </a:spcAft>
             </a:pPr>
             <a:r>
-              <a:rPr sz="1400" b="1">
-                <a:solidFill>
-                  <a:srgbClr val="232754"/>
-                </a:solidFill>
-                <a:latin typeface="Funnel Display"/>
-              </a:rPr>
-              <a:t>Sortir de l'affiche promo</a:t>
-            </a:r>
-          </a:p>
-        </p:txBody>
-      </p:sp>
-      <p:sp>
-        <p:nvSpPr>
-          <p:cNvPr id="28" name="TextBox 27"/>
-          <p:cNvSpPr txBox="1"/>
-          <p:nvPr/>
-        </p:nvSpPr>
-        <p:spPr>
-          <a:xfrm>
-            <a:off x="731520" y="4800600"/>
-            <a:ext cx="3246120" cy="1280160"/>
-          </a:xfrm>
-          <a:prstGeom prst="rect">
-            <a:avLst/>
-          </a:prstGeom>
-          <a:noFill/>
-        </p:spPr>
-        <p:txBody>
-          <a:bodyPr wrap="square" anchor="t" lIns="45720" rIns="45720" tIns="27432" bIns="27432">
-            <a:spAutoFit/>
-          </a:bodyPr>
-          <a:lstStyle/>
-          <a:p>
-            <a:pPr algn="l">
-              <a:lnSpc>
-                <a:spcPct val="110000"/>
-              </a:lnSpc>
-              <a:spcAft>
-                <a:spcPts val="600"/>
-              </a:spcAft>
-            </a:pPr>
-            <a:r>
-              <a:rPr sz="1200" b="0">
+              <a:rPr sz="1000" b="0">
                 <a:solidFill>
                   <a:srgbClr val="2B2A35"/>
                 </a:solidFill>
                 <a:latin typeface="Work Sans"/>
               </a:rPr>
-              <a:t>Une offre = une phrase et une photo, le détail dans la légende. Comparer sur deux semaines.</a:t>
-            </a:r>
-          </a:p>
-        </p:txBody>
-      </p:sp>
-      <p:sp>
-        <p:nvSpPr>
-          <p:cNvPr id="29" name="Rectangle 28"/>
+              <a:t>TikTok · Doctolib, guide en diaporama</a:t>
+            </a:r>
+          </a:p>
+        </p:txBody>
+      </p:sp>
+      <p:sp>
+        <p:nvSpPr>
+          <p:cNvPr id="21" name="Rectangle 20"/>
           <p:cNvSpPr/>
           <p:nvPr/>
         </p:nvSpPr>
         <p:spPr>
           <a:xfrm>
-            <a:off x="4297679" y="3886200"/>
-            <a:ext cx="3593592" cy="2240280"/>
+            <a:off x="548640" y="3886200"/>
+            <a:ext cx="2651760" cy="2011680"/>
           </a:xfrm>
           <a:prstGeom prst="rect">
             <a:avLst/>
@@ -16368,102 +17843,42 @@
           </a:p>
         </p:txBody>
       </p:sp>
-      <p:sp>
-        <p:nvSpPr>
-          <p:cNvPr id="30" name="Rectangle 29"/>
-          <p:cNvSpPr/>
-          <p:nvPr/>
-        </p:nvSpPr>
-        <p:spPr>
-          <a:xfrm>
-            <a:off x="4480559" y="4069080"/>
-            <a:ext cx="457200" cy="457200"/>
-          </a:xfrm>
-          <a:prstGeom prst="rect">
-            <a:avLst/>
-          </a:prstGeom>
-          <a:solidFill>
-            <a:srgbClr val="007ABB"/>
-          </a:solidFill>
-          <a:ln>
-            <a:noFill/>
-          </a:ln>
-          <a:effectLst/>
-        </p:spPr>
-        <p:style>
-          <a:lnRef idx="1">
-            <a:schemeClr val="accent1"/>
-          </a:lnRef>
-          <a:fillRef idx="3">
-            <a:schemeClr val="accent1"/>
-          </a:fillRef>
-          <a:effectRef idx="2">
-            <a:schemeClr val="accent1"/>
-          </a:effectRef>
-          <a:fontRef idx="minor">
-            <a:schemeClr val="lt1"/>
-          </a:fontRef>
-        </p:style>
-        <p:txBody>
-          <a:bodyPr rtlCol="0" anchor="ctr"/>
-          <a:lstStyle/>
-          <a:p>
-            <a:pPr algn="ctr"/>
-          </a:p>
-        </p:txBody>
-      </p:sp>
-      <p:sp>
-        <p:nvSpPr>
-          <p:cNvPr id="31" name="TextBox 30"/>
+      <p:pic>
+        <p:nvPicPr>
+          <p:cNvPr id="22" name="Picture 21" descr="t_monie_ad.jpg">
+            <a:hlinkClick r:id="rId12"/>
+          </p:cNvPr>
+          <p:cNvPicPr>
+            <a:picLocks noChangeAspect="1"/>
+          </p:cNvPicPr>
+          <p:nvPr/>
+        </p:nvPicPr>
+        <p:blipFill>
+          <a:blip r:embed="rId11"/>
+          <a:stretch>
+            <a:fillRect/>
+          </a:stretch>
+        </p:blipFill>
+        <p:spPr>
+          <a:xfrm>
+            <a:off x="1069848" y="3886200"/>
+            <a:ext cx="1609344" cy="2011680"/>
+          </a:xfrm>
+          <a:prstGeom prst="rect">
+            <a:avLst/>
+          </a:prstGeom>
+        </p:spPr>
+      </p:pic>
+      <p:sp>
+        <p:nvSpPr>
+          <p:cNvPr id="23" name="TextBox 22"/>
           <p:cNvSpPr txBox="1"/>
           <p:nvPr/>
         </p:nvSpPr>
         <p:spPr>
           <a:xfrm>
-            <a:off x="4480559" y="4069080"/>
-            <a:ext cx="457200" cy="457200"/>
-          </a:xfrm>
-          <a:prstGeom prst="rect">
-            <a:avLst/>
-          </a:prstGeom>
-          <a:noFill/>
-        </p:spPr>
-        <p:txBody>
-          <a:bodyPr wrap="square" anchor="ctr" lIns="45720" rIns="45720" tIns="27432" bIns="27432">
-            <a:spAutoFit/>
-          </a:bodyPr>
-          <a:lstStyle/>
-          <a:p>
-            <a:pPr algn="ctr">
-              <a:lnSpc>
-                <a:spcPct val="110000"/>
-              </a:lnSpc>
-              <a:spcAft>
-                <a:spcPts val="600"/>
-              </a:spcAft>
-            </a:pPr>
-            <a:r>
-              <a:rPr sz="1600" b="1">
-                <a:solidFill>
-                  <a:srgbClr val="FFFFFF"/>
-                </a:solidFill>
-                <a:latin typeface="Space Grotesk"/>
-              </a:rPr>
-              <a:t>5</a:t>
-            </a:r>
-          </a:p>
-        </p:txBody>
-      </p:sp>
-      <p:sp>
-        <p:nvSpPr>
-          <p:cNvPr id="32" name="TextBox 31"/>
-          <p:cNvSpPr txBox="1"/>
-          <p:nvPr/>
-        </p:nvSpPr>
-        <p:spPr>
-          <a:xfrm>
-            <a:off x="5074919" y="4050791"/>
-            <a:ext cx="2697480" cy="731520"/>
+            <a:off x="548640" y="5925312"/>
+            <a:ext cx="2651760" cy="365760"/>
           </a:xfrm>
           <a:prstGeom prst="rect">
             <a:avLst/>
@@ -16476,7 +17891,7 @@
           </a:bodyPr>
           <a:lstStyle/>
           <a:p>
-            <a:pPr algn="l">
+            <a:pPr algn="ctr">
               <a:lnSpc>
                 <a:spcPct val="110000"/>
               </a:lnSpc>
@@ -16485,69 +17900,27 @@
               </a:spcAft>
             </a:pPr>
             <a:r>
-              <a:rPr sz="1400" b="1">
-                <a:solidFill>
-                  <a:srgbClr val="232754"/>
-                </a:solidFill>
-                <a:latin typeface="Funnel Display"/>
-              </a:rPr>
-              <a:t>Faire un vrai témoignage vidéo par trimestre</a:t>
-            </a:r>
-          </a:p>
-        </p:txBody>
-      </p:sp>
-      <p:sp>
-        <p:nvSpPr>
-          <p:cNvPr id="33" name="TextBox 32"/>
-          <p:cNvSpPr txBox="1"/>
-          <p:nvPr/>
-        </p:nvSpPr>
-        <p:spPr>
-          <a:xfrm>
-            <a:off x="4480559" y="4800600"/>
-            <a:ext cx="3246120" cy="1280160"/>
-          </a:xfrm>
-          <a:prstGeom prst="rect">
-            <a:avLst/>
-          </a:prstGeom>
-          <a:noFill/>
-        </p:spPr>
-        <p:txBody>
-          <a:bodyPr wrap="square" anchor="t" lIns="45720" rIns="45720" tIns="27432" bIns="27432">
-            <a:spAutoFit/>
-          </a:bodyPr>
-          <a:lstStyle/>
-          <a:p>
-            <a:pPr algn="l">
-              <a:lnSpc>
-                <a:spcPct val="110000"/>
-              </a:lnSpc>
-              <a:spcAft>
-                <a:spcPts val="600"/>
-              </a:spcAft>
-            </a:pPr>
-            <a:r>
-              <a:rPr sz="1200" b="0">
+              <a:rPr sz="1000" b="0">
                 <a:solidFill>
                   <a:srgbClr val="2B2A35"/>
                 </a:solidFill>
                 <a:latin typeface="Work Sans"/>
               </a:rPr>
-              <a:t>Un client, 45 secondes, son accord écrit. À recouper en carte pour LinkedIn.</a:t>
-            </a:r>
-          </a:p>
-        </p:txBody>
-      </p:sp>
-      <p:sp>
-        <p:nvSpPr>
-          <p:cNvPr id="34" name="Rectangle 33"/>
+              <a:t>TikTok sponsorisé · Moniepoint · 32,7 M de vues</a:t>
+            </a:r>
+          </a:p>
+        </p:txBody>
+      </p:sp>
+      <p:sp>
+        <p:nvSpPr>
+          <p:cNvPr id="24" name="Rectangle 23"/>
           <p:cNvSpPr/>
           <p:nvPr/>
         </p:nvSpPr>
         <p:spPr>
           <a:xfrm>
-            <a:off x="8046719" y="3886200"/>
-            <a:ext cx="3593592" cy="2240280"/>
+            <a:off x="3383280" y="3886200"/>
+            <a:ext cx="2651760" cy="2011680"/>
           </a:xfrm>
           <a:prstGeom prst="rect">
             <a:avLst/>
@@ -16584,25 +17957,95 @@
           </a:p>
         </p:txBody>
       </p:sp>
-      <p:sp>
-        <p:nvSpPr>
-          <p:cNvPr id="35" name="Rectangle 34"/>
+      <p:pic>
+        <p:nvPicPr>
+          <p:cNvPr id="25" name="Picture 24" descr="t_qonto_ad.jpg">
+            <a:hlinkClick r:id="rId14"/>
+          </p:cNvPr>
+          <p:cNvPicPr>
+            <a:picLocks noChangeAspect="1"/>
+          </p:cNvPicPr>
+          <p:nvPr/>
+        </p:nvPicPr>
+        <p:blipFill>
+          <a:blip r:embed="rId13"/>
+          <a:stretch>
+            <a:fillRect/>
+          </a:stretch>
+        </p:blipFill>
+        <p:spPr>
+          <a:xfrm>
+            <a:off x="3887724" y="3886200"/>
+            <a:ext cx="1642872" cy="2011680"/>
+          </a:xfrm>
+          <a:prstGeom prst="rect">
+            <a:avLst/>
+          </a:prstGeom>
+        </p:spPr>
+      </p:pic>
+      <p:sp>
+        <p:nvSpPr>
+          <p:cNvPr id="26" name="TextBox 25"/>
+          <p:cNvSpPr txBox="1"/>
+          <p:nvPr/>
+        </p:nvSpPr>
+        <p:spPr>
+          <a:xfrm>
+            <a:off x="3383280" y="5925312"/>
+            <a:ext cx="2651760" cy="365760"/>
+          </a:xfrm>
+          <a:prstGeom prst="rect">
+            <a:avLst/>
+          </a:prstGeom>
+          <a:noFill/>
+        </p:spPr>
+        <p:txBody>
+          <a:bodyPr wrap="square" anchor="t" lIns="45720" rIns="45720" tIns="27432" bIns="27432">
+            <a:spAutoFit/>
+          </a:bodyPr>
+          <a:lstStyle/>
+          <a:p>
+            <a:pPr algn="ctr">
+              <a:lnSpc>
+                <a:spcPct val="110000"/>
+              </a:lnSpc>
+              <a:spcAft>
+                <a:spcPts val="600"/>
+              </a:spcAft>
+            </a:pPr>
+            <a:r>
+              <a:rPr sz="1000" b="0">
+                <a:solidFill>
+                  <a:srgbClr val="2B2A35"/>
+                </a:solidFill>
+                <a:latin typeface="Work Sans"/>
+              </a:rPr>
+              <a:t>TikTok sponsorisé · Qonto, court-métrage · 934 000 vues</a:t>
+            </a:r>
+          </a:p>
+        </p:txBody>
+      </p:sp>
+      <p:sp>
+        <p:nvSpPr>
+          <p:cNvPr id="27" name="Rectangle 26"/>
           <p:cNvSpPr/>
           <p:nvPr/>
         </p:nvSpPr>
         <p:spPr>
           <a:xfrm>
-            <a:off x="8229599" y="4069080"/>
-            <a:ext cx="457200" cy="457200"/>
+            <a:off x="6217920" y="3886200"/>
+            <a:ext cx="2651760" cy="2011680"/>
           </a:xfrm>
           <a:prstGeom prst="rect">
             <a:avLst/>
           </a:prstGeom>
           <a:solidFill>
-            <a:srgbClr val="007ABB"/>
+            <a:srgbClr val="FFFFFF"/>
           </a:solidFill>
-          <a:ln>
-            <a:noFill/>
+          <a:ln w="12700">
+            <a:solidFill>
+              <a:srgbClr val="E4E8ED"/>
+            </a:solidFill>
           </a:ln>
           <a:effectLst/>
         </p:spPr>
@@ -16628,58 +18071,42 @@
           </a:p>
         </p:txBody>
       </p:sp>
-      <p:sp>
-        <p:nvSpPr>
-          <p:cNvPr id="36" name="TextBox 35"/>
+      <p:pic>
+        <p:nvPicPr>
+          <p:cNvPr id="28" name="Picture 27" descr="f_bk.jpg">
+            <a:hlinkClick r:id="rId16"/>
+          </p:cNvPr>
+          <p:cNvPicPr>
+            <a:picLocks noChangeAspect="1"/>
+          </p:cNvPicPr>
+          <p:nvPr/>
+        </p:nvPicPr>
+        <p:blipFill>
+          <a:blip r:embed="rId15"/>
+          <a:stretch>
+            <a:fillRect/>
+          </a:stretch>
+        </p:blipFill>
+        <p:spPr>
+          <a:xfrm>
+            <a:off x="6978853" y="3886200"/>
+            <a:ext cx="1129893" cy="2011680"/>
+          </a:xfrm>
+          <a:prstGeom prst="rect">
+            <a:avLst/>
+          </a:prstGeom>
+        </p:spPr>
+      </p:pic>
+      <p:sp>
+        <p:nvSpPr>
+          <p:cNvPr id="29" name="TextBox 28"/>
           <p:cNvSpPr txBox="1"/>
           <p:nvPr/>
         </p:nvSpPr>
         <p:spPr>
           <a:xfrm>
-            <a:off x="8229599" y="4069080"/>
-            <a:ext cx="457200" cy="457200"/>
-          </a:xfrm>
-          <a:prstGeom prst="rect">
-            <a:avLst/>
-          </a:prstGeom>
-          <a:noFill/>
-        </p:spPr>
-        <p:txBody>
-          <a:bodyPr wrap="square" anchor="ctr" lIns="45720" rIns="45720" tIns="27432" bIns="27432">
-            <a:spAutoFit/>
-          </a:bodyPr>
-          <a:lstStyle/>
-          <a:p>
-            <a:pPr algn="ctr">
-              <a:lnSpc>
-                <a:spcPct val="110000"/>
-              </a:lnSpc>
-              <a:spcAft>
-                <a:spcPts val="600"/>
-              </a:spcAft>
-            </a:pPr>
-            <a:r>
-              <a:rPr sz="1600" b="1">
-                <a:solidFill>
-                  <a:srgbClr val="FFFFFF"/>
-                </a:solidFill>
-                <a:latin typeface="Space Grotesk"/>
-              </a:rPr>
-              <a:t>6</a:t>
-            </a:r>
-          </a:p>
-        </p:txBody>
-      </p:sp>
-      <p:sp>
-        <p:nvSpPr>
-          <p:cNvPr id="37" name="TextBox 36"/>
-          <p:cNvSpPr txBox="1"/>
-          <p:nvPr/>
-        </p:nvSpPr>
-        <p:spPr>
-          <a:xfrm>
-            <a:off x="8823959" y="4050791"/>
-            <a:ext cx="2697480" cy="731520"/>
+            <a:off x="6217920" y="5925312"/>
+            <a:ext cx="2651760" cy="365760"/>
           </a:xfrm>
           <a:prstGeom prst="rect">
             <a:avLst/>
@@ -16692,7 +18119,7 @@
           </a:bodyPr>
           <a:lstStyle/>
           <a:p>
-            <a:pPr algn="l">
+            <a:pPr algn="ctr">
               <a:lnSpc>
                 <a:spcPct val="110000"/>
               </a:lnSpc>
@@ -16701,27 +18128,27 @@
               </a:spcAft>
             </a:pPr>
             <a:r>
-              <a:rPr sz="1400" b="1">
-                <a:solidFill>
-                  <a:srgbClr val="232754"/>
-                </a:solidFill>
-                <a:latin typeface="Funnel Display"/>
-              </a:rPr>
-              <a:t>Sur LinkedIn, montrer des gens et des étapes</a:t>
-            </a:r>
-          </a:p>
-        </p:txBody>
-      </p:sp>
-      <p:sp>
-        <p:nvSpPr>
-          <p:cNvPr id="38" name="TextBox 37"/>
+              <a:rPr sz="1000" b="0">
+                <a:solidFill>
+                  <a:srgbClr val="2B2A35"/>
+                </a:solidFill>
+                <a:latin typeface="Work Sans"/>
+              </a:rPr>
+              <a:t>Facebook · Burger King x FC 27 · 287 215 vues</a:t>
+            </a:r>
+          </a:p>
+        </p:txBody>
+      </p:sp>
+      <p:sp>
+        <p:nvSpPr>
+          <p:cNvPr id="30" name="TextBox 29"/>
           <p:cNvSpPr txBox="1"/>
           <p:nvPr/>
         </p:nvSpPr>
         <p:spPr>
           <a:xfrm>
-            <a:off x="8229599" y="4800600"/>
-            <a:ext cx="3246120" cy="1280160"/>
+            <a:off x="9052560" y="3977639"/>
+            <a:ext cx="2606040" cy="2286000"/>
           </a:xfrm>
           <a:prstGeom prst="rect">
             <a:avLst/>
@@ -16743,13 +18170,13 @@
               </a:spcAft>
             </a:pPr>
             <a:r>
-              <a:rPr sz="1200" b="0">
-                <a:solidFill>
-                  <a:srgbClr val="2B2A35"/>
+              <a:rPr sz="1100" b="0">
+                <a:solidFill>
+                  <a:srgbClr val="232754"/>
                 </a:solidFill>
                 <a:latin typeface="Work Sans"/>
               </a:rPr>
-              <a:t>Recrues, partenaires, agréments, chiffres franchis, plutôt que le produit seul.</a:t>
+              <a:t>Ce qu'on voit : de vraies personnes, des coulisses et des séries. Les seuls visuels graphiques qui marchent sont soit un guide utile (Doctolib), soit poussés en publicité (Moniepoint).</a:t>
             </a:r>
           </a:p>
         </p:txBody>
@@ -17991,7 +19418,7 @@
                 </a:solidFill>
                 <a:latin typeface="Work Sans"/>
               </a:rPr>
-              <a:t>Facebook et TikTok (Côte d'Ivoire, Sénégal)</a:t>
+              <a:t>Facebook et TikTok, quatre pays</a:t>
             </a:r>
           </a:p>
         </p:txBody>
@@ -18203,7 +19630,7 @@
                 </a:solidFill>
                 <a:latin typeface="Space Grotesk"/>
               </a:rPr>
-              <a:t>p. 17</a:t>
+              <a:t>p. 20</a:t>
             </a:r>
           </a:p>
         </p:txBody>
@@ -18373,7 +19800,7 @@
                 </a:solidFill>
                 <a:latin typeface="Space Grotesk"/>
               </a:rPr>
-              <a:t>p. 19</a:t>
+              <a:t>p. 22</a:t>
             </a:r>
           </a:p>
         </p:txBody>
@@ -18543,7 +19970,7 @@
                 </a:solidFill>
                 <a:latin typeface="Space Grotesk"/>
               </a:rPr>
-              <a:t>p. 20</a:t>
+              <a:t>p. 23</a:t>
             </a:r>
           </a:p>
         </p:txBody>
@@ -18655,7 +20082,7 @@
                 </a:solidFill>
                 <a:latin typeface="Space Grotesk"/>
               </a:rPr>
-              <a:t>LIMITES ET SUITE</a:t>
+              <a:t>LES QUATRE FAMILLES DE CONTENU</a:t>
             </a:r>
           </a:p>
         </p:txBody>
@@ -18697,7 +20124,7 @@
                 </a:solidFill>
                 <a:latin typeface="Funnel Display"/>
               </a:rPr>
-              <a:t>Limites et suite</a:t>
+              <a:t>Les quatre familles de contenu, vues sur le terrain</a:t>
             </a:r>
           </a:p>
         </p:txBody>
@@ -18856,170 +20283,14 @@
       </p:sp>
       <p:sp>
         <p:nvSpPr>
-          <p:cNvPr id="9" name="TextBox 8"/>
-          <p:cNvSpPr txBox="1"/>
-          <p:nvPr/>
-        </p:nvSpPr>
-        <p:spPr>
-          <a:xfrm>
-            <a:off x="548640" y="1417320"/>
-            <a:ext cx="5486400" cy="4846320"/>
-          </a:xfrm>
-          <a:prstGeom prst="rect">
-            <a:avLst/>
-          </a:prstGeom>
-          <a:noFill/>
-        </p:spPr>
-        <p:txBody>
-          <a:bodyPr wrap="square" anchor="t" lIns="45720" rIns="45720" tIns="27432" bIns="27432">
-            <a:spAutoFit/>
-          </a:bodyPr>
-          <a:lstStyle/>
-          <a:p>
-            <a:pPr algn="l">
-              <a:lnSpc>
-                <a:spcPct val="110000"/>
-              </a:lnSpc>
-              <a:spcAft>
-                <a:spcPts val="100"/>
-              </a:spcAft>
-            </a:pPr>
-            <a:r>
-              <a:rPr sz="1200" b="1">
-                <a:solidFill>
-                  <a:srgbClr val="232754"/>
-                </a:solidFill>
-                <a:latin typeface="Work Sans"/>
-              </a:rPr>
-              <a:t>Limites</a:t>
-            </a:r>
-          </a:p>
-          <a:p>
-            <a:pPr algn="l">
-              <a:lnSpc>
-                <a:spcPct val="110000"/>
-              </a:lnSpc>
-              <a:spcAft>
-                <a:spcPts val="900"/>
-              </a:spcAft>
-            </a:pPr>
-            <a:r>
-              <a:rPr sz="1100" b="0">
-                <a:solidFill>
-                  <a:srgbClr val="2B2A35"/>
-                </a:solidFill>
-                <a:latin typeface="Work Sans"/>
-              </a:rPr>
-              <a:t/>
-            </a:r>
-          </a:p>
-          <a:p>
-            <a:pPr algn="l">
-              <a:lnSpc>
-                <a:spcPct val="110000"/>
-              </a:lnSpc>
-              <a:spcAft>
-                <a:spcPts val="700"/>
-              </a:spcAft>
-            </a:pPr>
-            <a:r>
-              <a:rPr sz="1200" b="0">
-                <a:solidFill>
-                  <a:srgbClr val="2B2A35"/>
-                </a:solidFill>
-                <a:latin typeface="Work Sans"/>
-              </a:rPr>
-              <a:t>•  15 posts par marque : c'est un instantané d'octobre 2026, pas une année.</a:t>
-            </a:r>
-          </a:p>
-          <a:p>
-            <a:pPr algn="l">
-              <a:lnSpc>
-                <a:spcPct val="110000"/>
-              </a:lnSpc>
-              <a:spcAft>
-                <a:spcPts val="700"/>
-              </a:spcAft>
-            </a:pPr>
-            <a:r>
-              <a:rPr sz="1200" b="0">
-                <a:solidFill>
-                  <a:srgbClr val="2B2A35"/>
-                </a:solidFill>
-                <a:latin typeface="Work Sans"/>
-              </a:rPr>
-              <a:t>•  Les chiffres publics ne disent ni la portée ni ce qui est sponsorisé.</a:t>
-            </a:r>
-          </a:p>
-          <a:p>
-            <a:pPr algn="l">
-              <a:lnSpc>
-                <a:spcPct val="110000"/>
-              </a:lnSpc>
-              <a:spcAft>
-                <a:spcPts val="700"/>
-              </a:spcAft>
-            </a:pPr>
-            <a:r>
-              <a:rPr sz="1200" b="0">
-                <a:solidFill>
-                  <a:srgbClr val="2B2A35"/>
-                </a:solidFill>
-                <a:latin typeface="Work Sans"/>
-              </a:rPr>
-              <a:t>•  Facebook et TikTok n'ont été relevés que pour la Côte d'Ivoire et le Sénégal. Pas de compte TikTok officiel trouvé pour PayDunya ; Djamo n'y publie plus depuis fin août.</a:t>
-            </a:r>
-          </a:p>
-          <a:p>
-            <a:pPr algn="l">
-              <a:lnSpc>
-                <a:spcPct val="110000"/>
-              </a:lnSpc>
-              <a:spcAft>
-                <a:spcPts val="700"/>
-              </a:spcAft>
-            </a:pPr>
-            <a:r>
-              <a:rPr sz="1200" b="0">
-                <a:solidFill>
-                  <a:srgbClr val="2B2A35"/>
-                </a:solidFill>
-                <a:latin typeface="Work Sans"/>
-              </a:rPr>
-              <a:t>•  Le son des vidéos n'a pas été écouté : la voix off n'est pas mesurée.</a:t>
-            </a:r>
-          </a:p>
-          <a:p>
-            <a:pPr algn="l">
-              <a:lnSpc>
-                <a:spcPct val="110000"/>
-              </a:lnSpc>
-              <a:spcAft>
-                <a:spcPts val="700"/>
-              </a:spcAft>
-            </a:pPr>
-            <a:r>
-              <a:rPr sz="1200" b="0">
-                <a:solidFill>
-                  <a:srgbClr val="2B2A35"/>
-                </a:solidFill>
-                <a:latin typeface="Work Sans"/>
-              </a:rPr>
-              <a:t>•  La page LinkedIn de Payfit relevée publie surtout en espagnol : elle a été retirée du calcul LinkedIn.</a:t>
-            </a:r>
-          </a:p>
-        </p:txBody>
-      </p:sp>
-      <p:sp>
-        <p:nvSpPr>
-          <p:cNvPr id="10" name="Rectangle 9"/>
+          <p:cNvPr id="9" name="Rectangle 8"/>
           <p:cNvSpPr/>
           <p:nvPr/>
         </p:nvSpPr>
         <p:spPr>
           <a:xfrm>
-            <a:off x="6400800" y="1417320"/>
-            <a:ext cx="5239512" cy="4846320"/>
+            <a:off x="548640" y="1463040"/>
+            <a:ext cx="5468112" cy="2286000"/>
           </a:xfrm>
           <a:prstGeom prst="rect">
             <a:avLst/>
@@ -19058,14 +20329,14 @@
       </p:sp>
       <p:sp>
         <p:nvSpPr>
-          <p:cNvPr id="11" name="Rectangle 10"/>
+          <p:cNvPr id="10" name="Rectangle 9"/>
           <p:cNvSpPr/>
           <p:nvPr/>
         </p:nvSpPr>
         <p:spPr>
           <a:xfrm>
-            <a:off x="6400800" y="1417320"/>
-            <a:ext cx="5239512" cy="73152"/>
+            <a:off x="548640" y="1463040"/>
+            <a:ext cx="82296" cy="2286000"/>
           </a:xfrm>
           <a:prstGeom prst="rect">
             <a:avLst/>
@@ -19102,14 +20373,14 @@
       </p:sp>
       <p:sp>
         <p:nvSpPr>
-          <p:cNvPr id="12" name="TextBox 11"/>
+          <p:cNvPr id="11" name="TextBox 10"/>
           <p:cNvSpPr txBox="1"/>
           <p:nvPr/>
         </p:nvSpPr>
         <p:spPr>
           <a:xfrm>
-            <a:off x="6629400" y="1600200"/>
-            <a:ext cx="4846320" cy="4572000"/>
+            <a:off x="822959" y="1600200"/>
+            <a:ext cx="5029200" cy="411480"/>
           </a:xfrm>
           <a:prstGeom prst="rect">
             <a:avLst/>
@@ -19127,6 +20398,1260 @@
                 <a:spcPct val="110000"/>
               </a:lnSpc>
               <a:spcAft>
+                <a:spcPts val="600"/>
+              </a:spcAft>
+            </a:pPr>
+            <a:r>
+              <a:rPr sz="1600" b="1">
+                <a:solidFill>
+                  <a:srgbClr val="232754"/>
+                </a:solidFill>
+                <a:latin typeface="Funnel Display"/>
+              </a:rPr>
+              <a:t>Visuels de marque</a:t>
+            </a:r>
+          </a:p>
+        </p:txBody>
+      </p:sp>
+      <p:sp>
+        <p:nvSpPr>
+          <p:cNvPr id="12" name="TextBox 11"/>
+          <p:cNvSpPr txBox="1"/>
+          <p:nvPr/>
+        </p:nvSpPr>
+        <p:spPr>
+          <a:xfrm>
+            <a:off x="822959" y="2057400"/>
+            <a:ext cx="5029200" cy="1645920"/>
+          </a:xfrm>
+          <a:prstGeom prst="rect">
+            <a:avLst/>
+          </a:prstGeom>
+          <a:noFill/>
+        </p:spPr>
+        <p:txBody>
+          <a:bodyPr wrap="square" anchor="t" lIns="45720" rIns="45720" tIns="27432" bIns="27432">
+            <a:spAutoFit/>
+          </a:bodyPr>
+          <a:lstStyle/>
+          <a:p>
+            <a:pPr algn="l">
+              <a:lnSpc>
+                <a:spcPct val="110000"/>
+              </a:lnSpc>
+              <a:spcAft>
+                <a:spcPts val="600"/>
+              </a:spcAft>
+            </a:pPr>
+            <a:r>
+              <a:rPr sz="1200" b="0">
+                <a:solidFill>
+                  <a:srgbClr val="2B2A35"/>
+                </a:solidFill>
+                <a:latin typeface="Work Sans"/>
+              </a:rPr>
+              <a:t>Ce qui marche : une photo forte et peu de mots (Burger King), ou une grille très reconnaissable (Wave CI, Chowdeck). Ce qui ne marche pas : l'affiche promo qui empile prix, forfaits et codes.</a:t>
+            </a:r>
+          </a:p>
+        </p:txBody>
+      </p:sp>
+      <p:sp>
+        <p:nvSpPr>
+          <p:cNvPr id="13" name="Rectangle 12"/>
+          <p:cNvSpPr/>
+          <p:nvPr/>
+        </p:nvSpPr>
+        <p:spPr>
+          <a:xfrm>
+            <a:off x="6172200" y="1463040"/>
+            <a:ext cx="5468112" cy="2286000"/>
+          </a:xfrm>
+          <a:prstGeom prst="rect">
+            <a:avLst/>
+          </a:prstGeom>
+          <a:solidFill>
+            <a:srgbClr val="FFFFFF"/>
+          </a:solidFill>
+          <a:ln w="12700">
+            <a:solidFill>
+              <a:srgbClr val="E4E8ED"/>
+            </a:solidFill>
+          </a:ln>
+          <a:effectLst/>
+        </p:spPr>
+        <p:style>
+          <a:lnRef idx="1">
+            <a:schemeClr val="accent1"/>
+          </a:lnRef>
+          <a:fillRef idx="3">
+            <a:schemeClr val="accent1"/>
+          </a:fillRef>
+          <a:effectRef idx="2">
+            <a:schemeClr val="accent1"/>
+          </a:effectRef>
+          <a:fontRef idx="minor">
+            <a:schemeClr val="lt1"/>
+          </a:fontRef>
+        </p:style>
+        <p:txBody>
+          <a:bodyPr rtlCol="0" anchor="ctr"/>
+          <a:lstStyle/>
+          <a:p>
+            <a:pPr algn="ctr"/>
+          </a:p>
+        </p:txBody>
+      </p:sp>
+      <p:sp>
+        <p:nvSpPr>
+          <p:cNvPr id="14" name="Rectangle 13"/>
+          <p:cNvSpPr/>
+          <p:nvPr/>
+        </p:nvSpPr>
+        <p:spPr>
+          <a:xfrm>
+            <a:off x="6172200" y="1463040"/>
+            <a:ext cx="82296" cy="2286000"/>
+          </a:xfrm>
+          <a:prstGeom prst="rect">
+            <a:avLst/>
+          </a:prstGeom>
+          <a:solidFill>
+            <a:srgbClr val="00AED4"/>
+          </a:solidFill>
+          <a:ln>
+            <a:noFill/>
+          </a:ln>
+          <a:effectLst/>
+        </p:spPr>
+        <p:style>
+          <a:lnRef idx="1">
+            <a:schemeClr val="accent1"/>
+          </a:lnRef>
+          <a:fillRef idx="3">
+            <a:schemeClr val="accent1"/>
+          </a:fillRef>
+          <a:effectRef idx="2">
+            <a:schemeClr val="accent1"/>
+          </a:effectRef>
+          <a:fontRef idx="minor">
+            <a:schemeClr val="lt1"/>
+          </a:fontRef>
+        </p:style>
+        <p:txBody>
+          <a:bodyPr rtlCol="0" anchor="ctr"/>
+          <a:lstStyle/>
+          <a:p>
+            <a:pPr algn="ctr"/>
+          </a:p>
+        </p:txBody>
+      </p:sp>
+      <p:sp>
+        <p:nvSpPr>
+          <p:cNvPr id="15" name="TextBox 14"/>
+          <p:cNvSpPr txBox="1"/>
+          <p:nvPr/>
+        </p:nvSpPr>
+        <p:spPr>
+          <a:xfrm>
+            <a:off x="6446520" y="1600200"/>
+            <a:ext cx="5029200" cy="411480"/>
+          </a:xfrm>
+          <a:prstGeom prst="rect">
+            <a:avLst/>
+          </a:prstGeom>
+          <a:noFill/>
+        </p:spPr>
+        <p:txBody>
+          <a:bodyPr wrap="square" anchor="t" lIns="45720" rIns="45720" tIns="27432" bIns="27432">
+            <a:spAutoFit/>
+          </a:bodyPr>
+          <a:lstStyle/>
+          <a:p>
+            <a:pPr algn="l">
+              <a:lnSpc>
+                <a:spcPct val="110000"/>
+              </a:lnSpc>
+              <a:spcAft>
+                <a:spcPts val="600"/>
+              </a:spcAft>
+            </a:pPr>
+            <a:r>
+              <a:rPr sz="1600" b="1">
+                <a:solidFill>
+                  <a:srgbClr val="232754"/>
+                </a:solidFill>
+                <a:latin typeface="Funnel Display"/>
+              </a:rPr>
+              <a:t>Photos d'illustration</a:t>
+            </a:r>
+          </a:p>
+        </p:txBody>
+      </p:sp>
+      <p:sp>
+        <p:nvSpPr>
+          <p:cNvPr id="16" name="TextBox 15"/>
+          <p:cNvSpPr txBox="1"/>
+          <p:nvPr/>
+        </p:nvSpPr>
+        <p:spPr>
+          <a:xfrm>
+            <a:off x="6446520" y="2057400"/>
+            <a:ext cx="5029200" cy="1645920"/>
+          </a:xfrm>
+          <a:prstGeom prst="rect">
+            <a:avLst/>
+          </a:prstGeom>
+          <a:noFill/>
+        </p:spPr>
+        <p:txBody>
+          <a:bodyPr wrap="square" anchor="t" lIns="45720" rIns="45720" tIns="27432" bIns="27432">
+            <a:spAutoFit/>
+          </a:bodyPr>
+          <a:lstStyle/>
+          <a:p>
+            <a:pPr algn="l">
+              <a:lnSpc>
+                <a:spcPct val="110000"/>
+              </a:lnSpc>
+              <a:spcAft>
+                <a:spcPts val="600"/>
+              </a:spcAft>
+            </a:pPr>
+            <a:r>
+              <a:rPr sz="1200" b="0">
+                <a:solidFill>
+                  <a:srgbClr val="2B2A35"/>
+                </a:solidFill>
+                <a:latin typeface="Work Sans"/>
+              </a:rPr>
+              <a:t>À l'œil, presque aucune photo de banque d'images : les marques montrent de vraies personnes, chez elles, en boutique, dans la rue. Les marques africaines castent des visages locaux.</a:t>
+            </a:r>
+          </a:p>
+        </p:txBody>
+      </p:sp>
+      <p:sp>
+        <p:nvSpPr>
+          <p:cNvPr id="17" name="Rectangle 16"/>
+          <p:cNvSpPr/>
+          <p:nvPr/>
+        </p:nvSpPr>
+        <p:spPr>
+          <a:xfrm>
+            <a:off x="548640" y="3931920"/>
+            <a:ext cx="5468112" cy="2286000"/>
+          </a:xfrm>
+          <a:prstGeom prst="rect">
+            <a:avLst/>
+          </a:prstGeom>
+          <a:solidFill>
+            <a:srgbClr val="FFFFFF"/>
+          </a:solidFill>
+          <a:ln w="12700">
+            <a:solidFill>
+              <a:srgbClr val="E4E8ED"/>
+            </a:solidFill>
+          </a:ln>
+          <a:effectLst/>
+        </p:spPr>
+        <p:style>
+          <a:lnRef idx="1">
+            <a:schemeClr val="accent1"/>
+          </a:lnRef>
+          <a:fillRef idx="3">
+            <a:schemeClr val="accent1"/>
+          </a:fillRef>
+          <a:effectRef idx="2">
+            <a:schemeClr val="accent1"/>
+          </a:effectRef>
+          <a:fontRef idx="minor">
+            <a:schemeClr val="lt1"/>
+          </a:fontRef>
+        </p:style>
+        <p:txBody>
+          <a:bodyPr rtlCol="0" anchor="ctr"/>
+          <a:lstStyle/>
+          <a:p>
+            <a:pPr algn="ctr"/>
+          </a:p>
+        </p:txBody>
+      </p:sp>
+      <p:sp>
+        <p:nvSpPr>
+          <p:cNvPr id="18" name="Rectangle 17"/>
+          <p:cNvSpPr/>
+          <p:nvPr/>
+        </p:nvSpPr>
+        <p:spPr>
+          <a:xfrm>
+            <a:off x="548640" y="3931920"/>
+            <a:ext cx="82296" cy="2286000"/>
+          </a:xfrm>
+          <a:prstGeom prst="rect">
+            <a:avLst/>
+          </a:prstGeom>
+          <a:solidFill>
+            <a:srgbClr val="00ADA4"/>
+          </a:solidFill>
+          <a:ln>
+            <a:noFill/>
+          </a:ln>
+          <a:effectLst/>
+        </p:spPr>
+        <p:style>
+          <a:lnRef idx="1">
+            <a:schemeClr val="accent1"/>
+          </a:lnRef>
+          <a:fillRef idx="3">
+            <a:schemeClr val="accent1"/>
+          </a:fillRef>
+          <a:effectRef idx="2">
+            <a:schemeClr val="accent1"/>
+          </a:effectRef>
+          <a:fontRef idx="minor">
+            <a:schemeClr val="lt1"/>
+          </a:fontRef>
+        </p:style>
+        <p:txBody>
+          <a:bodyPr rtlCol="0" anchor="ctr"/>
+          <a:lstStyle/>
+          <a:p>
+            <a:pPr algn="ctr"/>
+          </a:p>
+        </p:txBody>
+      </p:sp>
+      <p:sp>
+        <p:nvSpPr>
+          <p:cNvPr id="19" name="TextBox 18"/>
+          <p:cNvSpPr txBox="1"/>
+          <p:nvPr/>
+        </p:nvSpPr>
+        <p:spPr>
+          <a:xfrm>
+            <a:off x="822959" y="4069080"/>
+            <a:ext cx="5029200" cy="411480"/>
+          </a:xfrm>
+          <a:prstGeom prst="rect">
+            <a:avLst/>
+          </a:prstGeom>
+          <a:noFill/>
+        </p:spPr>
+        <p:txBody>
+          <a:bodyPr wrap="square" anchor="t" lIns="45720" rIns="45720" tIns="27432" bIns="27432">
+            <a:spAutoFit/>
+          </a:bodyPr>
+          <a:lstStyle/>
+          <a:p>
+            <a:pPr algn="l">
+              <a:lnSpc>
+                <a:spcPct val="110000"/>
+              </a:lnSpc>
+              <a:spcAft>
+                <a:spcPts val="600"/>
+              </a:spcAft>
+            </a:pPr>
+            <a:r>
+              <a:rPr sz="1600" b="1">
+                <a:solidFill>
+                  <a:srgbClr val="232754"/>
+                </a:solidFill>
+                <a:latin typeface="Funnel Display"/>
+              </a:rPr>
+              <a:t>Vidéos courtes et voix off</a:t>
+            </a:r>
+          </a:p>
+        </p:txBody>
+      </p:sp>
+      <p:sp>
+        <p:nvSpPr>
+          <p:cNvPr id="20" name="TextBox 19"/>
+          <p:cNvSpPr txBox="1"/>
+          <p:nvPr/>
+        </p:nvSpPr>
+        <p:spPr>
+          <a:xfrm>
+            <a:off x="822959" y="4526280"/>
+            <a:ext cx="5029200" cy="1645920"/>
+          </a:xfrm>
+          <a:prstGeom prst="rect">
+            <a:avLst/>
+          </a:prstGeom>
+          <a:noFill/>
+        </p:spPr>
+        <p:txBody>
+          <a:bodyPr wrap="square" anchor="t" lIns="45720" rIns="45720" tIns="27432" bIns="27432">
+            <a:spAutoFit/>
+          </a:bodyPr>
+          <a:lstStyle/>
+          <a:p>
+            <a:pPr algn="l">
+              <a:lnSpc>
+                <a:spcPct val="110000"/>
+              </a:lnSpc>
+              <a:spcAft>
+                <a:spcPts val="600"/>
+              </a:spcAft>
+            </a:pPr>
+            <a:r>
+              <a:rPr sz="1200" b="0">
+                <a:solidFill>
+                  <a:srgbClr val="2B2A35"/>
+                </a:solidFill>
+                <a:latin typeface="Work Sans"/>
+              </a:rPr>
+              <a:t>52 % des posts. Gagnent : sketch, face caméra, scène du quotidien en langue locale, récit (Doctolib). Le son n'a pas été analysé : on ne peut pas dire qui utilise une voix off.</a:t>
+            </a:r>
+          </a:p>
+        </p:txBody>
+      </p:sp>
+      <p:sp>
+        <p:nvSpPr>
+          <p:cNvPr id="21" name="Rectangle 20"/>
+          <p:cNvSpPr/>
+          <p:nvPr/>
+        </p:nvSpPr>
+        <p:spPr>
+          <a:xfrm>
+            <a:off x="6172200" y="3931920"/>
+            <a:ext cx="5468112" cy="2286000"/>
+          </a:xfrm>
+          <a:prstGeom prst="rect">
+            <a:avLst/>
+          </a:prstGeom>
+          <a:solidFill>
+            <a:srgbClr val="FFFFFF"/>
+          </a:solidFill>
+          <a:ln w="12700">
+            <a:solidFill>
+              <a:srgbClr val="E4E8ED"/>
+            </a:solidFill>
+          </a:ln>
+          <a:effectLst/>
+        </p:spPr>
+        <p:style>
+          <a:lnRef idx="1">
+            <a:schemeClr val="accent1"/>
+          </a:lnRef>
+          <a:fillRef idx="3">
+            <a:schemeClr val="accent1"/>
+          </a:fillRef>
+          <a:effectRef idx="2">
+            <a:schemeClr val="accent1"/>
+          </a:effectRef>
+          <a:fontRef idx="minor">
+            <a:schemeClr val="lt1"/>
+          </a:fontRef>
+        </p:style>
+        <p:txBody>
+          <a:bodyPr rtlCol="0" anchor="ctr"/>
+          <a:lstStyle/>
+          <a:p>
+            <a:pPr algn="ctr"/>
+          </a:p>
+        </p:txBody>
+      </p:sp>
+      <p:sp>
+        <p:nvSpPr>
+          <p:cNvPr id="22" name="Rectangle 21"/>
+          <p:cNvSpPr/>
+          <p:nvPr/>
+        </p:nvSpPr>
+        <p:spPr>
+          <a:xfrm>
+            <a:off x="6172200" y="3931920"/>
+            <a:ext cx="82296" cy="2286000"/>
+          </a:xfrm>
+          <a:prstGeom prst="rect">
+            <a:avLst/>
+          </a:prstGeom>
+          <a:solidFill>
+            <a:srgbClr val="232754"/>
+          </a:solidFill>
+          <a:ln>
+            <a:noFill/>
+          </a:ln>
+          <a:effectLst/>
+        </p:spPr>
+        <p:style>
+          <a:lnRef idx="1">
+            <a:schemeClr val="accent1"/>
+          </a:lnRef>
+          <a:fillRef idx="3">
+            <a:schemeClr val="accent1"/>
+          </a:fillRef>
+          <a:effectRef idx="2">
+            <a:schemeClr val="accent1"/>
+          </a:effectRef>
+          <a:fontRef idx="minor">
+            <a:schemeClr val="lt1"/>
+          </a:fontRef>
+        </p:style>
+        <p:txBody>
+          <a:bodyPr rtlCol="0" anchor="ctr"/>
+          <a:lstStyle/>
+          <a:p>
+            <a:pPr algn="ctr"/>
+          </a:p>
+        </p:txBody>
+      </p:sp>
+      <p:sp>
+        <p:nvSpPr>
+          <p:cNvPr id="23" name="TextBox 22"/>
+          <p:cNvSpPr txBox="1"/>
+          <p:nvPr/>
+        </p:nvSpPr>
+        <p:spPr>
+          <a:xfrm>
+            <a:off x="6446520" y="4069080"/>
+            <a:ext cx="5029200" cy="411480"/>
+          </a:xfrm>
+          <a:prstGeom prst="rect">
+            <a:avLst/>
+          </a:prstGeom>
+          <a:noFill/>
+        </p:spPr>
+        <p:txBody>
+          <a:bodyPr wrap="square" anchor="t" lIns="45720" rIns="45720" tIns="27432" bIns="27432">
+            <a:spAutoFit/>
+          </a:bodyPr>
+          <a:lstStyle/>
+          <a:p>
+            <a:pPr algn="l">
+              <a:lnSpc>
+                <a:spcPct val="110000"/>
+              </a:lnSpc>
+              <a:spcAft>
+                <a:spcPts val="600"/>
+              </a:spcAft>
+            </a:pPr>
+            <a:r>
+              <a:rPr sz="1600" b="1">
+                <a:solidFill>
+                  <a:srgbClr val="232754"/>
+                </a:solidFill>
+                <a:latin typeface="Funnel Display"/>
+              </a:rPr>
+              <a:t>Témoignages clients</a:t>
+            </a:r>
+          </a:p>
+        </p:txBody>
+      </p:sp>
+      <p:sp>
+        <p:nvSpPr>
+          <p:cNvPr id="24" name="TextBox 23"/>
+          <p:cNvSpPr txBox="1"/>
+          <p:nvPr/>
+        </p:nvSpPr>
+        <p:spPr>
+          <a:xfrm>
+            <a:off x="6446520" y="4526280"/>
+            <a:ext cx="5029200" cy="1645920"/>
+          </a:xfrm>
+          <a:prstGeom prst="rect">
+            <a:avLst/>
+          </a:prstGeom>
+          <a:noFill/>
+        </p:spPr>
+        <p:txBody>
+          <a:bodyPr wrap="square" anchor="t" lIns="45720" rIns="45720" tIns="27432" bIns="27432">
+            <a:spAutoFit/>
+          </a:bodyPr>
+          <a:lstStyle/>
+          <a:p>
+            <a:pPr algn="l">
+              <a:lnSpc>
+                <a:spcPct val="110000"/>
+              </a:lnSpc>
+              <a:spcAft>
+                <a:spcPts val="600"/>
+              </a:spcAft>
+            </a:pPr>
+            <a:r>
+              <a:rPr sz="1200" b="0">
+                <a:solidFill>
+                  <a:srgbClr val="2B2A35"/>
+                </a:solidFill>
+                <a:latin typeface="Work Sans"/>
+              </a:rPr>
+              <a:t>Aucune carte témoignage classique. À la place : le client héros d'un récit vidéo (Doctolib), le commerçant mis en avant (Paystack), le message de client mis en forme (Wave CI).</a:t>
+            </a:r>
+          </a:p>
+        </p:txBody>
+      </p:sp>
+    </p:spTree>
+  </p:cSld>
+  <p:clrMapOvr>
+    <a:masterClrMapping/>
+  </p:clrMapOvr>
+</p:sld>
+</file>
+
+<file path=ppt/slides/slide21.xml><?xml version="1.0" encoding="utf-8"?>
+<p:sld xmlns:a="http://schemas.openxmlformats.org/drawingml/2006/main" xmlns:p="http://schemas.openxmlformats.org/presentationml/2006/main" xmlns:r="http://schemas.openxmlformats.org/officeDocument/2006/relationships">
+  <p:cSld>
+    <p:bg>
+      <p:bgPr>
+        <a:solidFill>
+          <a:srgbClr val="F7F8FA"/>
+        </a:solidFill>
+        <a:effectLst/>
+      </p:bgPr>
+    </p:bg>
+    <p:spTree>
+      <p:nvGrpSpPr>
+        <p:cNvPr id="1" name=""/>
+        <p:cNvGrpSpPr/>
+        <p:nvPr/>
+      </p:nvGrpSpPr>
+      <p:grpSpPr/>
+      <p:sp>
+        <p:nvSpPr>
+          <p:cNvPr id="2" name="Rectangle 1"/>
+          <p:cNvSpPr/>
+          <p:nvPr/>
+        </p:nvSpPr>
+        <p:spPr>
+          <a:xfrm>
+            <a:off x="0" y="0"/>
+            <a:ext cx="12191695" cy="73152"/>
+          </a:xfrm>
+          <a:prstGeom prst="rect">
+            <a:avLst/>
+          </a:prstGeom>
+          <a:solidFill>
+            <a:srgbClr val="007ABB"/>
+          </a:solidFill>
+          <a:ln>
+            <a:noFill/>
+          </a:ln>
+          <a:effectLst/>
+        </p:spPr>
+        <p:style>
+          <a:lnRef idx="1">
+            <a:schemeClr val="accent1"/>
+          </a:lnRef>
+          <a:fillRef idx="3">
+            <a:schemeClr val="accent1"/>
+          </a:fillRef>
+          <a:effectRef idx="2">
+            <a:schemeClr val="accent1"/>
+          </a:effectRef>
+          <a:fontRef idx="minor">
+            <a:schemeClr val="lt1"/>
+          </a:fontRef>
+        </p:style>
+        <p:txBody>
+          <a:bodyPr rtlCol="0" anchor="ctr"/>
+          <a:lstStyle/>
+          <a:p>
+            <a:pPr algn="ctr"/>
+          </a:p>
+        </p:txBody>
+      </p:sp>
+      <p:sp>
+        <p:nvSpPr>
+          <p:cNvPr id="3" name="TextBox 2"/>
+          <p:cNvSpPr txBox="1"/>
+          <p:nvPr/>
+        </p:nvSpPr>
+        <p:spPr>
+          <a:xfrm>
+            <a:off x="548640" y="274320"/>
+            <a:ext cx="8229600" cy="320040"/>
+          </a:xfrm>
+          <a:prstGeom prst="rect">
+            <a:avLst/>
+          </a:prstGeom>
+          <a:noFill/>
+        </p:spPr>
+        <p:txBody>
+          <a:bodyPr wrap="square" anchor="t" lIns="45720" rIns="45720" tIns="27432" bIns="27432">
+            <a:spAutoFit/>
+          </a:bodyPr>
+          <a:lstStyle/>
+          <a:p>
+            <a:pPr algn="l">
+              <a:lnSpc>
+                <a:spcPct val="110000"/>
+              </a:lnSpc>
+              <a:spcAft>
+                <a:spcPts val="600"/>
+              </a:spcAft>
+            </a:pPr>
+            <a:r>
+              <a:rPr sz="1100" b="1">
+                <a:solidFill>
+                  <a:srgbClr val="007ABB"/>
+                </a:solidFill>
+                <a:latin typeface="Space Grotesk"/>
+              </a:rPr>
+              <a:t>LES QUATRE FAMILLES DE CONTENU</a:t>
+            </a:r>
+          </a:p>
+        </p:txBody>
+      </p:sp>
+      <p:sp>
+        <p:nvSpPr>
+          <p:cNvPr id="4" name="TextBox 3"/>
+          <p:cNvSpPr txBox="1"/>
+          <p:nvPr/>
+        </p:nvSpPr>
+        <p:spPr>
+          <a:xfrm>
+            <a:off x="548640" y="548640"/>
+            <a:ext cx="9692640" cy="822960"/>
+          </a:xfrm>
+          <a:prstGeom prst="rect">
+            <a:avLst/>
+          </a:prstGeom>
+          <a:noFill/>
+        </p:spPr>
+        <p:txBody>
+          <a:bodyPr wrap="square" anchor="t" lIns="45720" rIns="45720" tIns="27432" bIns="27432">
+            <a:spAutoFit/>
+          </a:bodyPr>
+          <a:lstStyle/>
+          <a:p>
+            <a:pPr algn="l">
+              <a:lnSpc>
+                <a:spcPct val="110000"/>
+              </a:lnSpc>
+              <a:spcAft>
+                <a:spcPts val="600"/>
+              </a:spcAft>
+            </a:pPr>
+            <a:r>
+              <a:rPr sz="2600" b="1">
+                <a:solidFill>
+                  <a:srgbClr val="232754"/>
+                </a:solidFill>
+                <a:latin typeface="Funnel Display"/>
+              </a:rPr>
+              <a:t>Témoignages : trois façons de faire parler le client</a:t>
+            </a:r>
+          </a:p>
+        </p:txBody>
+      </p:sp>
+      <p:pic>
+        <p:nvPicPr>
+          <p:cNvPr id="5" name="Picture 4" descr="logo_mstudio_couleur_fond_clair.png"/>
+          <p:cNvPicPr>
+            <a:picLocks noChangeAspect="1"/>
+          </p:cNvPicPr>
+          <p:nvPr/>
+        </p:nvPicPr>
+        <p:blipFill>
+          <a:blip r:embed="rId2"/>
+          <a:stretch>
+            <a:fillRect/>
+          </a:stretch>
+        </p:blipFill>
+        <p:spPr>
+          <a:xfrm>
+            <a:off x="10561320" y="292608"/>
+            <a:ext cx="1168842" cy="384048"/>
+          </a:xfrm>
+          <a:prstGeom prst="rect">
+            <a:avLst/>
+          </a:prstGeom>
+        </p:spPr>
+      </p:pic>
+      <p:sp>
+        <p:nvSpPr>
+          <p:cNvPr id="6" name="Rectangle 5"/>
+          <p:cNvSpPr/>
+          <p:nvPr/>
+        </p:nvSpPr>
+        <p:spPr>
+          <a:xfrm>
+            <a:off x="548640" y="6446520"/>
+            <a:ext cx="11091672" cy="9144"/>
+          </a:xfrm>
+          <a:prstGeom prst="rect">
+            <a:avLst/>
+          </a:prstGeom>
+          <a:solidFill>
+            <a:srgbClr val="E4E8ED"/>
+          </a:solidFill>
+          <a:ln>
+            <a:noFill/>
+          </a:ln>
+          <a:effectLst/>
+        </p:spPr>
+        <p:style>
+          <a:lnRef idx="1">
+            <a:schemeClr val="accent1"/>
+          </a:lnRef>
+          <a:fillRef idx="3">
+            <a:schemeClr val="accent1"/>
+          </a:fillRef>
+          <a:effectRef idx="2">
+            <a:schemeClr val="accent1"/>
+          </a:effectRef>
+          <a:fontRef idx="minor">
+            <a:schemeClr val="lt1"/>
+          </a:fontRef>
+        </p:style>
+        <p:txBody>
+          <a:bodyPr rtlCol="0" anchor="ctr"/>
+          <a:lstStyle/>
+          <a:p>
+            <a:pPr algn="ctr"/>
+          </a:p>
+        </p:txBody>
+      </p:sp>
+      <p:sp>
+        <p:nvSpPr>
+          <p:cNvPr id="7" name="TextBox 6"/>
+          <p:cNvSpPr txBox="1"/>
+          <p:nvPr/>
+        </p:nvSpPr>
+        <p:spPr>
+          <a:xfrm>
+            <a:off x="548640" y="6492240"/>
+            <a:ext cx="8229600" cy="274320"/>
+          </a:xfrm>
+          <a:prstGeom prst="rect">
+            <a:avLst/>
+          </a:prstGeom>
+          <a:noFill/>
+        </p:spPr>
+        <p:txBody>
+          <a:bodyPr wrap="square" anchor="t" lIns="45720" rIns="45720" tIns="27432" bIns="27432">
+            <a:spAutoFit/>
+          </a:bodyPr>
+          <a:lstStyle/>
+          <a:p>
+            <a:pPr algn="l">
+              <a:lnSpc>
+                <a:spcPct val="110000"/>
+              </a:lnSpc>
+              <a:spcAft>
+                <a:spcPts val="600"/>
+              </a:spcAft>
+            </a:pPr>
+            <a:r>
+              <a:rPr sz="900" b="0">
+                <a:solidFill>
+                  <a:srgbClr val="8F8F9A"/>
+                </a:solidFill>
+                <a:latin typeface="Work Sans"/>
+              </a:rPr>
+              <a:t>Benchmark visuels et vidéos · Nigeria, France, Côte d'Ivoire, Sénégal · relevé du 24/10/2026</a:t>
+            </a:r>
+          </a:p>
+        </p:txBody>
+      </p:sp>
+      <p:sp>
+        <p:nvSpPr>
+          <p:cNvPr id="8" name="TextBox 7"/>
+          <p:cNvSpPr txBox="1"/>
+          <p:nvPr/>
+        </p:nvSpPr>
+        <p:spPr>
+          <a:xfrm>
+            <a:off x="10698480" y="6492240"/>
+            <a:ext cx="941832" cy="274320"/>
+          </a:xfrm>
+          <a:prstGeom prst="rect">
+            <a:avLst/>
+          </a:prstGeom>
+          <a:noFill/>
+        </p:spPr>
+        <p:txBody>
+          <a:bodyPr wrap="square" anchor="t" lIns="45720" rIns="45720" tIns="27432" bIns="27432">
+            <a:spAutoFit/>
+          </a:bodyPr>
+          <a:lstStyle/>
+          <a:p>
+            <a:pPr algn="r">
+              <a:lnSpc>
+                <a:spcPct val="110000"/>
+              </a:lnSpc>
+              <a:spcAft>
+                <a:spcPts val="600"/>
+              </a:spcAft>
+            </a:pPr>
+            <a:r>
+              <a:rPr sz="900" b="0">
+                <a:solidFill>
+                  <a:srgbClr val="8F8F9A"/>
+                </a:solidFill>
+                <a:latin typeface="Work Sans"/>
+              </a:rPr>
+              <a:t>21</a:t>
+            </a:r>
+          </a:p>
+        </p:txBody>
+      </p:sp>
+      <p:sp>
+        <p:nvSpPr>
+          <p:cNvPr id="9" name="Rectangle 8"/>
+          <p:cNvSpPr/>
+          <p:nvPr/>
+        </p:nvSpPr>
+        <p:spPr>
+          <a:xfrm>
+            <a:off x="548640" y="1463040"/>
+            <a:ext cx="2011680" cy="2651760"/>
+          </a:xfrm>
+          <a:prstGeom prst="rect">
+            <a:avLst/>
+          </a:prstGeom>
+          <a:solidFill>
+            <a:srgbClr val="FFFFFF"/>
+          </a:solidFill>
+          <a:ln w="12700">
+            <a:solidFill>
+              <a:srgbClr val="E4E8ED"/>
+            </a:solidFill>
+          </a:ln>
+          <a:effectLst/>
+        </p:spPr>
+        <p:style>
+          <a:lnRef idx="1">
+            <a:schemeClr val="accent1"/>
+          </a:lnRef>
+          <a:fillRef idx="3">
+            <a:schemeClr val="accent1"/>
+          </a:fillRef>
+          <a:effectRef idx="2">
+            <a:schemeClr val="accent1"/>
+          </a:effectRef>
+          <a:fontRef idx="minor">
+            <a:schemeClr val="lt1"/>
+          </a:fontRef>
+        </p:style>
+        <p:txBody>
+          <a:bodyPr rtlCol="0" anchor="ctr"/>
+          <a:lstStyle/>
+          <a:p>
+            <a:pPr algn="ctr"/>
+          </a:p>
+        </p:txBody>
+      </p:sp>
+      <p:pic>
+        <p:nvPicPr>
+          <p:cNvPr id="10" name="Picture 9" descr="doctolib__Dd6r680N9Fx.jpg">
+            <a:hlinkClick r:id="rId4"/>
+          </p:cNvPr>
+          <p:cNvPicPr>
+            <a:picLocks noChangeAspect="1"/>
+          </p:cNvPicPr>
+          <p:nvPr/>
+        </p:nvPicPr>
+        <p:blipFill>
+          <a:blip r:embed="rId3"/>
+          <a:stretch>
+            <a:fillRect/>
+          </a:stretch>
+        </p:blipFill>
+        <p:spPr>
+          <a:xfrm>
+            <a:off x="809777" y="1463039"/>
+            <a:ext cx="1489405" cy="2651760"/>
+          </a:xfrm>
+          <a:prstGeom prst="rect">
+            <a:avLst/>
+          </a:prstGeom>
+        </p:spPr>
+      </p:pic>
+      <p:sp>
+        <p:nvSpPr>
+          <p:cNvPr id="11" name="TextBox 10"/>
+          <p:cNvSpPr txBox="1"/>
+          <p:nvPr/>
+        </p:nvSpPr>
+        <p:spPr>
+          <a:xfrm>
+            <a:off x="502919" y="4142232"/>
+            <a:ext cx="2103120" cy="457200"/>
+          </a:xfrm>
+          <a:prstGeom prst="rect">
+            <a:avLst/>
+          </a:prstGeom>
+          <a:noFill/>
+        </p:spPr>
+        <p:txBody>
+          <a:bodyPr wrap="square" anchor="t" lIns="45720" rIns="45720" tIns="27432" bIns="27432">
+            <a:spAutoFit/>
+          </a:bodyPr>
+          <a:lstStyle/>
+          <a:p>
+            <a:pPr algn="ctr">
+              <a:lnSpc>
+                <a:spcPct val="100000"/>
+              </a:lnSpc>
+              <a:spcAft>
+                <a:spcPts val="600"/>
+              </a:spcAft>
+            </a:pPr>
+            <a:r>
+              <a:rPr sz="900" b="0">
+                <a:solidFill>
+                  <a:srgbClr val="2B2A35"/>
+                </a:solidFill>
+                <a:latin typeface="Work Sans"/>
+              </a:rPr>
+              <a:t>Doctolib · récit d'un patient · 12 994</a:t>
+            </a:r>
+          </a:p>
+        </p:txBody>
+      </p:sp>
+      <p:sp>
+        <p:nvSpPr>
+          <p:cNvPr id="12" name="Rectangle 11"/>
+          <p:cNvSpPr/>
+          <p:nvPr/>
+        </p:nvSpPr>
+        <p:spPr>
+          <a:xfrm>
+            <a:off x="2834640" y="1463040"/>
+            <a:ext cx="2011680" cy="2651760"/>
+          </a:xfrm>
+          <a:prstGeom prst="rect">
+            <a:avLst/>
+          </a:prstGeom>
+          <a:solidFill>
+            <a:srgbClr val="FFFFFF"/>
+          </a:solidFill>
+          <a:ln w="12700">
+            <a:solidFill>
+              <a:srgbClr val="E4E8ED"/>
+            </a:solidFill>
+          </a:ln>
+          <a:effectLst/>
+        </p:spPr>
+        <p:style>
+          <a:lnRef idx="1">
+            <a:schemeClr val="accent1"/>
+          </a:lnRef>
+          <a:fillRef idx="3">
+            <a:schemeClr val="accent1"/>
+          </a:fillRef>
+          <a:effectRef idx="2">
+            <a:schemeClr val="accent1"/>
+          </a:effectRef>
+          <a:fontRef idx="minor">
+            <a:schemeClr val="lt1"/>
+          </a:fontRef>
+        </p:style>
+        <p:txBody>
+          <a:bodyPr rtlCol="0" anchor="ctr"/>
+          <a:lstStyle/>
+          <a:p>
+            <a:pPr algn="ctr"/>
+          </a:p>
+        </p:txBody>
+      </p:sp>
+      <p:pic>
+        <p:nvPicPr>
+          <p:cNvPr id="13" name="Picture 12" descr="wave.ci__Del2CQilt3O.jpg">
+            <a:hlinkClick r:id="rId6"/>
+          </p:cNvPr>
+          <p:cNvPicPr>
+            <a:picLocks noChangeAspect="1"/>
+          </p:cNvPicPr>
+          <p:nvPr/>
+        </p:nvPicPr>
+        <p:blipFill>
+          <a:blip r:embed="rId5"/>
+          <a:stretch>
+            <a:fillRect/>
+          </a:stretch>
+        </p:blipFill>
+        <p:spPr>
+          <a:xfrm>
+            <a:off x="2834640" y="1539429"/>
+            <a:ext cx="2011680" cy="2498981"/>
+          </a:xfrm>
+          <a:prstGeom prst="rect">
+            <a:avLst/>
+          </a:prstGeom>
+        </p:spPr>
+      </p:pic>
+      <p:sp>
+        <p:nvSpPr>
+          <p:cNvPr id="14" name="TextBox 13"/>
+          <p:cNvSpPr txBox="1"/>
+          <p:nvPr/>
+        </p:nvSpPr>
+        <p:spPr>
+          <a:xfrm>
+            <a:off x="2788920" y="4142232"/>
+            <a:ext cx="2103120" cy="457200"/>
+          </a:xfrm>
+          <a:prstGeom prst="rect">
+            <a:avLst/>
+          </a:prstGeom>
+          <a:noFill/>
+        </p:spPr>
+        <p:txBody>
+          <a:bodyPr wrap="square" anchor="t" lIns="45720" rIns="45720" tIns="27432" bIns="27432">
+            <a:spAutoFit/>
+          </a:bodyPr>
+          <a:lstStyle/>
+          <a:p>
+            <a:pPr algn="ctr">
+              <a:lnSpc>
+                <a:spcPct val="100000"/>
+              </a:lnSpc>
+              <a:spcAft>
+                <a:spcPts val="600"/>
+              </a:spcAft>
+            </a:pPr>
+            <a:r>
+              <a:rPr sz="900" b="0">
+                <a:solidFill>
+                  <a:srgbClr val="2B2A35"/>
+                </a:solidFill>
+                <a:latin typeface="Work Sans"/>
+              </a:rPr>
+              <a:t>Wave CI · message de client mis en forme · 36</a:t>
+            </a:r>
+          </a:p>
+        </p:txBody>
+      </p:sp>
+      <p:sp>
+        <p:nvSpPr>
+          <p:cNvPr id="15" name="Rectangle 14"/>
+          <p:cNvSpPr/>
+          <p:nvPr/>
+        </p:nvSpPr>
+        <p:spPr>
+          <a:xfrm>
+            <a:off x="5120640" y="1463040"/>
+            <a:ext cx="2011680" cy="2651760"/>
+          </a:xfrm>
+          <a:prstGeom prst="rect">
+            <a:avLst/>
+          </a:prstGeom>
+          <a:solidFill>
+            <a:srgbClr val="FFFFFF"/>
+          </a:solidFill>
+          <a:ln w="12700">
+            <a:solidFill>
+              <a:srgbClr val="E4E8ED"/>
+            </a:solidFill>
+          </a:ln>
+          <a:effectLst/>
+        </p:spPr>
+        <p:style>
+          <a:lnRef idx="1">
+            <a:schemeClr val="accent1"/>
+          </a:lnRef>
+          <a:fillRef idx="3">
+            <a:schemeClr val="accent1"/>
+          </a:fillRef>
+          <a:effectRef idx="2">
+            <a:schemeClr val="accent1"/>
+          </a:effectRef>
+          <a:fontRef idx="minor">
+            <a:schemeClr val="lt1"/>
+          </a:fontRef>
+        </p:style>
+        <p:txBody>
+          <a:bodyPr rtlCol="0" anchor="ctr"/>
+          <a:lstStyle/>
+          <a:p>
+            <a:pPr algn="ctr"/>
+          </a:p>
+        </p:txBody>
+      </p:sp>
+      <p:pic>
+        <p:nvPicPr>
+          <p:cNvPr id="16" name="Picture 15" descr="orangecotedivoire__DePPkBRIQcs.jpg">
+            <a:hlinkClick r:id="rId8"/>
+          </p:cNvPr>
+          <p:cNvPicPr>
+            <a:picLocks noChangeAspect="1"/>
+          </p:cNvPicPr>
+          <p:nvPr/>
+        </p:nvPicPr>
+        <p:blipFill>
+          <a:blip r:embed="rId7"/>
+          <a:stretch>
+            <a:fillRect/>
+          </a:stretch>
+        </p:blipFill>
+        <p:spPr>
+          <a:xfrm>
+            <a:off x="5381777" y="1463039"/>
+            <a:ext cx="1489405" cy="2651760"/>
+          </a:xfrm>
+          <a:prstGeom prst="rect">
+            <a:avLst/>
+          </a:prstGeom>
+        </p:spPr>
+      </p:pic>
+      <p:sp>
+        <p:nvSpPr>
+          <p:cNvPr id="17" name="TextBox 16"/>
+          <p:cNvSpPr txBox="1"/>
+          <p:nvPr/>
+        </p:nvSpPr>
+        <p:spPr>
+          <a:xfrm>
+            <a:off x="5074920" y="4142232"/>
+            <a:ext cx="2103120" cy="457200"/>
+          </a:xfrm>
+          <a:prstGeom prst="rect">
+            <a:avLst/>
+          </a:prstGeom>
+          <a:noFill/>
+        </p:spPr>
+        <p:txBody>
+          <a:bodyPr wrap="square" anchor="t" lIns="45720" rIns="45720" tIns="27432" bIns="27432">
+            <a:spAutoFit/>
+          </a:bodyPr>
+          <a:lstStyle/>
+          <a:p>
+            <a:pPr algn="ctr">
+              <a:lnSpc>
+                <a:spcPct val="100000"/>
+              </a:lnSpc>
+              <a:spcAft>
+                <a:spcPts val="600"/>
+              </a:spcAft>
+            </a:pPr>
+            <a:r>
+              <a:rPr sz="900" b="0">
+                <a:solidFill>
+                  <a:srgbClr val="2B2A35"/>
+                </a:solidFill>
+                <a:latin typeface="Work Sans"/>
+              </a:rPr>
+              <a:t>Orange CI · dirigeants chez les clients · 151</a:t>
+            </a:r>
+          </a:p>
+        </p:txBody>
+      </p:sp>
+      <p:sp>
+        <p:nvSpPr>
+          <p:cNvPr id="18" name="TextBox 17"/>
+          <p:cNvSpPr txBox="1"/>
+          <p:nvPr/>
+        </p:nvSpPr>
+        <p:spPr>
+          <a:xfrm>
+            <a:off x="7498079" y="1463040"/>
+            <a:ext cx="4142232" cy="4846320"/>
+          </a:xfrm>
+          <a:prstGeom prst="rect">
+            <a:avLst/>
+          </a:prstGeom>
+          <a:noFill/>
+        </p:spPr>
+        <p:txBody>
+          <a:bodyPr wrap="square" anchor="t" lIns="45720" rIns="45720" tIns="27432" bIns="27432">
+            <a:spAutoFit/>
+          </a:bodyPr>
+          <a:lstStyle/>
+          <a:p>
+            <a:pPr algn="l">
+              <a:lnSpc>
+                <a:spcPct val="110000"/>
+              </a:lnSpc>
+              <a:spcAft>
                 <a:spcPts val="100"/>
               </a:spcAft>
             </a:pPr>
@@ -19137,6 +21662,2354 @@
                 </a:solidFill>
                 <a:latin typeface="Work Sans"/>
               </a:rPr>
+              <a:t>1. Le récit vidéo</a:t>
+            </a:r>
+          </a:p>
+          <a:p>
+            <a:pPr algn="l">
+              <a:lnSpc>
+                <a:spcPct val="110000"/>
+              </a:lnSpc>
+              <a:spcAft>
+                <a:spcPts val="900"/>
+              </a:spcAft>
+            </a:pPr>
+            <a:r>
+              <a:rPr sz="1100" b="0">
+                <a:solidFill>
+                  <a:srgbClr val="2B2A35"/>
+                </a:solidFill>
+                <a:latin typeface="Work Sans"/>
+              </a:rPr>
+              <a:t>Un client, son problème, ce qui a changé. C'est le seul format de témoignage qui fait de gros chiffres dans le panel.</a:t>
+            </a:r>
+          </a:p>
+          <a:p>
+            <a:pPr algn="l">
+              <a:lnSpc>
+                <a:spcPct val="110000"/>
+              </a:lnSpc>
+              <a:spcAft>
+                <a:spcPts val="100"/>
+              </a:spcAft>
+            </a:pPr>
+            <a:r>
+              <a:rPr sz="1200" b="1">
+                <a:solidFill>
+                  <a:srgbClr val="232754"/>
+                </a:solidFill>
+                <a:latin typeface="Work Sans"/>
+              </a:rPr>
+              <a:t>2. Le message de client</a:t>
+            </a:r>
+          </a:p>
+          <a:p>
+            <a:pPr algn="l">
+              <a:lnSpc>
+                <a:spcPct val="110000"/>
+              </a:lnSpc>
+              <a:spcAft>
+                <a:spcPts val="900"/>
+              </a:spcAft>
+            </a:pPr>
+            <a:r>
+              <a:rPr sz="1100" b="0">
+                <a:solidFill>
+                  <a:srgbClr val="2B2A35"/>
+                </a:solidFill>
+                <a:latin typeface="Work Sans"/>
+              </a:rPr>
+              <a:t>Rapide à produire, cohérent avec la grille, mais peu de réactions s'il n'y a pas de visage.</a:t>
+            </a:r>
+          </a:p>
+          <a:p>
+            <a:pPr algn="l">
+              <a:lnSpc>
+                <a:spcPct val="110000"/>
+              </a:lnSpc>
+              <a:spcAft>
+                <a:spcPts val="100"/>
+              </a:spcAft>
+            </a:pPr>
+            <a:r>
+              <a:rPr sz="1200" b="1">
+                <a:solidFill>
+                  <a:srgbClr val="232754"/>
+                </a:solidFill>
+                <a:latin typeface="Work Sans"/>
+              </a:rPr>
+              <a:t>3. L'équipe chez le client</a:t>
+            </a:r>
+          </a:p>
+          <a:p>
+            <a:pPr algn="l">
+              <a:lnSpc>
+                <a:spcPct val="110000"/>
+              </a:lnSpc>
+              <a:spcAft>
+                <a:spcPts val="900"/>
+              </a:spcAft>
+            </a:pPr>
+            <a:r>
+              <a:rPr sz="1100" b="0">
+                <a:solidFill>
+                  <a:srgbClr val="2B2A35"/>
+                </a:solidFill>
+                <a:latin typeface="Work Sans"/>
+              </a:rPr>
+              <a:t>Montre l'écoute plutôt que le résultat. Bon pour l'image, moyen pour l'engagement.</a:t>
+            </a:r>
+          </a:p>
+          <a:p>
+            <a:pPr algn="l">
+              <a:lnSpc>
+                <a:spcPct val="110000"/>
+              </a:lnSpc>
+              <a:spcAft>
+                <a:spcPts val="100"/>
+              </a:spcAft>
+            </a:pPr>
+            <a:r>
+              <a:rPr sz="1200" b="1">
+                <a:solidFill>
+                  <a:srgbClr val="232754"/>
+                </a:solidFill>
+                <a:latin typeface="Work Sans"/>
+              </a:rPr>
+              <a:t>Une règle</a:t>
+            </a:r>
+          </a:p>
+          <a:p>
+            <a:pPr algn="l">
+              <a:lnSpc>
+                <a:spcPct val="110000"/>
+              </a:lnSpc>
+              <a:spcAft>
+                <a:spcPts val="900"/>
+              </a:spcAft>
+            </a:pPr>
+            <a:r>
+              <a:rPr sz="1100" b="0">
+                <a:solidFill>
+                  <a:srgbClr val="2B2A35"/>
+                </a:solidFill>
+                <a:latin typeface="Work Sans"/>
+              </a:rPr>
+              <a:t>Un vrai client, son accord écrit, ses vrais mots. Jamais de citation inventée.</a:t>
+            </a:r>
+          </a:p>
+        </p:txBody>
+      </p:sp>
+    </p:spTree>
+  </p:cSld>
+  <p:clrMapOvr>
+    <a:masterClrMapping/>
+  </p:clrMapOvr>
+</p:sld>
+</file>
+
+<file path=ppt/slides/slide22.xml><?xml version="1.0" encoding="utf-8"?>
+<p:sld xmlns:a="http://schemas.openxmlformats.org/drawingml/2006/main" xmlns:p="http://schemas.openxmlformats.org/presentationml/2006/main" xmlns:r="http://schemas.openxmlformats.org/officeDocument/2006/relationships">
+  <p:cSld>
+    <p:bg>
+      <p:bgPr>
+        <a:solidFill>
+          <a:srgbClr val="F7F8FA"/>
+        </a:solidFill>
+        <a:effectLst/>
+      </p:bgPr>
+    </p:bg>
+    <p:spTree>
+      <p:nvGrpSpPr>
+        <p:cNvPr id="1" name=""/>
+        <p:cNvGrpSpPr/>
+        <p:nvPr/>
+      </p:nvGrpSpPr>
+      <p:grpSpPr/>
+      <p:sp>
+        <p:nvSpPr>
+          <p:cNvPr id="2" name="Rectangle 1"/>
+          <p:cNvSpPr/>
+          <p:nvPr/>
+        </p:nvSpPr>
+        <p:spPr>
+          <a:xfrm>
+            <a:off x="0" y="0"/>
+            <a:ext cx="12191695" cy="73152"/>
+          </a:xfrm>
+          <a:prstGeom prst="rect">
+            <a:avLst/>
+          </a:prstGeom>
+          <a:solidFill>
+            <a:srgbClr val="007ABB"/>
+          </a:solidFill>
+          <a:ln>
+            <a:noFill/>
+          </a:ln>
+          <a:effectLst/>
+        </p:spPr>
+        <p:style>
+          <a:lnRef idx="1">
+            <a:schemeClr val="accent1"/>
+          </a:lnRef>
+          <a:fillRef idx="3">
+            <a:schemeClr val="accent1"/>
+          </a:fillRef>
+          <a:effectRef idx="2">
+            <a:schemeClr val="accent1"/>
+          </a:effectRef>
+          <a:fontRef idx="minor">
+            <a:schemeClr val="lt1"/>
+          </a:fontRef>
+        </p:style>
+        <p:txBody>
+          <a:bodyPr rtlCol="0" anchor="ctr"/>
+          <a:lstStyle/>
+          <a:p>
+            <a:pPr algn="ctr"/>
+          </a:p>
+        </p:txBody>
+      </p:sp>
+      <p:sp>
+        <p:nvSpPr>
+          <p:cNvPr id="3" name="TextBox 2"/>
+          <p:cNvSpPr txBox="1"/>
+          <p:nvPr/>
+        </p:nvSpPr>
+        <p:spPr>
+          <a:xfrm>
+            <a:off x="548640" y="274320"/>
+            <a:ext cx="8229600" cy="320040"/>
+          </a:xfrm>
+          <a:prstGeom prst="rect">
+            <a:avLst/>
+          </a:prstGeom>
+          <a:noFill/>
+        </p:spPr>
+        <p:txBody>
+          <a:bodyPr wrap="square" anchor="t" lIns="45720" rIns="45720" tIns="27432" bIns="27432">
+            <a:spAutoFit/>
+          </a:bodyPr>
+          <a:lstStyle/>
+          <a:p>
+            <a:pPr algn="l">
+              <a:lnSpc>
+                <a:spcPct val="110000"/>
+              </a:lnSpc>
+              <a:spcAft>
+                <a:spcPts val="600"/>
+              </a:spcAft>
+            </a:pPr>
+            <a:r>
+              <a:rPr sz="1100" b="1">
+                <a:solidFill>
+                  <a:srgbClr val="007ABB"/>
+                </a:solidFill>
+                <a:latin typeface="Space Grotesk"/>
+              </a:rPr>
+              <a:t>RECOMMANDATIONS</a:t>
+            </a:r>
+          </a:p>
+        </p:txBody>
+      </p:sp>
+      <p:sp>
+        <p:nvSpPr>
+          <p:cNvPr id="4" name="TextBox 3"/>
+          <p:cNvSpPr txBox="1"/>
+          <p:nvPr/>
+        </p:nvSpPr>
+        <p:spPr>
+          <a:xfrm>
+            <a:off x="548640" y="548640"/>
+            <a:ext cx="9692640" cy="822960"/>
+          </a:xfrm>
+          <a:prstGeom prst="rect">
+            <a:avLst/>
+          </a:prstGeom>
+          <a:noFill/>
+        </p:spPr>
+        <p:txBody>
+          <a:bodyPr wrap="square" anchor="t" lIns="45720" rIns="45720" tIns="27432" bIns="27432">
+            <a:spAutoFit/>
+          </a:bodyPr>
+          <a:lstStyle/>
+          <a:p>
+            <a:pPr algn="l">
+              <a:lnSpc>
+                <a:spcPct val="110000"/>
+              </a:lnSpc>
+              <a:spcAft>
+                <a:spcPts val="600"/>
+              </a:spcAft>
+            </a:pPr>
+            <a:r>
+              <a:rPr sz="2600" b="1">
+                <a:solidFill>
+                  <a:srgbClr val="232754"/>
+                </a:solidFill>
+                <a:latin typeface="Funnel Display"/>
+              </a:rPr>
+              <a:t>Ce qu'on en tire pour nos startups</a:t>
+            </a:r>
+          </a:p>
+        </p:txBody>
+      </p:sp>
+      <p:pic>
+        <p:nvPicPr>
+          <p:cNvPr id="5" name="Picture 4" descr="logo_mstudio_couleur_fond_clair.png"/>
+          <p:cNvPicPr>
+            <a:picLocks noChangeAspect="1"/>
+          </p:cNvPicPr>
+          <p:nvPr/>
+        </p:nvPicPr>
+        <p:blipFill>
+          <a:blip r:embed="rId2"/>
+          <a:stretch>
+            <a:fillRect/>
+          </a:stretch>
+        </p:blipFill>
+        <p:spPr>
+          <a:xfrm>
+            <a:off x="10561320" y="292608"/>
+            <a:ext cx="1168842" cy="384048"/>
+          </a:xfrm>
+          <a:prstGeom prst="rect">
+            <a:avLst/>
+          </a:prstGeom>
+        </p:spPr>
+      </p:pic>
+      <p:sp>
+        <p:nvSpPr>
+          <p:cNvPr id="6" name="Rectangle 5"/>
+          <p:cNvSpPr/>
+          <p:nvPr/>
+        </p:nvSpPr>
+        <p:spPr>
+          <a:xfrm>
+            <a:off x="548640" y="6446520"/>
+            <a:ext cx="11091672" cy="9144"/>
+          </a:xfrm>
+          <a:prstGeom prst="rect">
+            <a:avLst/>
+          </a:prstGeom>
+          <a:solidFill>
+            <a:srgbClr val="E4E8ED"/>
+          </a:solidFill>
+          <a:ln>
+            <a:noFill/>
+          </a:ln>
+          <a:effectLst/>
+        </p:spPr>
+        <p:style>
+          <a:lnRef idx="1">
+            <a:schemeClr val="accent1"/>
+          </a:lnRef>
+          <a:fillRef idx="3">
+            <a:schemeClr val="accent1"/>
+          </a:fillRef>
+          <a:effectRef idx="2">
+            <a:schemeClr val="accent1"/>
+          </a:effectRef>
+          <a:fontRef idx="minor">
+            <a:schemeClr val="lt1"/>
+          </a:fontRef>
+        </p:style>
+        <p:txBody>
+          <a:bodyPr rtlCol="0" anchor="ctr"/>
+          <a:lstStyle/>
+          <a:p>
+            <a:pPr algn="ctr"/>
+          </a:p>
+        </p:txBody>
+      </p:sp>
+      <p:sp>
+        <p:nvSpPr>
+          <p:cNvPr id="7" name="TextBox 6"/>
+          <p:cNvSpPr txBox="1"/>
+          <p:nvPr/>
+        </p:nvSpPr>
+        <p:spPr>
+          <a:xfrm>
+            <a:off x="548640" y="6492240"/>
+            <a:ext cx="8229600" cy="274320"/>
+          </a:xfrm>
+          <a:prstGeom prst="rect">
+            <a:avLst/>
+          </a:prstGeom>
+          <a:noFill/>
+        </p:spPr>
+        <p:txBody>
+          <a:bodyPr wrap="square" anchor="t" lIns="45720" rIns="45720" tIns="27432" bIns="27432">
+            <a:spAutoFit/>
+          </a:bodyPr>
+          <a:lstStyle/>
+          <a:p>
+            <a:pPr algn="l">
+              <a:lnSpc>
+                <a:spcPct val="110000"/>
+              </a:lnSpc>
+              <a:spcAft>
+                <a:spcPts val="600"/>
+              </a:spcAft>
+            </a:pPr>
+            <a:r>
+              <a:rPr sz="900" b="0">
+                <a:solidFill>
+                  <a:srgbClr val="8F8F9A"/>
+                </a:solidFill>
+                <a:latin typeface="Work Sans"/>
+              </a:rPr>
+              <a:t>Benchmark visuels et vidéos · Nigeria, France, Côte d'Ivoire, Sénégal · relevé du 24/10/2026</a:t>
+            </a:r>
+          </a:p>
+        </p:txBody>
+      </p:sp>
+      <p:sp>
+        <p:nvSpPr>
+          <p:cNvPr id="8" name="TextBox 7"/>
+          <p:cNvSpPr txBox="1"/>
+          <p:nvPr/>
+        </p:nvSpPr>
+        <p:spPr>
+          <a:xfrm>
+            <a:off x="10698480" y="6492240"/>
+            <a:ext cx="941832" cy="274320"/>
+          </a:xfrm>
+          <a:prstGeom prst="rect">
+            <a:avLst/>
+          </a:prstGeom>
+          <a:noFill/>
+        </p:spPr>
+        <p:txBody>
+          <a:bodyPr wrap="square" anchor="t" lIns="45720" rIns="45720" tIns="27432" bIns="27432">
+            <a:spAutoFit/>
+          </a:bodyPr>
+          <a:lstStyle/>
+          <a:p>
+            <a:pPr algn="r">
+              <a:lnSpc>
+                <a:spcPct val="110000"/>
+              </a:lnSpc>
+              <a:spcAft>
+                <a:spcPts val="600"/>
+              </a:spcAft>
+            </a:pPr>
+            <a:r>
+              <a:rPr sz="900" b="0">
+                <a:solidFill>
+                  <a:srgbClr val="8F8F9A"/>
+                </a:solidFill>
+                <a:latin typeface="Work Sans"/>
+              </a:rPr>
+              <a:t>22</a:t>
+            </a:r>
+          </a:p>
+        </p:txBody>
+      </p:sp>
+      <p:sp>
+        <p:nvSpPr>
+          <p:cNvPr id="9" name="Rectangle 8"/>
+          <p:cNvSpPr/>
+          <p:nvPr/>
+        </p:nvSpPr>
+        <p:spPr>
+          <a:xfrm>
+            <a:off x="548640" y="1463040"/>
+            <a:ext cx="3593592" cy="2240280"/>
+          </a:xfrm>
+          <a:prstGeom prst="rect">
+            <a:avLst/>
+          </a:prstGeom>
+          <a:solidFill>
+            <a:srgbClr val="FFFFFF"/>
+          </a:solidFill>
+          <a:ln w="12700">
+            <a:solidFill>
+              <a:srgbClr val="E4E8ED"/>
+            </a:solidFill>
+          </a:ln>
+          <a:effectLst/>
+        </p:spPr>
+        <p:style>
+          <a:lnRef idx="1">
+            <a:schemeClr val="accent1"/>
+          </a:lnRef>
+          <a:fillRef idx="3">
+            <a:schemeClr val="accent1"/>
+          </a:fillRef>
+          <a:effectRef idx="2">
+            <a:schemeClr val="accent1"/>
+          </a:effectRef>
+          <a:fontRef idx="minor">
+            <a:schemeClr val="lt1"/>
+          </a:fontRef>
+        </p:style>
+        <p:txBody>
+          <a:bodyPr rtlCol="0" anchor="ctr"/>
+          <a:lstStyle/>
+          <a:p>
+            <a:pPr algn="ctr"/>
+          </a:p>
+        </p:txBody>
+      </p:sp>
+      <p:sp>
+        <p:nvSpPr>
+          <p:cNvPr id="10" name="Rectangle 9"/>
+          <p:cNvSpPr/>
+          <p:nvPr/>
+        </p:nvSpPr>
+        <p:spPr>
+          <a:xfrm>
+            <a:off x="731520" y="1645920"/>
+            <a:ext cx="457200" cy="457200"/>
+          </a:xfrm>
+          <a:prstGeom prst="rect">
+            <a:avLst/>
+          </a:prstGeom>
+          <a:solidFill>
+            <a:srgbClr val="007ABB"/>
+          </a:solidFill>
+          <a:ln>
+            <a:noFill/>
+          </a:ln>
+          <a:effectLst/>
+        </p:spPr>
+        <p:style>
+          <a:lnRef idx="1">
+            <a:schemeClr val="accent1"/>
+          </a:lnRef>
+          <a:fillRef idx="3">
+            <a:schemeClr val="accent1"/>
+          </a:fillRef>
+          <a:effectRef idx="2">
+            <a:schemeClr val="accent1"/>
+          </a:effectRef>
+          <a:fontRef idx="minor">
+            <a:schemeClr val="lt1"/>
+          </a:fontRef>
+        </p:style>
+        <p:txBody>
+          <a:bodyPr rtlCol="0" anchor="ctr"/>
+          <a:lstStyle/>
+          <a:p>
+            <a:pPr algn="ctr"/>
+          </a:p>
+        </p:txBody>
+      </p:sp>
+      <p:sp>
+        <p:nvSpPr>
+          <p:cNvPr id="11" name="TextBox 10"/>
+          <p:cNvSpPr txBox="1"/>
+          <p:nvPr/>
+        </p:nvSpPr>
+        <p:spPr>
+          <a:xfrm>
+            <a:off x="731520" y="1645920"/>
+            <a:ext cx="457200" cy="457200"/>
+          </a:xfrm>
+          <a:prstGeom prst="rect">
+            <a:avLst/>
+          </a:prstGeom>
+          <a:noFill/>
+        </p:spPr>
+        <p:txBody>
+          <a:bodyPr wrap="square" anchor="ctr" lIns="45720" rIns="45720" tIns="27432" bIns="27432">
+            <a:spAutoFit/>
+          </a:bodyPr>
+          <a:lstStyle/>
+          <a:p>
+            <a:pPr algn="ctr">
+              <a:lnSpc>
+                <a:spcPct val="110000"/>
+              </a:lnSpc>
+              <a:spcAft>
+                <a:spcPts val="600"/>
+              </a:spcAft>
+            </a:pPr>
+            <a:r>
+              <a:rPr sz="1600" b="1">
+                <a:solidFill>
+                  <a:srgbClr val="FFFFFF"/>
+                </a:solidFill>
+                <a:latin typeface="Space Grotesk"/>
+              </a:rPr>
+              <a:t>1</a:t>
+            </a:r>
+          </a:p>
+        </p:txBody>
+      </p:sp>
+      <p:sp>
+        <p:nvSpPr>
+          <p:cNvPr id="12" name="TextBox 11"/>
+          <p:cNvSpPr txBox="1"/>
+          <p:nvPr/>
+        </p:nvSpPr>
+        <p:spPr>
+          <a:xfrm>
+            <a:off x="1325880" y="1627632"/>
+            <a:ext cx="2697480" cy="731520"/>
+          </a:xfrm>
+          <a:prstGeom prst="rect">
+            <a:avLst/>
+          </a:prstGeom>
+          <a:noFill/>
+        </p:spPr>
+        <p:txBody>
+          <a:bodyPr wrap="square" anchor="t" lIns="45720" rIns="45720" tIns="27432" bIns="27432">
+            <a:spAutoFit/>
+          </a:bodyPr>
+          <a:lstStyle/>
+          <a:p>
+            <a:pPr algn="l">
+              <a:lnSpc>
+                <a:spcPct val="110000"/>
+              </a:lnSpc>
+              <a:spcAft>
+                <a:spcPts val="600"/>
+              </a:spcAft>
+            </a:pPr>
+            <a:r>
+              <a:rPr sz="1400" b="1">
+                <a:solidFill>
+                  <a:srgbClr val="232754"/>
+                </a:solidFill>
+                <a:latin typeface="Funnel Display"/>
+              </a:rPr>
+              <a:t>Passer à la vidéo verticale d'abord</a:t>
+            </a:r>
+          </a:p>
+        </p:txBody>
+      </p:sp>
+      <p:sp>
+        <p:nvSpPr>
+          <p:cNvPr id="13" name="TextBox 12"/>
+          <p:cNvSpPr txBox="1"/>
+          <p:nvPr/>
+        </p:nvSpPr>
+        <p:spPr>
+          <a:xfrm>
+            <a:off x="731520" y="2377440"/>
+            <a:ext cx="3246120" cy="1280160"/>
+          </a:xfrm>
+          <a:prstGeom prst="rect">
+            <a:avLst/>
+          </a:prstGeom>
+          <a:noFill/>
+        </p:spPr>
+        <p:txBody>
+          <a:bodyPr wrap="square" anchor="t" lIns="45720" rIns="45720" tIns="27432" bIns="27432">
+            <a:spAutoFit/>
+          </a:bodyPr>
+          <a:lstStyle/>
+          <a:p>
+            <a:pPr algn="l">
+              <a:lnSpc>
+                <a:spcPct val="110000"/>
+              </a:lnSpc>
+              <a:spcAft>
+                <a:spcPts val="600"/>
+              </a:spcAft>
+            </a:pPr>
+            <a:r>
+              <a:rPr sz="1200" b="0">
+                <a:solidFill>
+                  <a:srgbClr val="2B2A35"/>
+                </a:solidFill>
+                <a:latin typeface="Work Sans"/>
+              </a:rPr>
+              <a:t>Viser une publication sur deux en vidéo de 15 à 40 s : face caméra, sketch ou scène du quotidien.</a:t>
+            </a:r>
+          </a:p>
+        </p:txBody>
+      </p:sp>
+      <p:sp>
+        <p:nvSpPr>
+          <p:cNvPr id="14" name="Rectangle 13"/>
+          <p:cNvSpPr/>
+          <p:nvPr/>
+        </p:nvSpPr>
+        <p:spPr>
+          <a:xfrm>
+            <a:off x="4297679" y="1463040"/>
+            <a:ext cx="3593592" cy="2240280"/>
+          </a:xfrm>
+          <a:prstGeom prst="rect">
+            <a:avLst/>
+          </a:prstGeom>
+          <a:solidFill>
+            <a:srgbClr val="FFFFFF"/>
+          </a:solidFill>
+          <a:ln w="12700">
+            <a:solidFill>
+              <a:srgbClr val="E4E8ED"/>
+            </a:solidFill>
+          </a:ln>
+          <a:effectLst/>
+        </p:spPr>
+        <p:style>
+          <a:lnRef idx="1">
+            <a:schemeClr val="accent1"/>
+          </a:lnRef>
+          <a:fillRef idx="3">
+            <a:schemeClr val="accent1"/>
+          </a:fillRef>
+          <a:effectRef idx="2">
+            <a:schemeClr val="accent1"/>
+          </a:effectRef>
+          <a:fontRef idx="minor">
+            <a:schemeClr val="lt1"/>
+          </a:fontRef>
+        </p:style>
+        <p:txBody>
+          <a:bodyPr rtlCol="0" anchor="ctr"/>
+          <a:lstStyle/>
+          <a:p>
+            <a:pPr algn="ctr"/>
+          </a:p>
+        </p:txBody>
+      </p:sp>
+      <p:sp>
+        <p:nvSpPr>
+          <p:cNvPr id="15" name="Rectangle 14"/>
+          <p:cNvSpPr/>
+          <p:nvPr/>
+        </p:nvSpPr>
+        <p:spPr>
+          <a:xfrm>
+            <a:off x="4480559" y="1645920"/>
+            <a:ext cx="457200" cy="457200"/>
+          </a:xfrm>
+          <a:prstGeom prst="rect">
+            <a:avLst/>
+          </a:prstGeom>
+          <a:solidFill>
+            <a:srgbClr val="007ABB"/>
+          </a:solidFill>
+          <a:ln>
+            <a:noFill/>
+          </a:ln>
+          <a:effectLst/>
+        </p:spPr>
+        <p:style>
+          <a:lnRef idx="1">
+            <a:schemeClr val="accent1"/>
+          </a:lnRef>
+          <a:fillRef idx="3">
+            <a:schemeClr val="accent1"/>
+          </a:fillRef>
+          <a:effectRef idx="2">
+            <a:schemeClr val="accent1"/>
+          </a:effectRef>
+          <a:fontRef idx="minor">
+            <a:schemeClr val="lt1"/>
+          </a:fontRef>
+        </p:style>
+        <p:txBody>
+          <a:bodyPr rtlCol="0" anchor="ctr"/>
+          <a:lstStyle/>
+          <a:p>
+            <a:pPr algn="ctr"/>
+          </a:p>
+        </p:txBody>
+      </p:sp>
+      <p:sp>
+        <p:nvSpPr>
+          <p:cNvPr id="16" name="TextBox 15"/>
+          <p:cNvSpPr txBox="1"/>
+          <p:nvPr/>
+        </p:nvSpPr>
+        <p:spPr>
+          <a:xfrm>
+            <a:off x="4480559" y="1645920"/>
+            <a:ext cx="457200" cy="457200"/>
+          </a:xfrm>
+          <a:prstGeom prst="rect">
+            <a:avLst/>
+          </a:prstGeom>
+          <a:noFill/>
+        </p:spPr>
+        <p:txBody>
+          <a:bodyPr wrap="square" anchor="ctr" lIns="45720" rIns="45720" tIns="27432" bIns="27432">
+            <a:spAutoFit/>
+          </a:bodyPr>
+          <a:lstStyle/>
+          <a:p>
+            <a:pPr algn="ctr">
+              <a:lnSpc>
+                <a:spcPct val="110000"/>
+              </a:lnSpc>
+              <a:spcAft>
+                <a:spcPts val="600"/>
+              </a:spcAft>
+            </a:pPr>
+            <a:r>
+              <a:rPr sz="1600" b="1">
+                <a:solidFill>
+                  <a:srgbClr val="FFFFFF"/>
+                </a:solidFill>
+                <a:latin typeface="Space Grotesk"/>
+              </a:rPr>
+              <a:t>2</a:t>
+            </a:r>
+          </a:p>
+        </p:txBody>
+      </p:sp>
+      <p:sp>
+        <p:nvSpPr>
+          <p:cNvPr id="17" name="TextBox 16"/>
+          <p:cNvSpPr txBox="1"/>
+          <p:nvPr/>
+        </p:nvSpPr>
+        <p:spPr>
+          <a:xfrm>
+            <a:off x="5074919" y="1627632"/>
+            <a:ext cx="2697480" cy="731520"/>
+          </a:xfrm>
+          <a:prstGeom prst="rect">
+            <a:avLst/>
+          </a:prstGeom>
+          <a:noFill/>
+        </p:spPr>
+        <p:txBody>
+          <a:bodyPr wrap="square" anchor="t" lIns="45720" rIns="45720" tIns="27432" bIns="27432">
+            <a:spAutoFit/>
+          </a:bodyPr>
+          <a:lstStyle/>
+          <a:p>
+            <a:pPr algn="l">
+              <a:lnSpc>
+                <a:spcPct val="110000"/>
+              </a:lnSpc>
+              <a:spcAft>
+                <a:spcPts val="600"/>
+              </a:spcAft>
+            </a:pPr>
+            <a:r>
+              <a:rPr sz="1400" b="1">
+                <a:solidFill>
+                  <a:srgbClr val="232754"/>
+                </a:solidFill>
+                <a:latin typeface="Funnel Display"/>
+              </a:rPr>
+              <a:t>Budgéter un créateur par mois</a:t>
+            </a:r>
+          </a:p>
+        </p:txBody>
+      </p:sp>
+      <p:sp>
+        <p:nvSpPr>
+          <p:cNvPr id="18" name="TextBox 17"/>
+          <p:cNvSpPr txBox="1"/>
+          <p:nvPr/>
+        </p:nvSpPr>
+        <p:spPr>
+          <a:xfrm>
+            <a:off x="4480559" y="2377440"/>
+            <a:ext cx="3246120" cy="1280160"/>
+          </a:xfrm>
+          <a:prstGeom prst="rect">
+            <a:avLst/>
+          </a:prstGeom>
+          <a:noFill/>
+        </p:spPr>
+        <p:txBody>
+          <a:bodyPr wrap="square" anchor="t" lIns="45720" rIns="45720" tIns="27432" bIns="27432">
+            <a:spAutoFit/>
+          </a:bodyPr>
+          <a:lstStyle/>
+          <a:p>
+            <a:pPr algn="l">
+              <a:lnSpc>
+                <a:spcPct val="110000"/>
+              </a:lnSpc>
+              <a:spcAft>
+                <a:spcPts val="600"/>
+              </a:spcAft>
+            </a:pPr>
+            <a:r>
+              <a:rPr sz="1200" b="0">
+                <a:solidFill>
+                  <a:srgbClr val="2B2A35"/>
+                </a:solidFill>
+                <a:latin typeface="Work Sans"/>
+              </a:rPr>
+              <a:t>C'est le levier le plus fort du panel (× 4,3). Commencer petit, avec un brief clair et un code de suivi.</a:t>
+            </a:r>
+          </a:p>
+        </p:txBody>
+      </p:sp>
+      <p:sp>
+        <p:nvSpPr>
+          <p:cNvPr id="19" name="Rectangle 18"/>
+          <p:cNvSpPr/>
+          <p:nvPr/>
+        </p:nvSpPr>
+        <p:spPr>
+          <a:xfrm>
+            <a:off x="8046719" y="1463040"/>
+            <a:ext cx="3593592" cy="2240280"/>
+          </a:xfrm>
+          <a:prstGeom prst="rect">
+            <a:avLst/>
+          </a:prstGeom>
+          <a:solidFill>
+            <a:srgbClr val="FFFFFF"/>
+          </a:solidFill>
+          <a:ln w="12700">
+            <a:solidFill>
+              <a:srgbClr val="E4E8ED"/>
+            </a:solidFill>
+          </a:ln>
+          <a:effectLst/>
+        </p:spPr>
+        <p:style>
+          <a:lnRef idx="1">
+            <a:schemeClr val="accent1"/>
+          </a:lnRef>
+          <a:fillRef idx="3">
+            <a:schemeClr val="accent1"/>
+          </a:fillRef>
+          <a:effectRef idx="2">
+            <a:schemeClr val="accent1"/>
+          </a:effectRef>
+          <a:fontRef idx="minor">
+            <a:schemeClr val="lt1"/>
+          </a:fontRef>
+        </p:style>
+        <p:txBody>
+          <a:bodyPr rtlCol="0" anchor="ctr"/>
+          <a:lstStyle/>
+          <a:p>
+            <a:pPr algn="ctr"/>
+          </a:p>
+        </p:txBody>
+      </p:sp>
+      <p:sp>
+        <p:nvSpPr>
+          <p:cNvPr id="20" name="Rectangle 19"/>
+          <p:cNvSpPr/>
+          <p:nvPr/>
+        </p:nvSpPr>
+        <p:spPr>
+          <a:xfrm>
+            <a:off x="8229599" y="1645920"/>
+            <a:ext cx="457200" cy="457200"/>
+          </a:xfrm>
+          <a:prstGeom prst="rect">
+            <a:avLst/>
+          </a:prstGeom>
+          <a:solidFill>
+            <a:srgbClr val="007ABB"/>
+          </a:solidFill>
+          <a:ln>
+            <a:noFill/>
+          </a:ln>
+          <a:effectLst/>
+        </p:spPr>
+        <p:style>
+          <a:lnRef idx="1">
+            <a:schemeClr val="accent1"/>
+          </a:lnRef>
+          <a:fillRef idx="3">
+            <a:schemeClr val="accent1"/>
+          </a:fillRef>
+          <a:effectRef idx="2">
+            <a:schemeClr val="accent1"/>
+          </a:effectRef>
+          <a:fontRef idx="minor">
+            <a:schemeClr val="lt1"/>
+          </a:fontRef>
+        </p:style>
+        <p:txBody>
+          <a:bodyPr rtlCol="0" anchor="ctr"/>
+          <a:lstStyle/>
+          <a:p>
+            <a:pPr algn="ctr"/>
+          </a:p>
+        </p:txBody>
+      </p:sp>
+      <p:sp>
+        <p:nvSpPr>
+          <p:cNvPr id="21" name="TextBox 20"/>
+          <p:cNvSpPr txBox="1"/>
+          <p:nvPr/>
+        </p:nvSpPr>
+        <p:spPr>
+          <a:xfrm>
+            <a:off x="8229599" y="1645920"/>
+            <a:ext cx="457200" cy="457200"/>
+          </a:xfrm>
+          <a:prstGeom prst="rect">
+            <a:avLst/>
+          </a:prstGeom>
+          <a:noFill/>
+        </p:spPr>
+        <p:txBody>
+          <a:bodyPr wrap="square" anchor="ctr" lIns="45720" rIns="45720" tIns="27432" bIns="27432">
+            <a:spAutoFit/>
+          </a:bodyPr>
+          <a:lstStyle/>
+          <a:p>
+            <a:pPr algn="ctr">
+              <a:lnSpc>
+                <a:spcPct val="110000"/>
+              </a:lnSpc>
+              <a:spcAft>
+                <a:spcPts val="600"/>
+              </a:spcAft>
+            </a:pPr>
+            <a:r>
+              <a:rPr sz="1600" b="1">
+                <a:solidFill>
+                  <a:srgbClr val="FFFFFF"/>
+                </a:solidFill>
+                <a:latin typeface="Space Grotesk"/>
+              </a:rPr>
+              <a:t>3</a:t>
+            </a:r>
+          </a:p>
+        </p:txBody>
+      </p:sp>
+      <p:sp>
+        <p:nvSpPr>
+          <p:cNvPr id="22" name="TextBox 21"/>
+          <p:cNvSpPr txBox="1"/>
+          <p:nvPr/>
+        </p:nvSpPr>
+        <p:spPr>
+          <a:xfrm>
+            <a:off x="8823959" y="1627632"/>
+            <a:ext cx="2697480" cy="731520"/>
+          </a:xfrm>
+          <a:prstGeom prst="rect">
+            <a:avLst/>
+          </a:prstGeom>
+          <a:noFill/>
+        </p:spPr>
+        <p:txBody>
+          <a:bodyPr wrap="square" anchor="t" lIns="45720" rIns="45720" tIns="27432" bIns="27432">
+            <a:spAutoFit/>
+          </a:bodyPr>
+          <a:lstStyle/>
+          <a:p>
+            <a:pPr algn="l">
+              <a:lnSpc>
+                <a:spcPct val="110000"/>
+              </a:lnSpc>
+              <a:spcAft>
+                <a:spcPts val="600"/>
+              </a:spcAft>
+            </a:pPr>
+            <a:r>
+              <a:rPr sz="1400" b="1">
+                <a:solidFill>
+                  <a:srgbClr val="232754"/>
+                </a:solidFill>
+                <a:latin typeface="Funnel Display"/>
+              </a:rPr>
+              <a:t>Parler la langue des clients</a:t>
+            </a:r>
+          </a:p>
+        </p:txBody>
+      </p:sp>
+      <p:sp>
+        <p:nvSpPr>
+          <p:cNvPr id="23" name="TextBox 22"/>
+          <p:cNvSpPr txBox="1"/>
+          <p:nvPr/>
+        </p:nvSpPr>
+        <p:spPr>
+          <a:xfrm>
+            <a:off x="8229599" y="2377440"/>
+            <a:ext cx="3246120" cy="1280160"/>
+          </a:xfrm>
+          <a:prstGeom prst="rect">
+            <a:avLst/>
+          </a:prstGeom>
+          <a:noFill/>
+        </p:spPr>
+        <p:txBody>
+          <a:bodyPr wrap="square" anchor="t" lIns="45720" rIns="45720" tIns="27432" bIns="27432">
+            <a:spAutoFit/>
+          </a:bodyPr>
+          <a:lstStyle/>
+          <a:p>
+            <a:pPr algn="l">
+              <a:lnSpc>
+                <a:spcPct val="110000"/>
+              </a:lnSpc>
+              <a:spcAft>
+                <a:spcPts val="600"/>
+              </a:spcAft>
+            </a:pPr>
+            <a:r>
+              <a:rPr sz="1200" b="0">
+                <a:solidFill>
+                  <a:srgbClr val="2B2A35"/>
+                </a:solidFill>
+                <a:latin typeface="Work Sans"/>
+              </a:rPr>
+              <a:t>Nouchi léger à Abidjan, wolof à Dakar, pidgin à Lagos, quand la cible s'y retrouve.</a:t>
+            </a:r>
+          </a:p>
+        </p:txBody>
+      </p:sp>
+      <p:sp>
+        <p:nvSpPr>
+          <p:cNvPr id="24" name="Rectangle 23"/>
+          <p:cNvSpPr/>
+          <p:nvPr/>
+        </p:nvSpPr>
+        <p:spPr>
+          <a:xfrm>
+            <a:off x="548640" y="3886200"/>
+            <a:ext cx="3593592" cy="2240280"/>
+          </a:xfrm>
+          <a:prstGeom prst="rect">
+            <a:avLst/>
+          </a:prstGeom>
+          <a:solidFill>
+            <a:srgbClr val="FFFFFF"/>
+          </a:solidFill>
+          <a:ln w="12700">
+            <a:solidFill>
+              <a:srgbClr val="E4E8ED"/>
+            </a:solidFill>
+          </a:ln>
+          <a:effectLst/>
+        </p:spPr>
+        <p:style>
+          <a:lnRef idx="1">
+            <a:schemeClr val="accent1"/>
+          </a:lnRef>
+          <a:fillRef idx="3">
+            <a:schemeClr val="accent1"/>
+          </a:fillRef>
+          <a:effectRef idx="2">
+            <a:schemeClr val="accent1"/>
+          </a:effectRef>
+          <a:fontRef idx="minor">
+            <a:schemeClr val="lt1"/>
+          </a:fontRef>
+        </p:style>
+        <p:txBody>
+          <a:bodyPr rtlCol="0" anchor="ctr"/>
+          <a:lstStyle/>
+          <a:p>
+            <a:pPr algn="ctr"/>
+          </a:p>
+        </p:txBody>
+      </p:sp>
+      <p:sp>
+        <p:nvSpPr>
+          <p:cNvPr id="25" name="Rectangle 24"/>
+          <p:cNvSpPr/>
+          <p:nvPr/>
+        </p:nvSpPr>
+        <p:spPr>
+          <a:xfrm>
+            <a:off x="731520" y="4069080"/>
+            <a:ext cx="457200" cy="457200"/>
+          </a:xfrm>
+          <a:prstGeom prst="rect">
+            <a:avLst/>
+          </a:prstGeom>
+          <a:solidFill>
+            <a:srgbClr val="007ABB"/>
+          </a:solidFill>
+          <a:ln>
+            <a:noFill/>
+          </a:ln>
+          <a:effectLst/>
+        </p:spPr>
+        <p:style>
+          <a:lnRef idx="1">
+            <a:schemeClr val="accent1"/>
+          </a:lnRef>
+          <a:fillRef idx="3">
+            <a:schemeClr val="accent1"/>
+          </a:fillRef>
+          <a:effectRef idx="2">
+            <a:schemeClr val="accent1"/>
+          </a:effectRef>
+          <a:fontRef idx="minor">
+            <a:schemeClr val="lt1"/>
+          </a:fontRef>
+        </p:style>
+        <p:txBody>
+          <a:bodyPr rtlCol="0" anchor="ctr"/>
+          <a:lstStyle/>
+          <a:p>
+            <a:pPr algn="ctr"/>
+          </a:p>
+        </p:txBody>
+      </p:sp>
+      <p:sp>
+        <p:nvSpPr>
+          <p:cNvPr id="26" name="TextBox 25"/>
+          <p:cNvSpPr txBox="1"/>
+          <p:nvPr/>
+        </p:nvSpPr>
+        <p:spPr>
+          <a:xfrm>
+            <a:off x="731520" y="4069080"/>
+            <a:ext cx="457200" cy="457200"/>
+          </a:xfrm>
+          <a:prstGeom prst="rect">
+            <a:avLst/>
+          </a:prstGeom>
+          <a:noFill/>
+        </p:spPr>
+        <p:txBody>
+          <a:bodyPr wrap="square" anchor="ctr" lIns="45720" rIns="45720" tIns="27432" bIns="27432">
+            <a:spAutoFit/>
+          </a:bodyPr>
+          <a:lstStyle/>
+          <a:p>
+            <a:pPr algn="ctr">
+              <a:lnSpc>
+                <a:spcPct val="110000"/>
+              </a:lnSpc>
+              <a:spcAft>
+                <a:spcPts val="600"/>
+              </a:spcAft>
+            </a:pPr>
+            <a:r>
+              <a:rPr sz="1600" b="1">
+                <a:solidFill>
+                  <a:srgbClr val="FFFFFF"/>
+                </a:solidFill>
+                <a:latin typeface="Space Grotesk"/>
+              </a:rPr>
+              <a:t>4</a:t>
+            </a:r>
+          </a:p>
+        </p:txBody>
+      </p:sp>
+      <p:sp>
+        <p:nvSpPr>
+          <p:cNvPr id="27" name="TextBox 26"/>
+          <p:cNvSpPr txBox="1"/>
+          <p:nvPr/>
+        </p:nvSpPr>
+        <p:spPr>
+          <a:xfrm>
+            <a:off x="1325880" y="4050791"/>
+            <a:ext cx="2697480" cy="731520"/>
+          </a:xfrm>
+          <a:prstGeom prst="rect">
+            <a:avLst/>
+          </a:prstGeom>
+          <a:noFill/>
+        </p:spPr>
+        <p:txBody>
+          <a:bodyPr wrap="square" anchor="t" lIns="45720" rIns="45720" tIns="27432" bIns="27432">
+            <a:spAutoFit/>
+          </a:bodyPr>
+          <a:lstStyle/>
+          <a:p>
+            <a:pPr algn="l">
+              <a:lnSpc>
+                <a:spcPct val="110000"/>
+              </a:lnSpc>
+              <a:spcAft>
+                <a:spcPts val="600"/>
+              </a:spcAft>
+            </a:pPr>
+            <a:r>
+              <a:rPr sz="1400" b="1">
+                <a:solidFill>
+                  <a:srgbClr val="232754"/>
+                </a:solidFill>
+                <a:latin typeface="Funnel Display"/>
+              </a:rPr>
+              <a:t>Sortir de l'affiche promo</a:t>
+            </a:r>
+          </a:p>
+        </p:txBody>
+      </p:sp>
+      <p:sp>
+        <p:nvSpPr>
+          <p:cNvPr id="28" name="TextBox 27"/>
+          <p:cNvSpPr txBox="1"/>
+          <p:nvPr/>
+        </p:nvSpPr>
+        <p:spPr>
+          <a:xfrm>
+            <a:off x="731520" y="4800600"/>
+            <a:ext cx="3246120" cy="1280160"/>
+          </a:xfrm>
+          <a:prstGeom prst="rect">
+            <a:avLst/>
+          </a:prstGeom>
+          <a:noFill/>
+        </p:spPr>
+        <p:txBody>
+          <a:bodyPr wrap="square" anchor="t" lIns="45720" rIns="45720" tIns="27432" bIns="27432">
+            <a:spAutoFit/>
+          </a:bodyPr>
+          <a:lstStyle/>
+          <a:p>
+            <a:pPr algn="l">
+              <a:lnSpc>
+                <a:spcPct val="110000"/>
+              </a:lnSpc>
+              <a:spcAft>
+                <a:spcPts val="600"/>
+              </a:spcAft>
+            </a:pPr>
+            <a:r>
+              <a:rPr sz="1200" b="0">
+                <a:solidFill>
+                  <a:srgbClr val="2B2A35"/>
+                </a:solidFill>
+                <a:latin typeface="Work Sans"/>
+              </a:rPr>
+              <a:t>Une offre = une phrase et une photo, le détail dans la légende. Comparer sur deux semaines.</a:t>
+            </a:r>
+          </a:p>
+        </p:txBody>
+      </p:sp>
+      <p:sp>
+        <p:nvSpPr>
+          <p:cNvPr id="29" name="Rectangle 28"/>
+          <p:cNvSpPr/>
+          <p:nvPr/>
+        </p:nvSpPr>
+        <p:spPr>
+          <a:xfrm>
+            <a:off x="4297679" y="3886200"/>
+            <a:ext cx="3593592" cy="2240280"/>
+          </a:xfrm>
+          <a:prstGeom prst="rect">
+            <a:avLst/>
+          </a:prstGeom>
+          <a:solidFill>
+            <a:srgbClr val="FFFFFF"/>
+          </a:solidFill>
+          <a:ln w="12700">
+            <a:solidFill>
+              <a:srgbClr val="E4E8ED"/>
+            </a:solidFill>
+          </a:ln>
+          <a:effectLst/>
+        </p:spPr>
+        <p:style>
+          <a:lnRef idx="1">
+            <a:schemeClr val="accent1"/>
+          </a:lnRef>
+          <a:fillRef idx="3">
+            <a:schemeClr val="accent1"/>
+          </a:fillRef>
+          <a:effectRef idx="2">
+            <a:schemeClr val="accent1"/>
+          </a:effectRef>
+          <a:fontRef idx="minor">
+            <a:schemeClr val="lt1"/>
+          </a:fontRef>
+        </p:style>
+        <p:txBody>
+          <a:bodyPr rtlCol="0" anchor="ctr"/>
+          <a:lstStyle/>
+          <a:p>
+            <a:pPr algn="ctr"/>
+          </a:p>
+        </p:txBody>
+      </p:sp>
+      <p:sp>
+        <p:nvSpPr>
+          <p:cNvPr id="30" name="Rectangle 29"/>
+          <p:cNvSpPr/>
+          <p:nvPr/>
+        </p:nvSpPr>
+        <p:spPr>
+          <a:xfrm>
+            <a:off x="4480559" y="4069080"/>
+            <a:ext cx="457200" cy="457200"/>
+          </a:xfrm>
+          <a:prstGeom prst="rect">
+            <a:avLst/>
+          </a:prstGeom>
+          <a:solidFill>
+            <a:srgbClr val="007ABB"/>
+          </a:solidFill>
+          <a:ln>
+            <a:noFill/>
+          </a:ln>
+          <a:effectLst/>
+        </p:spPr>
+        <p:style>
+          <a:lnRef idx="1">
+            <a:schemeClr val="accent1"/>
+          </a:lnRef>
+          <a:fillRef idx="3">
+            <a:schemeClr val="accent1"/>
+          </a:fillRef>
+          <a:effectRef idx="2">
+            <a:schemeClr val="accent1"/>
+          </a:effectRef>
+          <a:fontRef idx="minor">
+            <a:schemeClr val="lt1"/>
+          </a:fontRef>
+        </p:style>
+        <p:txBody>
+          <a:bodyPr rtlCol="0" anchor="ctr"/>
+          <a:lstStyle/>
+          <a:p>
+            <a:pPr algn="ctr"/>
+          </a:p>
+        </p:txBody>
+      </p:sp>
+      <p:sp>
+        <p:nvSpPr>
+          <p:cNvPr id="31" name="TextBox 30"/>
+          <p:cNvSpPr txBox="1"/>
+          <p:nvPr/>
+        </p:nvSpPr>
+        <p:spPr>
+          <a:xfrm>
+            <a:off x="4480559" y="4069080"/>
+            <a:ext cx="457200" cy="457200"/>
+          </a:xfrm>
+          <a:prstGeom prst="rect">
+            <a:avLst/>
+          </a:prstGeom>
+          <a:noFill/>
+        </p:spPr>
+        <p:txBody>
+          <a:bodyPr wrap="square" anchor="ctr" lIns="45720" rIns="45720" tIns="27432" bIns="27432">
+            <a:spAutoFit/>
+          </a:bodyPr>
+          <a:lstStyle/>
+          <a:p>
+            <a:pPr algn="ctr">
+              <a:lnSpc>
+                <a:spcPct val="110000"/>
+              </a:lnSpc>
+              <a:spcAft>
+                <a:spcPts val="600"/>
+              </a:spcAft>
+            </a:pPr>
+            <a:r>
+              <a:rPr sz="1600" b="1">
+                <a:solidFill>
+                  <a:srgbClr val="FFFFFF"/>
+                </a:solidFill>
+                <a:latin typeface="Space Grotesk"/>
+              </a:rPr>
+              <a:t>5</a:t>
+            </a:r>
+          </a:p>
+        </p:txBody>
+      </p:sp>
+      <p:sp>
+        <p:nvSpPr>
+          <p:cNvPr id="32" name="TextBox 31"/>
+          <p:cNvSpPr txBox="1"/>
+          <p:nvPr/>
+        </p:nvSpPr>
+        <p:spPr>
+          <a:xfrm>
+            <a:off x="5074919" y="4050791"/>
+            <a:ext cx="2697480" cy="731520"/>
+          </a:xfrm>
+          <a:prstGeom prst="rect">
+            <a:avLst/>
+          </a:prstGeom>
+          <a:noFill/>
+        </p:spPr>
+        <p:txBody>
+          <a:bodyPr wrap="square" anchor="t" lIns="45720" rIns="45720" tIns="27432" bIns="27432">
+            <a:spAutoFit/>
+          </a:bodyPr>
+          <a:lstStyle/>
+          <a:p>
+            <a:pPr algn="l">
+              <a:lnSpc>
+                <a:spcPct val="110000"/>
+              </a:lnSpc>
+              <a:spcAft>
+                <a:spcPts val="600"/>
+              </a:spcAft>
+            </a:pPr>
+            <a:r>
+              <a:rPr sz="1400" b="1">
+                <a:solidFill>
+                  <a:srgbClr val="232754"/>
+                </a:solidFill>
+                <a:latin typeface="Funnel Display"/>
+              </a:rPr>
+              <a:t>Faire un vrai témoignage vidéo par trimestre</a:t>
+            </a:r>
+          </a:p>
+        </p:txBody>
+      </p:sp>
+      <p:sp>
+        <p:nvSpPr>
+          <p:cNvPr id="33" name="TextBox 32"/>
+          <p:cNvSpPr txBox="1"/>
+          <p:nvPr/>
+        </p:nvSpPr>
+        <p:spPr>
+          <a:xfrm>
+            <a:off x="4480559" y="4800600"/>
+            <a:ext cx="3246120" cy="1280160"/>
+          </a:xfrm>
+          <a:prstGeom prst="rect">
+            <a:avLst/>
+          </a:prstGeom>
+          <a:noFill/>
+        </p:spPr>
+        <p:txBody>
+          <a:bodyPr wrap="square" anchor="t" lIns="45720" rIns="45720" tIns="27432" bIns="27432">
+            <a:spAutoFit/>
+          </a:bodyPr>
+          <a:lstStyle/>
+          <a:p>
+            <a:pPr algn="l">
+              <a:lnSpc>
+                <a:spcPct val="110000"/>
+              </a:lnSpc>
+              <a:spcAft>
+                <a:spcPts val="600"/>
+              </a:spcAft>
+            </a:pPr>
+            <a:r>
+              <a:rPr sz="1200" b="0">
+                <a:solidFill>
+                  <a:srgbClr val="2B2A35"/>
+                </a:solidFill>
+                <a:latin typeface="Work Sans"/>
+              </a:rPr>
+              <a:t>Un client, 45 secondes, son accord écrit. À recouper en carte pour LinkedIn.</a:t>
+            </a:r>
+          </a:p>
+        </p:txBody>
+      </p:sp>
+      <p:sp>
+        <p:nvSpPr>
+          <p:cNvPr id="34" name="Rectangle 33"/>
+          <p:cNvSpPr/>
+          <p:nvPr/>
+        </p:nvSpPr>
+        <p:spPr>
+          <a:xfrm>
+            <a:off x="8046719" y="3886200"/>
+            <a:ext cx="3593592" cy="2240280"/>
+          </a:xfrm>
+          <a:prstGeom prst="rect">
+            <a:avLst/>
+          </a:prstGeom>
+          <a:solidFill>
+            <a:srgbClr val="FFFFFF"/>
+          </a:solidFill>
+          <a:ln w="12700">
+            <a:solidFill>
+              <a:srgbClr val="E4E8ED"/>
+            </a:solidFill>
+          </a:ln>
+          <a:effectLst/>
+        </p:spPr>
+        <p:style>
+          <a:lnRef idx="1">
+            <a:schemeClr val="accent1"/>
+          </a:lnRef>
+          <a:fillRef idx="3">
+            <a:schemeClr val="accent1"/>
+          </a:fillRef>
+          <a:effectRef idx="2">
+            <a:schemeClr val="accent1"/>
+          </a:effectRef>
+          <a:fontRef idx="minor">
+            <a:schemeClr val="lt1"/>
+          </a:fontRef>
+        </p:style>
+        <p:txBody>
+          <a:bodyPr rtlCol="0" anchor="ctr"/>
+          <a:lstStyle/>
+          <a:p>
+            <a:pPr algn="ctr"/>
+          </a:p>
+        </p:txBody>
+      </p:sp>
+      <p:sp>
+        <p:nvSpPr>
+          <p:cNvPr id="35" name="Rectangle 34"/>
+          <p:cNvSpPr/>
+          <p:nvPr/>
+        </p:nvSpPr>
+        <p:spPr>
+          <a:xfrm>
+            <a:off x="8229599" y="4069080"/>
+            <a:ext cx="457200" cy="457200"/>
+          </a:xfrm>
+          <a:prstGeom prst="rect">
+            <a:avLst/>
+          </a:prstGeom>
+          <a:solidFill>
+            <a:srgbClr val="007ABB"/>
+          </a:solidFill>
+          <a:ln>
+            <a:noFill/>
+          </a:ln>
+          <a:effectLst/>
+        </p:spPr>
+        <p:style>
+          <a:lnRef idx="1">
+            <a:schemeClr val="accent1"/>
+          </a:lnRef>
+          <a:fillRef idx="3">
+            <a:schemeClr val="accent1"/>
+          </a:fillRef>
+          <a:effectRef idx="2">
+            <a:schemeClr val="accent1"/>
+          </a:effectRef>
+          <a:fontRef idx="minor">
+            <a:schemeClr val="lt1"/>
+          </a:fontRef>
+        </p:style>
+        <p:txBody>
+          <a:bodyPr rtlCol="0" anchor="ctr"/>
+          <a:lstStyle/>
+          <a:p>
+            <a:pPr algn="ctr"/>
+          </a:p>
+        </p:txBody>
+      </p:sp>
+      <p:sp>
+        <p:nvSpPr>
+          <p:cNvPr id="36" name="TextBox 35"/>
+          <p:cNvSpPr txBox="1"/>
+          <p:nvPr/>
+        </p:nvSpPr>
+        <p:spPr>
+          <a:xfrm>
+            <a:off x="8229599" y="4069080"/>
+            <a:ext cx="457200" cy="457200"/>
+          </a:xfrm>
+          <a:prstGeom prst="rect">
+            <a:avLst/>
+          </a:prstGeom>
+          <a:noFill/>
+        </p:spPr>
+        <p:txBody>
+          <a:bodyPr wrap="square" anchor="ctr" lIns="45720" rIns="45720" tIns="27432" bIns="27432">
+            <a:spAutoFit/>
+          </a:bodyPr>
+          <a:lstStyle/>
+          <a:p>
+            <a:pPr algn="ctr">
+              <a:lnSpc>
+                <a:spcPct val="110000"/>
+              </a:lnSpc>
+              <a:spcAft>
+                <a:spcPts val="600"/>
+              </a:spcAft>
+            </a:pPr>
+            <a:r>
+              <a:rPr sz="1600" b="1">
+                <a:solidFill>
+                  <a:srgbClr val="FFFFFF"/>
+                </a:solidFill>
+                <a:latin typeface="Space Grotesk"/>
+              </a:rPr>
+              <a:t>6</a:t>
+            </a:r>
+          </a:p>
+        </p:txBody>
+      </p:sp>
+      <p:sp>
+        <p:nvSpPr>
+          <p:cNvPr id="37" name="TextBox 36"/>
+          <p:cNvSpPr txBox="1"/>
+          <p:nvPr/>
+        </p:nvSpPr>
+        <p:spPr>
+          <a:xfrm>
+            <a:off x="8823959" y="4050791"/>
+            <a:ext cx="2697480" cy="731520"/>
+          </a:xfrm>
+          <a:prstGeom prst="rect">
+            <a:avLst/>
+          </a:prstGeom>
+          <a:noFill/>
+        </p:spPr>
+        <p:txBody>
+          <a:bodyPr wrap="square" anchor="t" lIns="45720" rIns="45720" tIns="27432" bIns="27432">
+            <a:spAutoFit/>
+          </a:bodyPr>
+          <a:lstStyle/>
+          <a:p>
+            <a:pPr algn="l">
+              <a:lnSpc>
+                <a:spcPct val="110000"/>
+              </a:lnSpc>
+              <a:spcAft>
+                <a:spcPts val="600"/>
+              </a:spcAft>
+            </a:pPr>
+            <a:r>
+              <a:rPr sz="1400" b="1">
+                <a:solidFill>
+                  <a:srgbClr val="232754"/>
+                </a:solidFill>
+                <a:latin typeface="Funnel Display"/>
+              </a:rPr>
+              <a:t>Sur LinkedIn, montrer des gens et des étapes</a:t>
+            </a:r>
+          </a:p>
+        </p:txBody>
+      </p:sp>
+      <p:sp>
+        <p:nvSpPr>
+          <p:cNvPr id="38" name="TextBox 37"/>
+          <p:cNvSpPr txBox="1"/>
+          <p:nvPr/>
+        </p:nvSpPr>
+        <p:spPr>
+          <a:xfrm>
+            <a:off x="8229599" y="4800600"/>
+            <a:ext cx="3246120" cy="1280160"/>
+          </a:xfrm>
+          <a:prstGeom prst="rect">
+            <a:avLst/>
+          </a:prstGeom>
+          <a:noFill/>
+        </p:spPr>
+        <p:txBody>
+          <a:bodyPr wrap="square" anchor="t" lIns="45720" rIns="45720" tIns="27432" bIns="27432">
+            <a:spAutoFit/>
+          </a:bodyPr>
+          <a:lstStyle/>
+          <a:p>
+            <a:pPr algn="l">
+              <a:lnSpc>
+                <a:spcPct val="110000"/>
+              </a:lnSpc>
+              <a:spcAft>
+                <a:spcPts val="600"/>
+              </a:spcAft>
+            </a:pPr>
+            <a:r>
+              <a:rPr sz="1200" b="0">
+                <a:solidFill>
+                  <a:srgbClr val="2B2A35"/>
+                </a:solidFill>
+                <a:latin typeface="Work Sans"/>
+              </a:rPr>
+              <a:t>Recrues, partenaires, agréments, chiffres franchis, plutôt que le produit seul.</a:t>
+            </a:r>
+          </a:p>
+        </p:txBody>
+      </p:sp>
+    </p:spTree>
+  </p:cSld>
+  <p:clrMapOvr>
+    <a:masterClrMapping/>
+  </p:clrMapOvr>
+</p:sld>
+</file>
+
+<file path=ppt/slides/slide23.xml><?xml version="1.0" encoding="utf-8"?>
+<p:sld xmlns:a="http://schemas.openxmlformats.org/drawingml/2006/main" xmlns:p="http://schemas.openxmlformats.org/presentationml/2006/main" xmlns:r="http://schemas.openxmlformats.org/officeDocument/2006/relationships">
+  <p:cSld>
+    <p:bg>
+      <p:bgPr>
+        <a:solidFill>
+          <a:srgbClr val="F7F8FA"/>
+        </a:solidFill>
+        <a:effectLst/>
+      </p:bgPr>
+    </p:bg>
+    <p:spTree>
+      <p:nvGrpSpPr>
+        <p:cNvPr id="1" name=""/>
+        <p:cNvGrpSpPr/>
+        <p:nvPr/>
+      </p:nvGrpSpPr>
+      <p:grpSpPr/>
+      <p:sp>
+        <p:nvSpPr>
+          <p:cNvPr id="2" name="Rectangle 1"/>
+          <p:cNvSpPr/>
+          <p:nvPr/>
+        </p:nvSpPr>
+        <p:spPr>
+          <a:xfrm>
+            <a:off x="0" y="0"/>
+            <a:ext cx="12191695" cy="73152"/>
+          </a:xfrm>
+          <a:prstGeom prst="rect">
+            <a:avLst/>
+          </a:prstGeom>
+          <a:solidFill>
+            <a:srgbClr val="007ABB"/>
+          </a:solidFill>
+          <a:ln>
+            <a:noFill/>
+          </a:ln>
+          <a:effectLst/>
+        </p:spPr>
+        <p:style>
+          <a:lnRef idx="1">
+            <a:schemeClr val="accent1"/>
+          </a:lnRef>
+          <a:fillRef idx="3">
+            <a:schemeClr val="accent1"/>
+          </a:fillRef>
+          <a:effectRef idx="2">
+            <a:schemeClr val="accent1"/>
+          </a:effectRef>
+          <a:fontRef idx="minor">
+            <a:schemeClr val="lt1"/>
+          </a:fontRef>
+        </p:style>
+        <p:txBody>
+          <a:bodyPr rtlCol="0" anchor="ctr"/>
+          <a:lstStyle/>
+          <a:p>
+            <a:pPr algn="ctr"/>
+          </a:p>
+        </p:txBody>
+      </p:sp>
+      <p:sp>
+        <p:nvSpPr>
+          <p:cNvPr id="3" name="TextBox 2"/>
+          <p:cNvSpPr txBox="1"/>
+          <p:nvPr/>
+        </p:nvSpPr>
+        <p:spPr>
+          <a:xfrm>
+            <a:off x="548640" y="274320"/>
+            <a:ext cx="8229600" cy="320040"/>
+          </a:xfrm>
+          <a:prstGeom prst="rect">
+            <a:avLst/>
+          </a:prstGeom>
+          <a:noFill/>
+        </p:spPr>
+        <p:txBody>
+          <a:bodyPr wrap="square" anchor="t" lIns="45720" rIns="45720" tIns="27432" bIns="27432">
+            <a:spAutoFit/>
+          </a:bodyPr>
+          <a:lstStyle/>
+          <a:p>
+            <a:pPr algn="l">
+              <a:lnSpc>
+                <a:spcPct val="110000"/>
+              </a:lnSpc>
+              <a:spcAft>
+                <a:spcPts val="600"/>
+              </a:spcAft>
+            </a:pPr>
+            <a:r>
+              <a:rPr sz="1100" b="1">
+                <a:solidFill>
+                  <a:srgbClr val="007ABB"/>
+                </a:solidFill>
+                <a:latin typeface="Space Grotesk"/>
+              </a:rPr>
+              <a:t>LIMITES ET SUITE</a:t>
+            </a:r>
+          </a:p>
+        </p:txBody>
+      </p:sp>
+      <p:sp>
+        <p:nvSpPr>
+          <p:cNvPr id="4" name="TextBox 3"/>
+          <p:cNvSpPr txBox="1"/>
+          <p:nvPr/>
+        </p:nvSpPr>
+        <p:spPr>
+          <a:xfrm>
+            <a:off x="548640" y="548640"/>
+            <a:ext cx="9692640" cy="822960"/>
+          </a:xfrm>
+          <a:prstGeom prst="rect">
+            <a:avLst/>
+          </a:prstGeom>
+          <a:noFill/>
+        </p:spPr>
+        <p:txBody>
+          <a:bodyPr wrap="square" anchor="t" lIns="45720" rIns="45720" tIns="27432" bIns="27432">
+            <a:spAutoFit/>
+          </a:bodyPr>
+          <a:lstStyle/>
+          <a:p>
+            <a:pPr algn="l">
+              <a:lnSpc>
+                <a:spcPct val="110000"/>
+              </a:lnSpc>
+              <a:spcAft>
+                <a:spcPts val="600"/>
+              </a:spcAft>
+            </a:pPr>
+            <a:r>
+              <a:rPr sz="2600" b="1">
+                <a:solidFill>
+                  <a:srgbClr val="232754"/>
+                </a:solidFill>
+                <a:latin typeface="Funnel Display"/>
+              </a:rPr>
+              <a:t>Limites et suite</a:t>
+            </a:r>
+          </a:p>
+        </p:txBody>
+      </p:sp>
+      <p:pic>
+        <p:nvPicPr>
+          <p:cNvPr id="5" name="Picture 4" descr="logo_mstudio_couleur_fond_clair.png"/>
+          <p:cNvPicPr>
+            <a:picLocks noChangeAspect="1"/>
+          </p:cNvPicPr>
+          <p:nvPr/>
+        </p:nvPicPr>
+        <p:blipFill>
+          <a:blip r:embed="rId2"/>
+          <a:stretch>
+            <a:fillRect/>
+          </a:stretch>
+        </p:blipFill>
+        <p:spPr>
+          <a:xfrm>
+            <a:off x="10561320" y="292608"/>
+            <a:ext cx="1168842" cy="384048"/>
+          </a:xfrm>
+          <a:prstGeom prst="rect">
+            <a:avLst/>
+          </a:prstGeom>
+        </p:spPr>
+      </p:pic>
+      <p:sp>
+        <p:nvSpPr>
+          <p:cNvPr id="6" name="Rectangle 5"/>
+          <p:cNvSpPr/>
+          <p:nvPr/>
+        </p:nvSpPr>
+        <p:spPr>
+          <a:xfrm>
+            <a:off x="548640" y="6446520"/>
+            <a:ext cx="11091672" cy="9144"/>
+          </a:xfrm>
+          <a:prstGeom prst="rect">
+            <a:avLst/>
+          </a:prstGeom>
+          <a:solidFill>
+            <a:srgbClr val="E4E8ED"/>
+          </a:solidFill>
+          <a:ln>
+            <a:noFill/>
+          </a:ln>
+          <a:effectLst/>
+        </p:spPr>
+        <p:style>
+          <a:lnRef idx="1">
+            <a:schemeClr val="accent1"/>
+          </a:lnRef>
+          <a:fillRef idx="3">
+            <a:schemeClr val="accent1"/>
+          </a:fillRef>
+          <a:effectRef idx="2">
+            <a:schemeClr val="accent1"/>
+          </a:effectRef>
+          <a:fontRef idx="minor">
+            <a:schemeClr val="lt1"/>
+          </a:fontRef>
+        </p:style>
+        <p:txBody>
+          <a:bodyPr rtlCol="0" anchor="ctr"/>
+          <a:lstStyle/>
+          <a:p>
+            <a:pPr algn="ctr"/>
+          </a:p>
+        </p:txBody>
+      </p:sp>
+      <p:sp>
+        <p:nvSpPr>
+          <p:cNvPr id="7" name="TextBox 6"/>
+          <p:cNvSpPr txBox="1"/>
+          <p:nvPr/>
+        </p:nvSpPr>
+        <p:spPr>
+          <a:xfrm>
+            <a:off x="548640" y="6492240"/>
+            <a:ext cx="8229600" cy="274320"/>
+          </a:xfrm>
+          <a:prstGeom prst="rect">
+            <a:avLst/>
+          </a:prstGeom>
+          <a:noFill/>
+        </p:spPr>
+        <p:txBody>
+          <a:bodyPr wrap="square" anchor="t" lIns="45720" rIns="45720" tIns="27432" bIns="27432">
+            <a:spAutoFit/>
+          </a:bodyPr>
+          <a:lstStyle/>
+          <a:p>
+            <a:pPr algn="l">
+              <a:lnSpc>
+                <a:spcPct val="110000"/>
+              </a:lnSpc>
+              <a:spcAft>
+                <a:spcPts val="600"/>
+              </a:spcAft>
+            </a:pPr>
+            <a:r>
+              <a:rPr sz="900" b="0">
+                <a:solidFill>
+                  <a:srgbClr val="8F8F9A"/>
+                </a:solidFill>
+                <a:latin typeface="Work Sans"/>
+              </a:rPr>
+              <a:t>Benchmark visuels et vidéos · Nigeria, France, Côte d'Ivoire, Sénégal · relevé du 24/10/2026</a:t>
+            </a:r>
+          </a:p>
+        </p:txBody>
+      </p:sp>
+      <p:sp>
+        <p:nvSpPr>
+          <p:cNvPr id="8" name="TextBox 7"/>
+          <p:cNvSpPr txBox="1"/>
+          <p:nvPr/>
+        </p:nvSpPr>
+        <p:spPr>
+          <a:xfrm>
+            <a:off x="10698480" y="6492240"/>
+            <a:ext cx="941832" cy="274320"/>
+          </a:xfrm>
+          <a:prstGeom prst="rect">
+            <a:avLst/>
+          </a:prstGeom>
+          <a:noFill/>
+        </p:spPr>
+        <p:txBody>
+          <a:bodyPr wrap="square" anchor="t" lIns="45720" rIns="45720" tIns="27432" bIns="27432">
+            <a:spAutoFit/>
+          </a:bodyPr>
+          <a:lstStyle/>
+          <a:p>
+            <a:pPr algn="r">
+              <a:lnSpc>
+                <a:spcPct val="110000"/>
+              </a:lnSpc>
+              <a:spcAft>
+                <a:spcPts val="600"/>
+              </a:spcAft>
+            </a:pPr>
+            <a:r>
+              <a:rPr sz="900" b="0">
+                <a:solidFill>
+                  <a:srgbClr val="8F8F9A"/>
+                </a:solidFill>
+                <a:latin typeface="Work Sans"/>
+              </a:rPr>
+              <a:t>23</a:t>
+            </a:r>
+          </a:p>
+        </p:txBody>
+      </p:sp>
+      <p:sp>
+        <p:nvSpPr>
+          <p:cNvPr id="9" name="TextBox 8"/>
+          <p:cNvSpPr txBox="1"/>
+          <p:nvPr/>
+        </p:nvSpPr>
+        <p:spPr>
+          <a:xfrm>
+            <a:off x="548640" y="1417320"/>
+            <a:ext cx="5486400" cy="4846320"/>
+          </a:xfrm>
+          <a:prstGeom prst="rect">
+            <a:avLst/>
+          </a:prstGeom>
+          <a:noFill/>
+        </p:spPr>
+        <p:txBody>
+          <a:bodyPr wrap="square" anchor="t" lIns="45720" rIns="45720" tIns="27432" bIns="27432">
+            <a:spAutoFit/>
+          </a:bodyPr>
+          <a:lstStyle/>
+          <a:p>
+            <a:pPr algn="l">
+              <a:lnSpc>
+                <a:spcPct val="110000"/>
+              </a:lnSpc>
+              <a:spcAft>
+                <a:spcPts val="100"/>
+              </a:spcAft>
+            </a:pPr>
+            <a:r>
+              <a:rPr sz="1200" b="1">
+                <a:solidFill>
+                  <a:srgbClr val="232754"/>
+                </a:solidFill>
+                <a:latin typeface="Work Sans"/>
+              </a:rPr>
+              <a:t>Limites</a:t>
+            </a:r>
+          </a:p>
+          <a:p>
+            <a:pPr algn="l">
+              <a:lnSpc>
+                <a:spcPct val="110000"/>
+              </a:lnSpc>
+              <a:spcAft>
+                <a:spcPts val="900"/>
+              </a:spcAft>
+            </a:pPr>
+            <a:r>
+              <a:rPr sz="1100" b="0">
+                <a:solidFill>
+                  <a:srgbClr val="2B2A35"/>
+                </a:solidFill>
+                <a:latin typeface="Work Sans"/>
+              </a:rPr>
+              <a:t/>
+            </a:r>
+          </a:p>
+          <a:p>
+            <a:pPr algn="l">
+              <a:lnSpc>
+                <a:spcPct val="110000"/>
+              </a:lnSpc>
+              <a:spcAft>
+                <a:spcPts val="700"/>
+              </a:spcAft>
+            </a:pPr>
+            <a:r>
+              <a:rPr sz="1200" b="0">
+                <a:solidFill>
+                  <a:srgbClr val="2B2A35"/>
+                </a:solidFill>
+                <a:latin typeface="Work Sans"/>
+              </a:rPr>
+              <a:t>•  15 posts par marque : c'est un instantané d'octobre 2026, pas une année.</a:t>
+            </a:r>
+          </a:p>
+          <a:p>
+            <a:pPr algn="l">
+              <a:lnSpc>
+                <a:spcPct val="110000"/>
+              </a:lnSpc>
+              <a:spcAft>
+                <a:spcPts val="700"/>
+              </a:spcAft>
+            </a:pPr>
+            <a:r>
+              <a:rPr sz="1200" b="0">
+                <a:solidFill>
+                  <a:srgbClr val="2B2A35"/>
+                </a:solidFill>
+                <a:latin typeface="Work Sans"/>
+              </a:rPr>
+              <a:t>•  Les chiffres publics ne disent pas la portée réelle.</a:t>
+            </a:r>
+          </a:p>
+          <a:p>
+            <a:pPr algn="l">
+              <a:lnSpc>
+                <a:spcPct val="110000"/>
+              </a:lnSpc>
+              <a:spcAft>
+                <a:spcPts val="700"/>
+              </a:spcAft>
+            </a:pPr>
+            <a:r>
+              <a:rPr sz="1200" b="0">
+                <a:solidFill>
+                  <a:srgbClr val="2B2A35"/>
+                </a:solidFill>
+                <a:latin typeface="Work Sans"/>
+              </a:rPr>
+              <a:t>•  Pas de compte TikTok officiel trouvé pour PayDunya, GTBank, Paystack et PayFit ; Djamo n'y publie plus depuis fin août.</a:t>
+            </a:r>
+          </a:p>
+          <a:p>
+            <a:pPr algn="l">
+              <a:lnSpc>
+                <a:spcPct val="110000"/>
+              </a:lnSpc>
+              <a:spcAft>
+                <a:spcPts val="700"/>
+              </a:spcAft>
+            </a:pPr>
+            <a:r>
+              <a:rPr sz="1200" b="0">
+                <a:solidFill>
+                  <a:srgbClr val="2B2A35"/>
+                </a:solidFill>
+                <a:latin typeface="Work Sans"/>
+              </a:rPr>
+              <a:t>•  TikTok signale les vidéos sponsorisées ; Facebook et Instagram ne le disent pas dans les chiffres publics.</a:t>
+            </a:r>
+          </a:p>
+          <a:p>
+            <a:pPr algn="l">
+              <a:lnSpc>
+                <a:spcPct val="110000"/>
+              </a:lnSpc>
+              <a:spcAft>
+                <a:spcPts val="700"/>
+              </a:spcAft>
+            </a:pPr>
+            <a:r>
+              <a:rPr sz="1200" b="0">
+                <a:solidFill>
+                  <a:srgbClr val="2B2A35"/>
+                </a:solidFill>
+                <a:latin typeface="Work Sans"/>
+              </a:rPr>
+              <a:t>•  Le son des vidéos n'a pas été écouté : la voix off n'est pas mesurée.</a:t>
+            </a:r>
+          </a:p>
+          <a:p>
+            <a:pPr algn="l">
+              <a:lnSpc>
+                <a:spcPct val="110000"/>
+              </a:lnSpc>
+              <a:spcAft>
+                <a:spcPts val="700"/>
+              </a:spcAft>
+            </a:pPr>
+            <a:r>
+              <a:rPr sz="1200" b="0">
+                <a:solidFill>
+                  <a:srgbClr val="2B2A35"/>
+                </a:solidFill>
+                <a:latin typeface="Work Sans"/>
+              </a:rPr>
+              <a:t>•  La page LinkedIn de Payfit relevée publie surtout en espagnol : elle a été retirée du calcul LinkedIn.</a:t>
+            </a:r>
+          </a:p>
+        </p:txBody>
+      </p:sp>
+      <p:sp>
+        <p:nvSpPr>
+          <p:cNvPr id="10" name="Rectangle 9"/>
+          <p:cNvSpPr/>
+          <p:nvPr/>
+        </p:nvSpPr>
+        <p:spPr>
+          <a:xfrm>
+            <a:off x="6400800" y="1417320"/>
+            <a:ext cx="5239512" cy="4846320"/>
+          </a:xfrm>
+          <a:prstGeom prst="rect">
+            <a:avLst/>
+          </a:prstGeom>
+          <a:solidFill>
+            <a:srgbClr val="FFFFFF"/>
+          </a:solidFill>
+          <a:ln w="12700">
+            <a:solidFill>
+              <a:srgbClr val="E4E8ED"/>
+            </a:solidFill>
+          </a:ln>
+          <a:effectLst/>
+        </p:spPr>
+        <p:style>
+          <a:lnRef idx="1">
+            <a:schemeClr val="accent1"/>
+          </a:lnRef>
+          <a:fillRef idx="3">
+            <a:schemeClr val="accent1"/>
+          </a:fillRef>
+          <a:effectRef idx="2">
+            <a:schemeClr val="accent1"/>
+          </a:effectRef>
+          <a:fontRef idx="minor">
+            <a:schemeClr val="lt1"/>
+          </a:fontRef>
+        </p:style>
+        <p:txBody>
+          <a:bodyPr rtlCol="0" anchor="ctr"/>
+          <a:lstStyle/>
+          <a:p>
+            <a:pPr algn="ctr"/>
+          </a:p>
+        </p:txBody>
+      </p:sp>
+      <p:sp>
+        <p:nvSpPr>
+          <p:cNvPr id="11" name="Rectangle 10"/>
+          <p:cNvSpPr/>
+          <p:nvPr/>
+        </p:nvSpPr>
+        <p:spPr>
+          <a:xfrm>
+            <a:off x="6400800" y="1417320"/>
+            <a:ext cx="5239512" cy="73152"/>
+          </a:xfrm>
+          <a:prstGeom prst="rect">
+            <a:avLst/>
+          </a:prstGeom>
+          <a:solidFill>
+            <a:srgbClr val="007ABB"/>
+          </a:solidFill>
+          <a:ln>
+            <a:noFill/>
+          </a:ln>
+          <a:effectLst/>
+        </p:spPr>
+        <p:style>
+          <a:lnRef idx="1">
+            <a:schemeClr val="accent1"/>
+          </a:lnRef>
+          <a:fillRef idx="3">
+            <a:schemeClr val="accent1"/>
+          </a:fillRef>
+          <a:effectRef idx="2">
+            <a:schemeClr val="accent1"/>
+          </a:effectRef>
+          <a:fontRef idx="minor">
+            <a:schemeClr val="lt1"/>
+          </a:fontRef>
+        </p:style>
+        <p:txBody>
+          <a:bodyPr rtlCol="0" anchor="ctr"/>
+          <a:lstStyle/>
+          <a:p>
+            <a:pPr algn="ctr"/>
+          </a:p>
+        </p:txBody>
+      </p:sp>
+      <p:sp>
+        <p:nvSpPr>
+          <p:cNvPr id="12" name="TextBox 11"/>
+          <p:cNvSpPr txBox="1"/>
+          <p:nvPr/>
+        </p:nvSpPr>
+        <p:spPr>
+          <a:xfrm>
+            <a:off x="6629400" y="1600200"/>
+            <a:ext cx="4846320" cy="4572000"/>
+          </a:xfrm>
+          <a:prstGeom prst="rect">
+            <a:avLst/>
+          </a:prstGeom>
+          <a:noFill/>
+        </p:spPr>
+        <p:txBody>
+          <a:bodyPr wrap="square" anchor="t" lIns="45720" rIns="45720" tIns="27432" bIns="27432">
+            <a:spAutoFit/>
+          </a:bodyPr>
+          <a:lstStyle/>
+          <a:p>
+            <a:pPr algn="l">
+              <a:lnSpc>
+                <a:spcPct val="110000"/>
+              </a:lnSpc>
+              <a:spcAft>
+                <a:spcPts val="100"/>
+              </a:spcAft>
+            </a:pPr>
+            <a:r>
+              <a:rPr sz="1200" b="1">
+                <a:solidFill>
+                  <a:srgbClr val="232754"/>
+                </a:solidFill>
+                <a:latin typeface="Work Sans"/>
+              </a:rPr>
               <a:t>Suite possible</a:t>
             </a:r>
           </a:p>
@@ -19175,7 +24048,7 @@
                 </a:solidFill>
                 <a:latin typeface="Work Sans"/>
               </a:rPr>
-              <a:t>•  Étendre Facebook et TikTok au Nigeria et à la France.</a:t>
+              <a:t>•  Écouter les meilleures vidéos pour mesurer la voix off et le sous-titrage.</a:t>
             </a:r>
           </a:p>
           <a:p>
@@ -19232,7 +24105,7 @@
                 </a:solidFill>
                 <a:latin typeface="Work Sans"/>
               </a:rPr>
-              <a:t>•  Le détail des 763 publications, avec leurs liens, est dans le tableur joint.</a:t>
+              <a:t>•  Le détail des 943 publications, avec leurs liens, est dans le tableur joint.</a:t>
             </a:r>
           </a:p>
         </p:txBody>
@@ -19784,7 +24657,7 @@
                 </a:solidFill>
                 <a:latin typeface="Work Sans"/>
               </a:rPr>
-              <a:t>4. En Côte d'Ivoire et au Sénégal, l'audience est sur TikTok et Facebook.</a:t>
+              <a:t>4. TikTok fait les plus grosses audiences, mais pas pour les mêmes raisons.</a:t>
             </a:r>
           </a:p>
           <a:p>
@@ -19803,7 +24676,7 @@
                 </a:solidFill>
                 <a:latin typeface="Work Sans"/>
               </a:rPr>
-              <a:t>Wave Sénégal : 51 500 vues médianes par vidéo TikTok, contre 207 j'aime en médiane sur Instagram. Juger ces marques sur Instagram seul les sous-estime.</a:t>
+              <a:t>En Côte d'Ivoire et au Sénégal, c'est de l'organique : Wave Sénégal fait 51 500 vues médianes par vidéo. Au Nigeria et en France, les gros chiffres sont surtout payés : sans publicité, Moniepoint fait 9 590 vues médianes, contre 2,4 millions avec.</a:t>
             </a:r>
           </a:p>
           <a:p>
@@ -20246,7 +25119,7 @@
                 </a:solidFill>
                 <a:latin typeface="Work Sans"/>
               </a:rPr>
-              <a:t>Les 15 dernières publications Instagram de 22 marques (330 au total), le 24/10/2026, avec le robot de collecte Apify. Pour 10 marques B2B, les 12 dernières publications LinkedIn (118). Pour 11 marques de Côte d'Ivoire et du Sénégal, les 15 dernières publications Facebook (165) et TikTok (150, sur 10 comptes ; les vidéos épinglées sont exclues des médianes).</a:t>
+              <a:t>Les 15 dernières publications Instagram de 22 marques (330 au total), le 24/10/2026, avec le robot de collecte Apify. Pour 10 marques B2B, les 12 dernières publications LinkedIn (118). Pour les 4 pays, les 15 dernières publications Facebook de 23 pages (345) et TikTok de 19 comptes (285 ; vidéos épinglées exclues des médianes).</a:t>
             </a:r>
           </a:p>
           <a:p>

--- a/benchmark-visuels/2026-10-24_benchmark-visuels-videos.pptx
+++ b/benchmark-visuels/2026-10-24_benchmark-visuels-videos.pptx
@@ -15481,7 +15481,7 @@
                 </a:solidFill>
                 <a:latin typeface="Funnel Display"/>
               </a:rPr>
-              <a:t>TikTok au Nigeria et en France : la puissance vient du payant</a:t>
+              <a:t>TikTok au Nigeria et en France : le payant domine</a:t>
             </a:r>
           </a:p>
         </p:txBody>
@@ -17184,7 +17184,7 @@
                 </a:solidFill>
                 <a:latin typeface="Funnel Display"/>
               </a:rPr>
-              <a:t>Nigeria et France : ce qui marche sur TikTok et Facebook, en images</a:t>
+              <a:t>Nigeria et France : ce qui marche, en images</a:t>
             </a:r>
           </a:p>
         </p:txBody>
